--- a/House_Move_Agent.pptx
+++ b/House_Move_Agent.pptx
@@ -122,25 +122,25 @@
   <p:extLst>
     <p:ext uri="{521415D9-36F7-43E2-AB2F-B90AF26B5E84}">
       <p14:sectionLst xmlns:p14="http://schemas.microsoft.com/office/powerpoint/2010/main">
-        <p14:section name="Opening" id="{3db1a11e-a569-883e-e464-1798b99b14d9}">
+        <p14:section name="Opening" id="{e3ce3f5e-c7dc-5906-812e-facac33aeb09}">
           <p14:sldIdLst>
             <p14:sldId id="256"/>
           </p14:sldIdLst>
         </p14:section>
-        <p14:section name="Problem and solution" id="{4c1c67b0-263b-08dc-9e30-3236753c66e0}">
+        <p14:section name="Problem and solution" id="{43b0011a-9d31-c4bb-1220-efa6a9ebc127}">
           <p14:sldIdLst>
             <p14:sldId id="257"/>
             <p14:sldId id="258"/>
             <p14:sldId id="259"/>
           </p14:sldIdLst>
         </p14:section>
-        <p14:section name="The two AI moments" id="{8739ecba-73d6-783c-cdd1-a8ac8aaed395}">
+        <p14:section name="The two AI moments" id="{bdf31b38-5982-264a-755d-c8bb34a0f1d6}">
           <p14:sldIdLst>
             <p14:sldId id="260"/>
             <p14:sldId id="261"/>
           </p14:sldIdLst>
         </p14:section>
-        <p14:section name="How it works" id="{5b01dbb8-2aa9-a713-2e9a-fa3873378ff6}">
+        <p14:section name="How it works" id="{27d7a6e9-dc75-f9f9-c685-d940d3f45d12}">
           <p14:sldIdLst>
             <p14:sldId id="262"/>
             <p14:sldId id="263"/>
@@ -150,7 +150,7 @@
             <p14:sldId id="267"/>
           </p14:sldIdLst>
         </p14:section>
-        <p14:section name="Results and next steps" id="{001e8a9d-3edb-b776-82f3-f6e239ee0eaa}">
+        <p14:section name="Results and next steps" id="{93f2ee55-bec5-d81f-d38a-908893ee07d7}">
           <p14:sldIdLst>
             <p14:sldId id="268"/>
             <p14:sldId id="269"/>
@@ -914,7 +914,7 @@
           <a:p>
             <a:r>
               <a:rPr lang="en-US" dirty="0"/>
-              <a:t>Each control is enforced by a coded tool, with unit tests, so it holds even if a prompt is ignored. Example: a statement pasted into the chat is refused and the user is sent to the upload page.</a:t>
+              <a:t>Each control is enforced in code and replayed as an attack in test_session_security.py: forged approved state is discarded, another customer's record will not open, tampered tokens are refused. Honest status: making approval customer-confirmed (a code checked against the customer's own message) and splitting reply handling from sending are the next two fixes.</a:t>
             </a:r>
             <a:endParaRPr lang="en-US" dirty="0"/>
           </a:p>
@@ -3042,7 +3042,7 @@
       </p:sp>
       <p:sp>
         <p:nvSpPr>
-          <p:cNvPr id="3" name="Personal data stays out of the LLM"/>
+          <p:cNvPr id="3" name="The server holds the state"/>
           <p:cNvSpPr/>
           <p:nvPr/>
         </p:nvSpPr>
@@ -3064,7 +3064,7 @@
       </p:sp>
       <p:sp>
         <p:nvSpPr>
-          <p:cNvPr id="4" name="Personal data stays out of the LLM circle"/>
+          <p:cNvPr id="4" name="The server holds the state circle"/>
           <p:cNvSpPr/>
           <p:nvPr/>
         </p:nvSpPr>
@@ -3084,7 +3084,7 @@
       </p:sp>
       <p:pic>
         <p:nvPicPr>
-          <p:cNvPr id="5" name="Personal data stays out of the LLM icon" descr="preencoded.png">    </p:cNvPr>
+          <p:cNvPr id="5" name="The server holds the state icon" descr="preencoded.png">    </p:cNvPr>
           <p:cNvPicPr>
             <a:picLocks noChangeAspect="1"/>
           </p:cNvPicPr>
@@ -3136,7 +3136,7 @@
                   <a:schemeClr val="tx2"/>
                 </a:solidFill>
               </a:rPr>
-              <a:t>Personal data stays out of the LLM</a:t>
+              <a:t>The server holds the state</a:t>
             </a:r>
             <a:endParaRPr lang="en-US" sz="1700" dirty="0"/>
           </a:p>
@@ -3172,7 +3172,7 @@
                   <a:schemeClr val="tx1"/>
                 </a:solidFill>
               </a:rPr>
-              <a:t>Drafts use {{placeholders}} filled in by code at send time</a:t>
+              <a:t>The client only holds a signed session; any state it sends is discarded</a:t>
             </a:r>
             <a:endParaRPr lang="en-US" sz="1400" dirty="0"/>
           </a:p>
@@ -3180,7 +3180,7 @@
       </p:sp>
       <p:sp>
         <p:nvSpPr>
-          <p:cNvPr id="8" name="Nothing sent without approval"/>
+          <p:cNvPr id="8" name="You open only your own case"/>
           <p:cNvSpPr/>
           <p:nvPr/>
         </p:nvSpPr>
@@ -3202,7 +3202,7 @@
       </p:sp>
       <p:sp>
         <p:nvSpPr>
-          <p:cNvPr id="9" name="Nothing sent without approval circle"/>
+          <p:cNvPr id="9" name="You open only your own case circle"/>
           <p:cNvSpPr/>
           <p:nvPr/>
         </p:nvSpPr>
@@ -3222,7 +3222,7 @@
       </p:sp>
       <p:pic>
         <p:nvPicPr>
-          <p:cNvPr id="10" name="Nothing sent without approval icon" descr="preencoded.png">    </p:cNvPr>
+          <p:cNvPr id="10" name="You open only your own case icon" descr="preencoded.png">    </p:cNvPr>
           <p:cNvPicPr>
             <a:picLocks noChangeAspect="1"/>
           </p:cNvPicPr>
@@ -3274,7 +3274,7 @@
                   <a:schemeClr val="tx2"/>
                 </a:solidFill>
               </a:rPr>
-              <a:t>Nothing sent without approval</a:t>
+              <a:t>You open only your own case</a:t>
             </a:r>
             <a:endParaRPr lang="en-US" sz="1700" dirty="0"/>
           </a:p>
@@ -3310,7 +3310,7 @@
                   <a:schemeClr val="tx1"/>
                 </a:solidFill>
               </a:rPr>
-              <a:t>The send tools refuse anything not approved by the customer</a:t>
+              <a:t>Signed sessions, ownership checks and unguessable case IDs</a:t>
             </a:r>
             <a:endParaRPr lang="en-US" sz="1400" dirty="0"/>
           </a:p>
@@ -3318,7 +3318,7 @@
       </p:sp>
       <p:sp>
         <p:nvSpPr>
-          <p:cNvPr id="13" name="Every action audited"/>
+          <p:cNvPr id="13" name="Personal data stays out of the LLM"/>
           <p:cNvSpPr/>
           <p:nvPr/>
         </p:nvSpPr>
@@ -3340,7 +3340,7 @@
       </p:sp>
       <p:sp>
         <p:nvSpPr>
-          <p:cNvPr id="14" name="Every action audited circle"/>
+          <p:cNvPr id="14" name="Personal data stays out of the LLM circle"/>
           <p:cNvSpPr/>
           <p:nvPr/>
         </p:nvSpPr>
@@ -3360,7 +3360,7 @@
       </p:sp>
       <p:pic>
         <p:nvPicPr>
-          <p:cNvPr id="15" name="Every action audited icon" descr="preencoded.png">    </p:cNvPr>
+          <p:cNvPr id="15" name="Personal data stays out of the LLM icon" descr="preencoded.png">    </p:cNvPr>
           <p:cNvPicPr>
             <a:picLocks noChangeAspect="1"/>
           </p:cNvPicPr>
@@ -3412,7 +3412,7 @@
                   <a:schemeClr val="tx2"/>
                 </a:solidFill>
               </a:rPr>
-              <a:t>Every action audited</a:t>
+              <a:t>Personal data stays out of the LLM</a:t>
             </a:r>
             <a:endParaRPr lang="en-US" sz="1700" dirty="0"/>
           </a:p>
@@ -3448,7 +3448,7 @@
                   <a:schemeClr val="tx1"/>
                 </a:solidFill>
               </a:rPr>
-              <a:t>Approvals, sends, replans, replies and deletions, with IDs only</a:t>
+              <a:t>Drafts use {{placeholders}} filled in by code at send time</a:t>
             </a:r>
             <a:endParaRPr lang="en-US" sz="1400" dirty="0"/>
           </a:p>
@@ -3456,7 +3456,7 @@
       </p:sp>
       <p:sp>
         <p:nvSpPr>
-          <p:cNvPr id="18" name="Statements kept out of the chat"/>
+          <p:cNvPr id="18" name="Encrypted at rest"/>
           <p:cNvSpPr/>
           <p:nvPr/>
         </p:nvSpPr>
@@ -3478,7 +3478,7 @@
       </p:sp>
       <p:sp>
         <p:nvSpPr>
-          <p:cNvPr id="19" name="Statements kept out of the chat circle"/>
+          <p:cNvPr id="19" name="Encrypted at rest circle"/>
           <p:cNvSpPr/>
           <p:nvPr/>
         </p:nvSpPr>
@@ -3498,7 +3498,7 @@
       </p:sp>
       <p:pic>
         <p:nvPicPr>
-          <p:cNvPr id="20" name="Statements kept out of the chat icon" descr="preencoded.png">    </p:cNvPr>
+          <p:cNvPr id="20" name="Encrypted at rest icon" descr="preencoded.png">    </p:cNvPr>
           <p:cNvPicPr>
             <a:picLocks noChangeAspect="1"/>
           </p:cNvPicPr>
@@ -3550,7 +3550,7 @@
                   <a:schemeClr val="tx2"/>
                 </a:solidFill>
               </a:rPr>
-              <a:t>Statements kept out of the chat</a:t>
+              <a:t>Encrypted at rest</a:t>
             </a:r>
             <a:endParaRPr lang="en-US" sz="1700" dirty="0"/>
           </a:p>
@@ -3586,7 +3586,7 @@
                   <a:schemeClr val="tx1"/>
                 </a:solidFill>
               </a:rPr>
-              <a:t>A separate upload page; files are read once, then deleted</a:t>
+              <a:t>Plan state and personal details encrypted; delete on request</a:t>
             </a:r>
             <a:endParaRPr lang="en-US" sz="1400" dirty="0"/>
           </a:p>
@@ -3594,7 +3594,7 @@
       </p:sp>
       <p:sp>
         <p:nvSpPr>
-          <p:cNvPr id="23" name="Encrypted case store"/>
+          <p:cNvPr id="23" name="Statements kept out of the chat"/>
           <p:cNvSpPr/>
           <p:nvPr/>
         </p:nvSpPr>
@@ -3616,7 +3616,7 @@
       </p:sp>
       <p:sp>
         <p:nvSpPr>
-          <p:cNvPr id="24" name="Encrypted case store circle"/>
+          <p:cNvPr id="24" name="Statements kept out of the chat circle"/>
           <p:cNvSpPr/>
           <p:nvPr/>
         </p:nvSpPr>
@@ -3636,7 +3636,7 @@
       </p:sp>
       <p:pic>
         <p:nvPicPr>
-          <p:cNvPr id="25" name="Encrypted case store icon" descr="preencoded.png">    </p:cNvPr>
+          <p:cNvPr id="25" name="Statements kept out of the chat icon" descr="preencoded.png">    </p:cNvPr>
           <p:cNvPicPr>
             <a:picLocks noChangeAspect="1"/>
           </p:cNvPicPr>
@@ -3688,7 +3688,7 @@
                   <a:schemeClr val="tx2"/>
                 </a:solidFill>
               </a:rPr>
-              <a:t>Encrypted case store</a:t>
+              <a:t>Statements kept out of the chat</a:t>
             </a:r>
             <a:endParaRPr lang="en-US" sz="1700" dirty="0"/>
           </a:p>
@@ -3724,7 +3724,7 @@
                   <a:schemeClr val="tx1"/>
                 </a:solidFill>
               </a:rPr>
-              <a:t>Names, addresses and email encrypted per field; delete on request</a:t>
+              <a:t>Uploaded to your own folder, read once, then deleted</a:t>
             </a:r>
             <a:endParaRPr lang="en-US" sz="1400" dirty="0"/>
           </a:p>
@@ -5708,7 +5708,7 @@
                 <a:ea typeface="Cambria" pitchFamily="34" charset="-122"/>
                 <a:cs typeface="Cambria" pitchFamily="34" charset="-120"/>
               </a:rPr>
-              <a:t>61</a:t>
+              <a:t>70</a:t>
             </a:r>
             <a:endParaRPr lang="en-US" sz="5400" dirty="0"/>
           </a:p>
@@ -8645,7 +8645,7 @@
                   <a:schemeClr val="tx1"/>
                 </a:solidFill>
               </a:rPr>
-              <a:t>Nothing goes out without your own words of consent</a:t>
+              <a:t>Nothing goes out until the server has it approved</a:t>
             </a:r>
             <a:endParaRPr lang="en-US" sz="1400" dirty="0"/>
           </a:p>

--- a/House_Move_Agent.pptx
+++ b/House_Move_Agent.pptx
@@ -122,25 +122,25 @@
   <p:extLst>
     <p:ext uri="{521415D9-36F7-43E2-AB2F-B90AF26B5E84}">
       <p14:sectionLst xmlns:p14="http://schemas.microsoft.com/office/powerpoint/2010/main">
-        <p14:section name="Opening" id="{e3ce3f5e-c7dc-5906-812e-facac33aeb09}">
+        <p14:section name="Opening" id="{6923acea-2c84-9b14-5539-e0bb9da4e5e1}">
           <p14:sldIdLst>
             <p14:sldId id="256"/>
           </p14:sldIdLst>
         </p14:section>
-        <p14:section name="Problem and solution" id="{43b0011a-9d31-c4bb-1220-efa6a9ebc127}">
+        <p14:section name="Problem and solution" id="{4c2a3e03-4446-291e-a762-1aa9d5089aa4}">
           <p14:sldIdLst>
             <p14:sldId id="257"/>
             <p14:sldId id="258"/>
             <p14:sldId id="259"/>
           </p14:sldIdLst>
         </p14:section>
-        <p14:section name="The two AI moments" id="{bdf31b38-5982-264a-755d-c8bb34a0f1d6}">
+        <p14:section name="The two AI moments" id="{c944c1eb-4848-9a0c-6e48-df6403e2c2b3}">
           <p14:sldIdLst>
             <p14:sldId id="260"/>
             <p14:sldId id="261"/>
           </p14:sldIdLst>
         </p14:section>
-        <p14:section name="How it works" id="{27d7a6e9-dc75-f9f9-c685-d940d3f45d12}">
+        <p14:section name="How it works" id="{a9c8074b-71c7-25a6-5cf6-4badad5de0db}">
           <p14:sldIdLst>
             <p14:sldId id="262"/>
             <p14:sldId id="263"/>
@@ -150,7 +150,7 @@
             <p14:sldId id="267"/>
           </p14:sldIdLst>
         </p14:section>
-        <p14:section name="Results and next steps" id="{93f2ee55-bec5-d81f-d38a-908893ee07d7}">
+        <p14:section name="Results and next steps" id="{f50098be-5d4a-a6bf-8b38-6a2020ad43b7}">
           <p14:sldIdLst>
             <p14:sldId id="268"/>
             <p14:sldId id="269"/>
@@ -914,7 +914,7 @@
           <a:p>
             <a:r>
               <a:rPr lang="en-US" dirty="0"/>
-              <a:t>Each control is enforced in code and replayed as an attack in test_session_security.py: forged approved state is discarded, another customer's record will not open, tampered tokens are refused. Honest status: making approval customer-confirmed (a code checked against the customer's own message) and splitting reply handling from sending are the next two fixes.</a:t>
+              <a:t>Each control is enforced in code and replayed as an attack in test_session_security.py: forged approved state is discarded, another customer's record will not open, tampered tokens are refused. Approvals, imports and deletions need a one-time code the customer types; middleware records their real message and the tool checks it, so an LLM or an injected provider reply cannot approve. Next fix: move reply handling into an agent with no send tools.</a:t>
             </a:r>
             <a:endParaRPr lang="en-US" dirty="0"/>
           </a:p>
@@ -3732,7 +3732,7 @@
       </p:sp>
       <p:sp>
         <p:nvSpPr>
-          <p:cNvPr id="28" name="Sourced rules"/>
+          <p:cNvPr id="28" name="Consent the LLM cannot fake"/>
           <p:cNvSpPr/>
           <p:nvPr/>
         </p:nvSpPr>
@@ -3754,7 +3754,7 @@
       </p:sp>
       <p:sp>
         <p:nvSpPr>
-          <p:cNvPr id="29" name="Sourced rules circle"/>
+          <p:cNvPr id="29" name="Consent the LLM cannot fake circle"/>
           <p:cNvSpPr/>
           <p:nvPr/>
         </p:nvSpPr>
@@ -3774,7 +3774,7 @@
       </p:sp>
       <p:pic>
         <p:nvPicPr>
-          <p:cNvPr id="30" name="Sourced rules icon" descr="preencoded.png">    </p:cNvPr>
+          <p:cNvPr id="30" name="Consent the LLM cannot fake icon" descr="preencoded.png">    </p:cNvPr>
           <p:cNvPicPr>
             <a:picLocks noChangeAspect="1"/>
           </p:cNvPicPr>
@@ -3826,7 +3826,7 @@
                   <a:schemeClr val="tx2"/>
                 </a:solidFill>
               </a:rPr>
-              <a:t>Sourced rules</a:t>
+              <a:t>Consent the LLM cannot fake</a:t>
             </a:r>
             <a:endParaRPr lang="en-US" sz="1700" dirty="0"/>
           </a:p>
@@ -3862,7 +3862,7 @@
                   <a:schemeClr val="tx1"/>
                 </a:solidFill>
               </a:rPr>
-              <a:t>20 of 23 rules checked against gov.uk and other official sources</a:t>
+              <a:t>Approvals need a one-time code the customer types; checked in code</a:t>
             </a:r>
             <a:endParaRPr lang="en-US" sz="1400" dirty="0"/>
           </a:p>
@@ -5708,7 +5708,7 @@
                 <a:ea typeface="Cambria" pitchFamily="34" charset="-122"/>
                 <a:cs typeface="Cambria" pitchFamily="34" charset="-120"/>
               </a:rPr>
-              <a:t>70</a:t>
+              <a:t>77</a:t>
             </a:r>
             <a:endParaRPr lang="en-US" sz="5400" dirty="0"/>
           </a:p>
@@ -8645,7 +8645,7 @@
                   <a:schemeClr val="tx1"/>
                 </a:solidFill>
               </a:rPr>
-              <a:t>Nothing goes out until the server has it approved</a:t>
+              <a:t>You confirm with a one-time code you type yourself</a:t>
             </a:r>
             <a:endParaRPr lang="en-US" sz="1400" dirty="0"/>
           </a:p>

--- a/House_Move_Agent.pptx
+++ b/House_Move_Agent.pptx
@@ -122,25 +122,25 @@
   <p:extLst>
     <p:ext uri="{521415D9-36F7-43E2-AB2F-B90AF26B5E84}">
       <p14:sectionLst xmlns:p14="http://schemas.microsoft.com/office/powerpoint/2010/main">
-        <p14:section name="Opening" id="{6923acea-2c84-9b14-5539-e0bb9da4e5e1}">
+        <p14:section name="Opening" id="{c41c606d-0ff6-89f4-a067-79e2d1377021}">
           <p14:sldIdLst>
             <p14:sldId id="256"/>
           </p14:sldIdLst>
         </p14:section>
-        <p14:section name="Problem and solution" id="{4c2a3e03-4446-291e-a762-1aa9d5089aa4}">
+        <p14:section name="Problem and solution" id="{fb938f56-d9ff-d97c-7831-46d0da6e472a}">
           <p14:sldIdLst>
             <p14:sldId id="257"/>
             <p14:sldId id="258"/>
             <p14:sldId id="259"/>
           </p14:sldIdLst>
         </p14:section>
-        <p14:section name="The two AI moments" id="{c944c1eb-4848-9a0c-6e48-df6403e2c2b3}">
+        <p14:section name="The two AI moments" id="{7f368d55-436b-bb54-9686-9bcc98278901}">
           <p14:sldIdLst>
             <p14:sldId id="260"/>
             <p14:sldId id="261"/>
           </p14:sldIdLst>
         </p14:section>
-        <p14:section name="How it works" id="{a9c8074b-71c7-25a6-5cf6-4badad5de0db}">
+        <p14:section name="How it works" id="{8fbcc18c-b759-de5d-d168-d9374675a540}">
           <p14:sldIdLst>
             <p14:sldId id="262"/>
             <p14:sldId id="263"/>
@@ -150,7 +150,7 @@
             <p14:sldId id="267"/>
           </p14:sldIdLst>
         </p14:section>
-        <p14:section name="Results and next steps" id="{f50098be-5d4a-a6bf-8b38-6a2020ad43b7}">
+        <p14:section name="Results and next steps" id="{c35f549e-c087-50b4-0819-7ca90f8aaf6f}">
           <p14:sldIdLst>
             <p14:sldId id="268"/>
             <p14:sldId id="269"/>
@@ -914,7 +914,7 @@
           <a:p>
             <a:r>
               <a:rPr lang="en-US" dirty="0"/>
-              <a:t>Each control is enforced in code and replayed as an attack in test_session_security.py: forged approved state is discarded, another customer's record will not open, tampered tokens are refused. Approvals, imports and deletions need a one-time code the customer types; middleware records their real message and the tool checks it, so an LLM or an injected provider reply cannot approve. Next fix: move reply handling into an agent with no send tools.</a:t>
+              <a:t>Each control is enforced in code and replayed as an attack in test_session_security.py: forged approved state is discarded, another customer's record will not open, tampered tokens are refused. Approvals, imports and deletions need a one-time code the customer types; middleware records their real message and the tool checks it, so an LLM or an injected provider reply cannot approve. Provider replies are read only by reply_agent, which has no approve or send tools.</a:t>
             </a:r>
             <a:endParaRPr lang="en-US" dirty="0"/>
           </a:p>
@@ -2146,7 +2146,7 @@
           <a:p>
             <a:r>
               <a:rPr lang="en-US" dirty="0"/>
-              <a:t>13 LLM agents and 26 coded tools. The coordinator is the only agent the customer talks to. Pipeline agents are called in order; the four specialists use AAOSA. Every deadline, fee, send and date change runs through a coded tool, not the LLM.</a:t>
+              <a:t>14 LLM agents and 27 coded tools. The coordinator is the only agent the customer talks to. Pipeline agents are called in order; the four specialists use AAOSA. Every deadline, fee, send and date change runs through a coded tool, not the LLM.</a:t>
             </a:r>
             <a:endParaRPr lang="en-US" dirty="0"/>
           </a:p>
@@ -2927,7 +2927,7 @@
                   <a:schemeClr val="bg2"/>
                 </a:solidFill>
               </a:rPr>
-              <a:t>Multi-agent assistant built on Neuro SAN  ·  13 agents  ·  synthetic data</a:t>
+              <a:t>Multi-agent assistant built on Neuro SAN  ·  14 agents  ·  synthetic data</a:t>
             </a:r>
             <a:endParaRPr lang="en-US" sz="1400" dirty="0"/>
           </a:p>
@@ -5417,7 +5417,7 @@
                 <a:ea typeface="Cambria" pitchFamily="34" charset="-122"/>
                 <a:cs typeface="Cambria" pitchFamily="34" charset="-120"/>
               </a:rPr>
-              <a:t>13</a:t>
+              <a:t>14</a:t>
             </a:r>
             <a:endParaRPr lang="en-US" sz="5400" dirty="0"/>
           </a:p>
@@ -5514,7 +5514,7 @@
                 <a:ea typeface="Cambria" pitchFamily="34" charset="-122"/>
                 <a:cs typeface="Cambria" pitchFamily="34" charset="-120"/>
               </a:rPr>
-              <a:t>26</a:t>
+              <a:t>27</a:t>
             </a:r>
             <a:endParaRPr lang="en-US" sz="5400" dirty="0"/>
           </a:p>
@@ -5708,7 +5708,7 @@
                 <a:ea typeface="Cambria" pitchFamily="34" charset="-122"/>
                 <a:cs typeface="Cambria" pitchFamily="34" charset="-120"/>
               </a:rPr>
-              <a:t>77</a:t>
+              <a:t>82</a:t>
             </a:r>
             <a:endParaRPr lang="en-US" sz="5400" dirty="0"/>
           </a:p>
@@ -11419,7 +11419,7 @@
                   <a:schemeClr val="tx2"/>
                 </a:solidFill>
               </a:rPr>
-              <a:t>13 agents on Neuro SAN, 26 coded tools</a:t>
+              <a:t>14 agents on Neuro SAN, 27 coded tools</a:t>
             </a:r>
             <a:endParaRPr lang="en-US" sz="3400" dirty="0"/>
           </a:p>
@@ -11848,7 +11848,7 @@
                   <a:schemeClr val="tx1"/>
                 </a:solidFill>
               </a:rPr>
-              <a:t>comms (drafts) · tracker (approve, send, replan, replies)</a:t>
+              <a:t>comms (drafts) · tracker (approval codes, send, replan) · reply agent</a:t>
             </a:r>
             <a:endParaRPr lang="en-US" sz="1800" dirty="0"/>
           </a:p>
@@ -12048,7 +12048,7 @@
                 <a:gridCol w="4114800"/>
                 <a:gridCol w="4572000"/>
               </a:tblGrid>
-              <a:tr h="329184">
+              <a:tr h="301752">
                 <a:tc>
                   <a:txBody>
                     <a:bodyPr/>
@@ -12161,7 +12161,7 @@
                   </a:tcPr>
                 </a:tc>
               </a:tr>
-              <a:tr h="329184">
+              <a:tr h="301752">
                 <a:tc>
                   <a:txBody>
                     <a:bodyPr/>
@@ -12274,7 +12274,7 @@
                   </a:tcPr>
                 </a:tc>
               </a:tr>
-              <a:tr h="329184">
+              <a:tr h="301752">
                 <a:tc>
                   <a:txBody>
                     <a:bodyPr/>
@@ -12387,7 +12387,7 @@
                   </a:tcPr>
                 </a:tc>
               </a:tr>
-              <a:tr h="329184">
+              <a:tr h="301752">
                 <a:tc>
                   <a:txBody>
                     <a:bodyPr/>
@@ -12500,7 +12500,7 @@
                   </a:tcPr>
                 </a:tc>
               </a:tr>
-              <a:tr h="329184">
+              <a:tr h="301752">
                 <a:tc>
                   <a:txBody>
                     <a:bodyPr/>
@@ -12613,7 +12613,7 @@
                   </a:tcPr>
                 </a:tc>
               </a:tr>
-              <a:tr h="329184">
+              <a:tr h="301752">
                 <a:tc>
                   <a:txBody>
                     <a:bodyPr/>
@@ -12726,7 +12726,7 @@
                   </a:tcPr>
                 </a:tc>
               </a:tr>
-              <a:tr h="329184">
+              <a:tr h="301752">
                 <a:tc>
                   <a:txBody>
                     <a:bodyPr/>
@@ -12839,7 +12839,7 @@
                   </a:tcPr>
                 </a:tc>
               </a:tr>
-              <a:tr h="329184">
+              <a:tr h="301752">
                 <a:tc>
                   <a:txBody>
                     <a:bodyPr/>
@@ -12952,7 +12952,7 @@
                   </a:tcPr>
                 </a:tc>
               </a:tr>
-              <a:tr h="329184">
+              <a:tr h="301752">
                 <a:tc>
                   <a:txBody>
                     <a:bodyPr/>
@@ -13065,7 +13065,7 @@
                   </a:tcPr>
                 </a:tc>
               </a:tr>
-              <a:tr h="329184">
+              <a:tr h="301752">
                 <a:tc>
                   <a:txBody>
                     <a:bodyPr/>
@@ -13178,7 +13178,7 @@
                   </a:tcPr>
                 </a:tc>
               </a:tr>
-              <a:tr h="329184">
+              <a:tr h="301752">
                 <a:tc>
                   <a:txBody>
                     <a:bodyPr/>
@@ -13291,7 +13291,7 @@
                   </a:tcPr>
                 </a:tc>
               </a:tr>
-              <a:tr h="329184">
+              <a:tr h="301752">
                 <a:tc>
                   <a:txBody>
                     <a:bodyPr/>
@@ -13404,7 +13404,7 @@
                   </a:tcPr>
                 </a:tc>
               </a:tr>
-              <a:tr h="329184">
+              <a:tr h="301752">
                 <a:tc>
                   <a:txBody>
                     <a:bodyPr/>
@@ -13517,7 +13517,7 @@
                   </a:tcPr>
                 </a:tc>
               </a:tr>
-              <a:tr h="329184">
+              <a:tr h="301752">
                 <a:tc>
                   <a:txBody>
                     <a:bodyPr/>
@@ -13569,7 +13569,7 @@
                             <a:schemeClr val="tx1"/>
                           </a:solidFill>
                         </a:rPr>
-                        <a:t>AI moment 2: approve, send, replan, replies</a:t>
+                        <a:t>AI moment 2: approval codes, send, replan, audit</a:t>
                       </a:r>
                       <a:endParaRPr lang="en-US" sz="1400" dirty="0"/>
                     </a:p>
@@ -13606,7 +13606,7 @@
                             <a:schemeClr val="accent5"/>
                           </a:solidFill>
                         </a:rPr>
-                        <a:t>approve_drafts, send_notification, plan_corrections</a:t>
+                        <a:t>request_approval, confirm_with_code, send_notification</a:t>
                       </a:r>
                       <a:endParaRPr lang="en-US" sz="1400" dirty="0"/>
                     </a:p>
@@ -13626,6 +13626,119 @@
                     </a:lnB>
                     <a:solidFill>
                       <a:schemeClr val="bg2"/>
+                    </a:solidFill>
+                  </a:tcPr>
+                </a:tc>
+              </a:tr>
+              <a:tr h="301752">
+                <a:tc>
+                  <a:txBody>
+                    <a:bodyPr/>
+                    <a:lstStyle/>
+                    <a:p>
+                      <a:pPr indent="0" marL="0">
+                        <a:buNone/>
+                      </a:pPr>
+                      <a:r>
+                        <a:rPr lang="en-US" sz="1400" b="1" dirty="0">
+                          <a:solidFill>
+                            <a:schemeClr val="tx2"/>
+                          </a:solidFill>
+                        </a:rPr>
+                        <a:t>reply_agent</a:t>
+                      </a:r>
+                      <a:endParaRPr lang="en-US" sz="1400" dirty="0"/>
+                    </a:p>
+                  </a:txBody>
+                  <a:tcPr marL="73152" marR="73152" marT="0" marB="0" anchor="ctr">
+                    <a:lnL w="0" cap="flat" cmpd="sng" algn="ctr">
+                      <a:noFill/>
+                    </a:lnL>
+                    <a:lnR w="0" cap="flat" cmpd="sng" algn="ctr">
+                      <a:noFill/>
+                    </a:lnR>
+                    <a:lnT w="0" cap="flat" cmpd="sng" algn="ctr">
+                      <a:noFill/>
+                    </a:lnT>
+                    <a:lnB w="0" cap="flat" cmpd="sng" algn="ctr">
+                      <a:noFill/>
+                    </a:lnB>
+                    <a:solidFill>
+                      <a:schemeClr val="bg1"/>
+                    </a:solidFill>
+                  </a:tcPr>
+                </a:tc>
+                <a:tc>
+                  <a:txBody>
+                    <a:bodyPr/>
+                    <a:lstStyle/>
+                    <a:p>
+                      <a:pPr indent="0" marL="0">
+                        <a:buNone/>
+                      </a:pPr>
+                      <a:r>
+                        <a:rPr lang="en-US" sz="1400" dirty="0">
+                          <a:solidFill>
+                            <a:schemeClr val="tx1"/>
+                          </a:solidFill>
+                        </a:rPr>
+                        <a:t>Reads provider replies; no approve or send tools</a:t>
+                      </a:r>
+                      <a:endParaRPr lang="en-US" sz="1400" dirty="0"/>
+                    </a:p>
+                  </a:txBody>
+                  <a:tcPr marL="73152" marR="73152" marT="0" marB="0" anchor="ctr">
+                    <a:lnL w="0" cap="flat" cmpd="sng" algn="ctr">
+                      <a:noFill/>
+                    </a:lnL>
+                    <a:lnR w="0" cap="flat" cmpd="sng" algn="ctr">
+                      <a:noFill/>
+                    </a:lnR>
+                    <a:lnT w="0" cap="flat" cmpd="sng" algn="ctr">
+                      <a:noFill/>
+                    </a:lnT>
+                    <a:lnB w="0" cap="flat" cmpd="sng" algn="ctr">
+                      <a:noFill/>
+                    </a:lnB>
+                    <a:solidFill>
+                      <a:schemeClr val="bg1"/>
+                    </a:solidFill>
+                  </a:tcPr>
+                </a:tc>
+                <a:tc>
+                  <a:txBody>
+                    <a:bodyPr/>
+                    <a:lstStyle/>
+                    <a:p>
+                      <a:pPr indent="0" marL="0">
+                        <a:buNone/>
+                      </a:pPr>
+                      <a:r>
+                        <a:rPr lang="en-US" sz="1400" dirty="0">
+                          <a:solidFill>
+                            <a:schemeClr val="accent5"/>
+                          </a:solidFill>
+                        </a:rPr>
+                        <a:t>check_inbox, record_reply</a:t>
+                      </a:r>
+                      <a:endParaRPr lang="en-US" sz="1400" dirty="0"/>
+                    </a:p>
+                  </a:txBody>
+                  <a:tcPr marL="73152" marR="73152" marT="0" marB="0" anchor="ctr">
+                    <a:lnL w="0" cap="flat" cmpd="sng" algn="ctr">
+                      <a:noFill/>
+                    </a:lnL>
+                    <a:lnR w="0" cap="flat" cmpd="sng" algn="ctr">
+                      <a:noFill/>
+                    </a:lnR>
+                    <a:lnT w="0" cap="flat" cmpd="sng" algn="ctr">
+                      <a:noFill/>
+                    </a:lnT>
+                    <a:lnB w="0" cap="flat" cmpd="sng" algn="ctr">
+                      <a:noFill/>
+                    </a:lnB>
+                    <a:solidFill>
+                      <a:schemeClr val="bg1"/>
                     </a:solidFill>
                   </a:tcPr>
                 </a:tc>

--- a/House_Move_Agent.pptx
+++ b/House_Move_Agent.pptx
@@ -21,9 +21,10 @@
     <p:sldId id="269" r:id="rId15"/>
     <p:sldId id="270" r:id="rId16"/>
     <p:sldId id="271" r:id="rId17"/>
+    <p:sldId id="272" r:id="rId18"/>
   </p:sldIdLst>
   <p:notesMasterIdLst>
-    <p:notesMasterId r:id="rId18"/>
+    <p:notesMasterId r:id="rId19"/>
   </p:notesMasterIdLst>
   <p:sldSz cx="12192000" cy="6858000"/>
   <p:notesSz cx="6858000" cy="12192000"/>
@@ -122,25 +123,25 @@
   <p:extLst>
     <p:ext uri="{521415D9-36F7-43E2-AB2F-B90AF26B5E84}">
       <p14:sectionLst xmlns:p14="http://schemas.microsoft.com/office/powerpoint/2010/main">
-        <p14:section name="Opening" id="{c41c606d-0ff6-89f4-a067-79e2d1377021}">
+        <p14:section name="Opening" id="{c9f73559-486e-cb1d-5eb8-e72a273e22c9}">
           <p14:sldIdLst>
             <p14:sldId id="256"/>
           </p14:sldIdLst>
         </p14:section>
-        <p14:section name="Problem and solution" id="{fb938f56-d9ff-d97c-7831-46d0da6e472a}">
+        <p14:section name="Problem and solution" id="{06f2789e-1c5f-001a-3509-e3f351f4bd9c}">
           <p14:sldIdLst>
             <p14:sldId id="257"/>
             <p14:sldId id="258"/>
             <p14:sldId id="259"/>
           </p14:sldIdLst>
         </p14:section>
-        <p14:section name="The two AI moments" id="{7f368d55-436b-bb54-9686-9bcc98278901}">
+        <p14:section name="The two AI moments" id="{59aa4c55-cd12-2416-f8ed-a3cdd3423c95}">
           <p14:sldIdLst>
             <p14:sldId id="260"/>
             <p14:sldId id="261"/>
           </p14:sldIdLst>
         </p14:section>
-        <p14:section name="How it works" id="{8fbcc18c-b759-de5d-d168-d9374675a540}">
+        <p14:section name="How it works" id="{60ea59f4-40d7-b79c-bcf4-22b0a42a604d}">
           <p14:sldIdLst>
             <p14:sldId id="262"/>
             <p14:sldId id="263"/>
@@ -148,14 +149,15 @@
             <p14:sldId id="265"/>
             <p14:sldId id="266"/>
             <p14:sldId id="267"/>
+            <p14:sldId id="268"/>
           </p14:sldIdLst>
         </p14:section>
-        <p14:section name="Results and next steps" id="{c35f549e-c087-50b4-0819-7ca90f8aaf6f}">
+        <p14:section name="Results and next steps" id="{83a8bb52-d35b-1eec-4a11-c82ae9ea0263}">
           <p14:sldIdLst>
-            <p14:sldId id="268"/>
             <p14:sldId id="269"/>
             <p14:sldId id="270"/>
             <p14:sldId id="271"/>
+            <p14:sldId id="272"/>
           </p14:sldIdLst>
         </p14:section>
       </p14:sectionLst>
@@ -914,7 +916,7 @@
           <a:p>
             <a:r>
               <a:rPr lang="en-US" dirty="0"/>
-              <a:t>Each control is enforced in code and replayed as an attack in test_session_security.py: forged approved state is discarded, another customer's record will not open, tampered tokens are refused. Approvals, imports and deletions need a one-time code the customer types; middleware records their real message and the tool checks it, so an LLM or an injected provider reply cannot approve. Provider replies are read only by reply_agent, which has no approve or send tools.</a:t>
+              <a:t>Each control is enforced in code and replayed as an attack in test_session_security.py: forged approved state is discarded, another customer's record will not open, tampered tokens are refused. Approvals, imports and deletions need a one-time code the customer types; middleware records their real message and the tool checks it, so an LLM or an injected provider reply cannot approve. Provider replies are read only by reply_agent, which has no approve or send tools. On the portal, approval comes from the customer's own signed-in browser, so no LLM is involved; it is tied to the exact wording they read.</a:t>
             </a:r>
             <a:endParaRPr lang="en-US" dirty="0"/>
           </a:p>
@@ -1002,7 +1004,7 @@
           <a:p>
             <a:r>
               <a:rPr lang="en-US" dirty="0"/>
-              <a:t>Without these rules a Belfast to Leeds move would have been told to contact 'Belfast council tax', which does not exist: Northern Ireland uses domestic rates.</a:t>
+              <a:t>The status page reads the same server-side case the agents use, under the same ownership rules. Approving there takes the owner's lock (shared with the agent server through a file lock) and records the fingerprint of the draft the customer opened, which send_notification checks. Codes are never shown here.</a:t>
             </a:r>
             <a:endParaRPr lang="en-US" dirty="0"/>
           </a:p>
@@ -1090,7 +1092,7 @@
           <a:p>
             <a:r>
               <a:rPr lang="en-US" dirty="0"/>
-              <a:t>Real public data, no API keys. GP practices and phone numbers come live from the NHS; schools from the Department for Education's register, rebuilt daily if needed.</a:t>
+              <a:t>Without these rules a Belfast to Leeds move would have been told to contact 'Belfast council tax', which does not exist: Northern Ireland uses domestic rates.</a:t>
             </a:r>
             <a:endParaRPr lang="en-US" dirty="0"/>
           </a:p>
@@ -1178,7 +1180,7 @@
           <a:p>
             <a:r>
               <a:rPr lang="en-US" dirty="0"/>
-              <a:t>Every number is from the repository: agents and tools in the network file, rules in obligations_rules.json, tests from pytest.</a:t>
+              <a:t>Real public data, no API keys. GP practices and phone numbers come live from the NHS; schools from the Department for Education's register, rebuilt daily if needed.</a:t>
             </a:r>
             <a:endParaRPr lang="en-US" dirty="0"/>
           </a:p>
@@ -1266,7 +1268,7 @@
           <a:p>
             <a:r>
               <a:rPr lang="en-US" dirty="0"/>
-              <a:t>Be explicit that these are pilot metrics. The insurance offer is opt-in, labelled indicative and never pre-selected.</a:t>
+              <a:t>Every number is from the repository: agents and tools in the network file, rules in obligations_rules.json, tests from pytest.</a:t>
             </a:r>
             <a:endParaRPr lang="en-US" dirty="0"/>
           </a:p>
@@ -1354,7 +1356,7 @@
           <a:p>
             <a:r>
               <a:rPr lang="en-US" dirty="0"/>
-              <a:t>Open Banking is first because it restores the strongest feature, automatic account references, for customers of any bank.</a:t>
+              <a:t>Be explicit that these are pilot metrics. The insurance offer is opt-in, labelled indicative and never pre-selected.</a:t>
             </a:r>
             <a:endParaRPr lang="en-US" dirty="0"/>
           </a:p>
@@ -1442,7 +1444,7 @@
           <a:p>
             <a:r>
               <a:rPr lang="en-US" dirty="0"/>
-              <a:t>Demo order: discovery, live council lookup, the dated plan with local contacts, drafts and approval, the date slip, a provider reply, the audit trail.</a:t>
+              <a:t>Open Banking is first because it restores the strongest feature, automatic account references, for customers of any bank.</a:t>
             </a:r>
             <a:endParaRPr lang="en-US" dirty="0"/>
           </a:p>
@@ -1466,6 +1468,94 @@
             <a:fld id="{F7021451-1387-4CA6-816F-3879F97B5CBC}" type="slidenum">
               <a:rPr lang="en-US"/>
               <a:t>16</a:t>
+            </a:fld>
+            <a:endParaRPr lang="en-US"/>
+          </a:p>
+        </p:txBody>
+      </p:sp>
+    </p:spTree>
+    <p:extLst>
+      <p:ext uri="{BB962C8B-B14F-4D97-AF65-F5344CB8AC3E}">
+        <p14:creationId xmlns:p14="http://schemas.microsoft.com/office/powerpoint/2010/main" val="1024086991"/>
+      </p:ext>
+    </p:extLst>
+  </p:cSld>
+  <p:clrMapOvr>
+    <a:masterClrMapping/>
+  </p:clrMapOvr>
+</p:notes>
+</file>
+
+<file path=ppt/notesSlides/notesSlide17.xml><?xml version="1.0" encoding="utf-8"?>
+<p:notes xmlns:a="http://schemas.openxmlformats.org/drawingml/2006/main" xmlns:r="http://schemas.openxmlformats.org/officeDocument/2006/relationships" xmlns:p="http://schemas.openxmlformats.org/presentationml/2006/main">
+  <p:cSld>
+    <p:spTree>
+      <p:nvGrpSpPr>
+        <p:cNvPr id="1" name=""/>
+        <p:cNvGrpSpPr/>
+        <p:nvPr/>
+      </p:nvGrpSpPr>
+      <p:grpSpPr>
+        <a:xfrm>
+          <a:off x="0" y="0"/>
+          <a:ext cx="0" cy="0"/>
+          <a:chOff x="0" y="0"/>
+          <a:chExt cx="0" cy="0"/>
+        </a:xfrm>
+      </p:grpSpPr>
+      <p:sp>
+        <p:nvSpPr>
+          <p:cNvPr id="2" name="Slide Image Placeholder 1"/>
+          <p:cNvSpPr>
+            <a:spLocks noGrp="1" noRot="1" noChangeAspect="1"/>
+          </p:cNvSpPr>
+          <p:nvPr>
+            <p:ph type="sldImg"/>
+          </p:nvPr>
+        </p:nvSpPr>
+        <p:spPr/>
+      </p:sp>
+      <p:sp>
+        <p:nvSpPr>
+          <p:cNvPr id="3" name="Notes Placeholder 2"/>
+          <p:cNvSpPr>
+            <a:spLocks noGrp="1"/>
+          </p:cNvSpPr>
+          <p:nvPr>
+            <p:ph type="body" idx="1"/>
+          </p:nvPr>
+        </p:nvSpPr>
+        <p:spPr/>
+        <p:txBody>
+          <a:bodyPr/>
+          <a:lstStyle/>
+          <a:p>
+            <a:r>
+              <a:rPr lang="en-US" dirty="0"/>
+              <a:t>Demo order: discovery, live council lookup, the dated plan with local contacts, drafts and approval (in the chat or on the My move page), the date slip, a provider reply, the audit trail.</a:t>
+            </a:r>
+            <a:endParaRPr lang="en-US" dirty="0"/>
+          </a:p>
+        </p:txBody>
+      </p:sp>
+      <p:sp>
+        <p:nvSpPr>
+          <p:cNvPr id="4" name="Slide Number Placeholder 3"/>
+          <p:cNvSpPr>
+            <a:spLocks noGrp="1"/>
+          </p:cNvSpPr>
+          <p:nvPr>
+            <p:ph type="sldNum" sz="quarter" idx="10"/>
+          </p:nvPr>
+        </p:nvSpPr>
+        <p:spPr/>
+        <p:txBody>
+          <a:bodyPr/>
+          <a:lstStyle/>
+          <a:p>
+            <a:fld id="{F7021451-1387-4CA6-816F-3879F97B5CBC}" type="slidenum">
+              <a:rPr lang="en-US"/>
+              <a:t>17</a:t>
             </a:fld>
             <a:endParaRPr lang="en-US"/>
           </a:p>
@@ -2421,7 +2511,7 @@
                   <a:schemeClr val="accent6"/>
                 </a:solidFill>
               </a:rPr>
-              <a:t>House Move Agent  ·  Neuro SAN hackathon  ·  synthetic data only</a:t>
+              <a:t>House Move Agent  ·  EMEA Hackathon 2026  ·  Neuro SAN  ·  synthetic data only</a:t>
             </a:r>
             <a:endParaRPr lang="en-US" sz="1000" dirty="0"/>
           </a:p>
@@ -2899,14 +2989,14 @@
       </p:sp>
       <p:sp>
         <p:nvSpPr>
-          <p:cNvPr id="4" name="Text 2"/>
+          <p:cNvPr id="4" name="event"/>
           <p:cNvSpPr txBox="1"/>
           <p:nvPr/>
         </p:nvSpPr>
         <p:spPr>
           <a:xfrm>
-            <a:off x="731520" y="5852160"/>
-            <a:ext cx="7315200" cy="365760"/>
+            <a:off x="731520" y="5074920"/>
+            <a:ext cx="7315200" cy="411480"/>
           </a:xfrm>
           <a:prstGeom prst="rect">
             <a:avLst/>
@@ -2922,20 +3012,92 @@
               <a:buNone/>
             </a:pPr>
             <a:r>
+              <a:rPr lang="en-US" sz="2000" b="1" dirty="0">
+                <a:solidFill>
+                  <a:schemeClr val="bg1"/>
+                </a:solidFill>
+              </a:rPr>
+              <a:t>EMEA Hackathon 2026</a:t>
+            </a:r>
+            <a:endParaRPr lang="en-US" sz="2000" dirty="0"/>
+          </a:p>
+        </p:txBody>
+      </p:sp>
+      <p:sp>
+        <p:nvSpPr>
+          <p:cNvPr id="5" name="entry"/>
+          <p:cNvSpPr txBox="1"/>
+          <p:nvPr/>
+        </p:nvSpPr>
+        <p:spPr>
+          <a:xfrm>
+            <a:off x="731520" y="5532120"/>
+            <a:ext cx="7589520" cy="365760"/>
+          </a:xfrm>
+          <a:prstGeom prst="rect">
+            <a:avLst/>
+          </a:prstGeom>
+          <a:noFill/>
+          <a:ln/>
+        </p:spPr>
+        <p:txBody>
+          <a:bodyPr wrap="square" lIns="0" tIns="0" rIns="0" bIns="0" rtlCol="0" anchor="ctr"/>
+          <a:lstStyle/>
+          <a:p>
+            <a:pPr indent="0" marL="0">
+              <a:buNone/>
+            </a:pPr>
+            <a:r>
               <a:rPr lang="en-US" sz="1400" dirty="0">
                 <a:solidFill>
                   <a:schemeClr val="bg2"/>
                 </a:solidFill>
               </a:rPr>
+              <a:t>Entry by associate 110737  ·  Varadaraj.pandurangan@cognizant.com  ·  BFS UK</a:t>
+            </a:r>
+            <a:endParaRPr lang="en-US" sz="1400" dirty="0"/>
+          </a:p>
+        </p:txBody>
+      </p:sp>
+      <p:sp>
+        <p:nvSpPr>
+          <p:cNvPr id="6" name="Text 4"/>
+          <p:cNvSpPr txBox="1"/>
+          <p:nvPr/>
+        </p:nvSpPr>
+        <p:spPr>
+          <a:xfrm>
+            <a:off x="731520" y="5943600"/>
+            <a:ext cx="7315200" cy="320040"/>
+          </a:xfrm>
+          <a:prstGeom prst="rect">
+            <a:avLst/>
+          </a:prstGeom>
+          <a:noFill/>
+          <a:ln/>
+        </p:spPr>
+        <p:txBody>
+          <a:bodyPr wrap="square" lIns="0" tIns="0" rIns="0" bIns="0" rtlCol="0" anchor="ctr"/>
+          <a:lstStyle/>
+          <a:p>
+            <a:pPr indent="0" marL="0">
+              <a:buNone/>
+            </a:pPr>
+            <a:r>
+              <a:rPr lang="en-US" sz="1200" dirty="0">
+                <a:solidFill>
+                  <a:schemeClr val="accent3"/>
+                </a:solidFill>
+              </a:rPr>
               <a:t>Multi-agent assistant built on Neuro SAN  ·  14 agents  ·  synthetic data</a:t>
             </a:r>
-            <a:endParaRPr lang="en-US" sz="1400" dirty="0"/>
-          </a:p>
-        </p:txBody>
-      </p:sp>
-      <p:sp>
-        <p:nvSpPr>
-          <p:cNvPr id="5" name="hero circle"/>
+            <a:endParaRPr lang="en-US" sz="1200" dirty="0"/>
+          </a:p>
+        </p:txBody>
+      </p:sp>
+      <p:sp>
+        <p:nvSpPr>
+          <p:cNvPr id="7" name="hero circle"/>
           <p:cNvSpPr/>
           <p:nvPr/>
         </p:nvSpPr>
@@ -2955,7 +3117,7 @@
       </p:sp>
       <p:pic>
         <p:nvPicPr>
-          <p:cNvPr id="6" name="hero icon" descr="preencoded.png">    </p:cNvPr>
+          <p:cNvPr id="8" name="hero icon" descr="preencoded.png">    </p:cNvPr>
           <p:cNvPicPr>
             <a:picLocks noChangeAspect="1"/>
           </p:cNvPicPr>
@@ -3862,7 +4024,7 @@
                   <a:schemeClr val="tx1"/>
                 </a:solidFill>
               </a:rPr>
-              <a:t>Approvals need a one-time code the customer types; checked in code</a:t>
+              <a:t>Approve on your signed-in portal, or type a one-time code in chat</a:t>
             </a:r>
             <a:endParaRPr lang="en-US" sz="1400" dirty="0"/>
           </a:p>
@@ -3970,7 +4132,7 @@
                   <a:schemeClr val="tx2"/>
                 </a:solidFill>
               </a:rPr>
-              <a:t>Works across all four UK nations</a:t>
+              <a:t>My move: the customer always knows where things stand</a:t>
             </a:r>
             <a:endParaRPr lang="en-US" sz="3400" dirty="0"/>
           </a:p>
@@ -3978,18 +4140,18 @@
       </p:sp>
       <p:sp>
         <p:nvSpPr>
-          <p:cNvPr id="3" name="England"/>
+          <p:cNvPr id="3" name="status page mock"/>
           <p:cNvSpPr/>
           <p:nvPr/>
         </p:nvSpPr>
         <p:spPr>
           <a:xfrm>
-            <a:off x="548640" y="1463040"/>
-            <a:ext cx="2606040" cy="3291840"/>
+            <a:off x="548640" y="1417320"/>
+            <a:ext cx="6949440" cy="4526280"/>
           </a:xfrm>
           <a:prstGeom prst="roundRect">
             <a:avLst>
-              <a:gd name="adj" fmla="val 4211"/>
+              <a:gd name="adj" fmla="val 2424"/>
             </a:avLst>
           </a:prstGeom>
           <a:solidFill>
@@ -4000,17 +4162,135 @@
       </p:sp>
       <p:sp>
         <p:nvSpPr>
-          <p:cNvPr id="4" name="England dot"/>
+          <p:cNvPr id="4" name="stage Started"/>
           <p:cNvSpPr/>
           <p:nvPr/>
         </p:nvSpPr>
         <p:spPr>
           <a:xfrm>
-            <a:off x="822960" y="1737360"/>
-            <a:ext cx="502920" cy="502920"/>
-          </a:xfrm>
-          <a:prstGeom prst="ellipse">
-            <a:avLst/>
+            <a:off x="777240" y="1691640"/>
+            <a:ext cx="877824" cy="457200"/>
+          </a:xfrm>
+          <a:prstGeom prst="roundRect">
+            <a:avLst>
+              <a:gd name="adj" fmla="val 16000"/>
+            </a:avLst>
+          </a:prstGeom>
+          <a:solidFill>
+            <a:schemeClr val="accent3"/>
+          </a:solidFill>
+          <a:ln/>
+        </p:spPr>
+      </p:sp>
+      <p:sp>
+        <p:nvSpPr>
+          <p:cNvPr id="5" name="Text 3"/>
+          <p:cNvSpPr txBox="1"/>
+          <p:nvPr/>
+        </p:nvSpPr>
+        <p:spPr>
+          <a:xfrm>
+            <a:off x="777240" y="1691640"/>
+            <a:ext cx="877824" cy="457200"/>
+          </a:xfrm>
+          <a:prstGeom prst="rect">
+            <a:avLst/>
+          </a:prstGeom>
+          <a:noFill/>
+          <a:ln/>
+        </p:spPr>
+        <p:txBody>
+          <a:bodyPr wrap="square" lIns="0" tIns="0" rIns="0" bIns="0" rtlCol="0" anchor="ctr"/>
+          <a:lstStyle/>
+          <a:p>
+            <a:pPr algn="ctr" indent="0" marL="0">
+              <a:buNone/>
+            </a:pPr>
+            <a:r>
+              <a:rPr lang="en-US" sz="1000" dirty="0">
+                <a:solidFill>
+                  <a:schemeClr val="tx1"/>
+                </a:solidFill>
+              </a:rPr>
+              <a:t>Started</a:t>
+            </a:r>
+            <a:endParaRPr lang="en-US" sz="1000" dirty="0"/>
+          </a:p>
+        </p:txBody>
+      </p:sp>
+      <p:sp>
+        <p:nvSpPr>
+          <p:cNvPr id="6" name="stage Plan ready"/>
+          <p:cNvSpPr/>
+          <p:nvPr/>
+        </p:nvSpPr>
+        <p:spPr>
+          <a:xfrm>
+            <a:off x="1728216" y="1691640"/>
+            <a:ext cx="877824" cy="457200"/>
+          </a:xfrm>
+          <a:prstGeom prst="roundRect">
+            <a:avLst>
+              <a:gd name="adj" fmla="val 16000"/>
+            </a:avLst>
+          </a:prstGeom>
+          <a:solidFill>
+            <a:schemeClr val="accent3"/>
+          </a:solidFill>
+          <a:ln/>
+        </p:spPr>
+      </p:sp>
+      <p:sp>
+        <p:nvSpPr>
+          <p:cNvPr id="7" name="Text 5"/>
+          <p:cNvSpPr txBox="1"/>
+          <p:nvPr/>
+        </p:nvSpPr>
+        <p:spPr>
+          <a:xfrm>
+            <a:off x="1728216" y="1691640"/>
+            <a:ext cx="877824" cy="457200"/>
+          </a:xfrm>
+          <a:prstGeom prst="rect">
+            <a:avLst/>
+          </a:prstGeom>
+          <a:noFill/>
+          <a:ln/>
+        </p:spPr>
+        <p:txBody>
+          <a:bodyPr wrap="square" lIns="0" tIns="0" rIns="0" bIns="0" rtlCol="0" anchor="ctr"/>
+          <a:lstStyle/>
+          <a:p>
+            <a:pPr algn="ctr" indent="0" marL="0">
+              <a:buNone/>
+            </a:pPr>
+            <a:r>
+              <a:rPr lang="en-US" sz="1000" dirty="0">
+                <a:solidFill>
+                  <a:schemeClr val="tx1"/>
+                </a:solidFill>
+              </a:rPr>
+              <a:t>Plan ready</a:t>
+            </a:r>
+            <a:endParaRPr lang="en-US" sz="1000" dirty="0"/>
+          </a:p>
+        </p:txBody>
+      </p:sp>
+      <p:sp>
+        <p:nvSpPr>
+          <p:cNvPr id="8" name="stage Drafts ready"/>
+          <p:cNvSpPr/>
+          <p:nvPr/>
+        </p:nvSpPr>
+        <p:spPr>
+          <a:xfrm>
+            <a:off x="2679192" y="1691640"/>
+            <a:ext cx="877824" cy="457200"/>
+          </a:xfrm>
+          <a:prstGeom prst="roundRect">
+            <a:avLst>
+              <a:gd name="adj" fmla="val 16000"/>
+            </a:avLst>
           </a:prstGeom>
           <a:solidFill>
             <a:schemeClr val="accent2"/>
@@ -4020,14 +4300,14 @@
       </p:sp>
       <p:sp>
         <p:nvSpPr>
-          <p:cNvPr id="5" name="Text 3"/>
+          <p:cNvPr id="9" name="Text 7"/>
           <p:cNvSpPr txBox="1"/>
           <p:nvPr/>
         </p:nvSpPr>
         <p:spPr>
           <a:xfrm>
-            <a:off x="822960" y="2377440"/>
-            <a:ext cx="2194560" cy="548640"/>
+            <a:off x="2679192" y="1691640"/>
+            <a:ext cx="877824" cy="457200"/>
           </a:xfrm>
           <a:prstGeom prst="rect">
             <a:avLst/>
@@ -4039,92 +4319,521 @@
           <a:bodyPr wrap="square" lIns="0" tIns="0" rIns="0" bIns="0" rtlCol="0" anchor="ctr"/>
           <a:lstStyle/>
           <a:p>
-            <a:pPr indent="0" marL="0">
-              <a:buNone/>
-            </a:pPr>
-            <a:r>
-              <a:rPr lang="en-US" sz="2000" b="1" dirty="0">
-                <a:solidFill>
-                  <a:schemeClr val="tx2"/>
-                </a:solidFill>
-              </a:rPr>
-              <a:t>England</a:t>
-            </a:r>
-            <a:endParaRPr lang="en-US" sz="2000" dirty="0"/>
-          </a:p>
-        </p:txBody>
-      </p:sp>
-      <p:sp>
-        <p:nvSpPr>
-          <p:cNvPr id="6" name="Text 4"/>
-          <p:cNvSpPr txBox="1"/>
-          <p:nvPr/>
-        </p:nvSpPr>
-        <p:spPr>
-          <a:xfrm>
-            <a:off x="822960" y="2971800"/>
-            <a:ext cx="2148840" cy="1691640"/>
-          </a:xfrm>
-          <a:prstGeom prst="rect">
-            <a:avLst/>
-          </a:prstGeom>
-          <a:noFill/>
-          <a:ln/>
-        </p:spPr>
-        <p:txBody>
-          <a:bodyPr wrap="square" lIns="0" tIns="0" rIns="0" bIns="0" rtlCol="0" anchor="t"/>
-          <a:lstStyle/>
-          <a:p>
-            <a:pPr indent="0" marL="0">
-              <a:buNone/>
-            </a:pPr>
-            <a:r>
-              <a:rPr lang="en-US" sz="1500" dirty="0">
-                <a:solidFill>
-                  <a:schemeClr val="tx1"/>
-                </a:solidFill>
-              </a:rPr>
-              <a:t>Council tax, a water company for the old and new home, NHS GP and school search</a:t>
-            </a:r>
-            <a:endParaRPr lang="en-US" sz="1500" dirty="0"/>
-          </a:p>
-        </p:txBody>
-      </p:sp>
-      <p:sp>
-        <p:nvSpPr>
-          <p:cNvPr id="7" name="Wales"/>
+            <a:pPr algn="ctr" indent="0" marL="0">
+              <a:buNone/>
+            </a:pPr>
+            <a:r>
+              <a:rPr lang="en-US" sz="1000" b="1" dirty="0">
+                <a:solidFill>
+                  <a:schemeClr val="bg1"/>
+                </a:solidFill>
+              </a:rPr>
+              <a:t>Drafts ready</a:t>
+            </a:r>
+            <a:endParaRPr lang="en-US" sz="1000" dirty="0"/>
+          </a:p>
+        </p:txBody>
+      </p:sp>
+      <p:sp>
+        <p:nvSpPr>
+          <p:cNvPr id="10" name="stage Approved"/>
           <p:cNvSpPr/>
           <p:nvPr/>
         </p:nvSpPr>
         <p:spPr>
           <a:xfrm>
-            <a:off x="3364992" y="1463040"/>
-            <a:ext cx="2606040" cy="3291840"/>
+            <a:off x="3630168" y="1691640"/>
+            <a:ext cx="877824" cy="457200"/>
           </a:xfrm>
           <a:prstGeom prst="roundRect">
             <a:avLst>
-              <a:gd name="adj" fmla="val 4211"/>
+              <a:gd name="adj" fmla="val 16000"/>
             </a:avLst>
           </a:prstGeom>
           <a:solidFill>
-            <a:schemeClr val="bg2"/>
+            <a:schemeClr val="bg1"/>
           </a:solidFill>
           <a:ln/>
         </p:spPr>
       </p:sp>
       <p:sp>
         <p:nvSpPr>
-          <p:cNvPr id="8" name="Wales dot"/>
+          <p:cNvPr id="11" name="Text 9"/>
+          <p:cNvSpPr txBox="1"/>
+          <p:nvPr/>
+        </p:nvSpPr>
+        <p:spPr>
+          <a:xfrm>
+            <a:off x="3630168" y="1691640"/>
+            <a:ext cx="877824" cy="457200"/>
+          </a:xfrm>
+          <a:prstGeom prst="rect">
+            <a:avLst/>
+          </a:prstGeom>
+          <a:noFill/>
+          <a:ln/>
+        </p:spPr>
+        <p:txBody>
+          <a:bodyPr wrap="square" lIns="0" tIns="0" rIns="0" bIns="0" rtlCol="0" anchor="ctr"/>
+          <a:lstStyle/>
+          <a:p>
+            <a:pPr algn="ctr" indent="0" marL="0">
+              <a:buNone/>
+            </a:pPr>
+            <a:r>
+              <a:rPr lang="en-US" sz="1000" dirty="0">
+                <a:solidFill>
+                  <a:schemeClr val="tx1"/>
+                </a:solidFill>
+              </a:rPr>
+              <a:t>Approved</a:t>
+            </a:r>
+            <a:endParaRPr lang="en-US" sz="1000" dirty="0"/>
+          </a:p>
+        </p:txBody>
+      </p:sp>
+      <p:sp>
+        <p:nvSpPr>
+          <p:cNvPr id="12" name="stage Sent"/>
           <p:cNvSpPr/>
           <p:nvPr/>
         </p:nvSpPr>
         <p:spPr>
           <a:xfrm>
-            <a:off x="3639312" y="1737360"/>
-            <a:ext cx="502920" cy="502920"/>
-          </a:xfrm>
-          <a:prstGeom prst="ellipse">
-            <a:avLst/>
+            <a:off x="4581144" y="1691640"/>
+            <a:ext cx="877824" cy="457200"/>
+          </a:xfrm>
+          <a:prstGeom prst="roundRect">
+            <a:avLst>
+              <a:gd name="adj" fmla="val 16000"/>
+            </a:avLst>
+          </a:prstGeom>
+          <a:solidFill>
+            <a:schemeClr val="bg1"/>
+          </a:solidFill>
+          <a:ln/>
+        </p:spPr>
+      </p:sp>
+      <p:sp>
+        <p:nvSpPr>
+          <p:cNvPr id="13" name="Text 11"/>
+          <p:cNvSpPr txBox="1"/>
+          <p:nvPr/>
+        </p:nvSpPr>
+        <p:spPr>
+          <a:xfrm>
+            <a:off x="4581144" y="1691640"/>
+            <a:ext cx="877824" cy="457200"/>
+          </a:xfrm>
+          <a:prstGeom prst="rect">
+            <a:avLst/>
+          </a:prstGeom>
+          <a:noFill/>
+          <a:ln/>
+        </p:spPr>
+        <p:txBody>
+          <a:bodyPr wrap="square" lIns="0" tIns="0" rIns="0" bIns="0" rtlCol="0" anchor="ctr"/>
+          <a:lstStyle/>
+          <a:p>
+            <a:pPr algn="ctr" indent="0" marL="0">
+              <a:buNone/>
+            </a:pPr>
+            <a:r>
+              <a:rPr lang="en-US" sz="1000" dirty="0">
+                <a:solidFill>
+                  <a:schemeClr val="tx1"/>
+                </a:solidFill>
+              </a:rPr>
+              <a:t>Sent</a:t>
+            </a:r>
+            <a:endParaRPr lang="en-US" sz="1000" dirty="0"/>
+          </a:p>
+        </p:txBody>
+      </p:sp>
+      <p:sp>
+        <p:nvSpPr>
+          <p:cNvPr id="14" name="stage Follow-up"/>
+          <p:cNvSpPr/>
+          <p:nvPr/>
+        </p:nvSpPr>
+        <p:spPr>
+          <a:xfrm>
+            <a:off x="5532120" y="1691640"/>
+            <a:ext cx="877824" cy="457200"/>
+          </a:xfrm>
+          <a:prstGeom prst="roundRect">
+            <a:avLst>
+              <a:gd name="adj" fmla="val 16000"/>
+            </a:avLst>
+          </a:prstGeom>
+          <a:solidFill>
+            <a:schemeClr val="bg1"/>
+          </a:solidFill>
+          <a:ln/>
+        </p:spPr>
+      </p:sp>
+      <p:sp>
+        <p:nvSpPr>
+          <p:cNvPr id="15" name="Text 13"/>
+          <p:cNvSpPr txBox="1"/>
+          <p:nvPr/>
+        </p:nvSpPr>
+        <p:spPr>
+          <a:xfrm>
+            <a:off x="5532120" y="1691640"/>
+            <a:ext cx="877824" cy="457200"/>
+          </a:xfrm>
+          <a:prstGeom prst="rect">
+            <a:avLst/>
+          </a:prstGeom>
+          <a:noFill/>
+          <a:ln/>
+        </p:spPr>
+        <p:txBody>
+          <a:bodyPr wrap="square" lIns="0" tIns="0" rIns="0" bIns="0" rtlCol="0" anchor="ctr"/>
+          <a:lstStyle/>
+          <a:p>
+            <a:pPr algn="ctr" indent="0" marL="0">
+              <a:buNone/>
+            </a:pPr>
+            <a:r>
+              <a:rPr lang="en-US" sz="1000" dirty="0">
+                <a:solidFill>
+                  <a:schemeClr val="tx1"/>
+                </a:solidFill>
+              </a:rPr>
+              <a:t>Follow-up</a:t>
+            </a:r>
+            <a:endParaRPr lang="en-US" sz="1000" dirty="0"/>
+          </a:p>
+        </p:txBody>
+      </p:sp>
+      <p:sp>
+        <p:nvSpPr>
+          <p:cNvPr id="16" name="stage Done"/>
+          <p:cNvSpPr/>
+          <p:nvPr/>
+        </p:nvSpPr>
+        <p:spPr>
+          <a:xfrm>
+            <a:off x="6483096" y="1691640"/>
+            <a:ext cx="877824" cy="457200"/>
+          </a:xfrm>
+          <a:prstGeom prst="roundRect">
+            <a:avLst>
+              <a:gd name="adj" fmla="val 16000"/>
+            </a:avLst>
+          </a:prstGeom>
+          <a:solidFill>
+            <a:schemeClr val="bg1"/>
+          </a:solidFill>
+          <a:ln/>
+        </p:spPr>
+      </p:sp>
+      <p:sp>
+        <p:nvSpPr>
+          <p:cNvPr id="17" name="Text 15"/>
+          <p:cNvSpPr txBox="1"/>
+          <p:nvPr/>
+        </p:nvSpPr>
+        <p:spPr>
+          <a:xfrm>
+            <a:off x="6483096" y="1691640"/>
+            <a:ext cx="877824" cy="457200"/>
+          </a:xfrm>
+          <a:prstGeom prst="rect">
+            <a:avLst/>
+          </a:prstGeom>
+          <a:noFill/>
+          <a:ln/>
+        </p:spPr>
+        <p:txBody>
+          <a:bodyPr wrap="square" lIns="0" tIns="0" rIns="0" bIns="0" rtlCol="0" anchor="ctr"/>
+          <a:lstStyle/>
+          <a:p>
+            <a:pPr algn="ctr" indent="0" marL="0">
+              <a:buNone/>
+            </a:pPr>
+            <a:r>
+              <a:rPr lang="en-US" sz="1000" dirty="0">
+                <a:solidFill>
+                  <a:schemeClr val="tx1"/>
+                </a:solidFill>
+              </a:rPr>
+              <a:t>Done</a:t>
+            </a:r>
+            <a:endParaRPr lang="en-US" sz="1000" dirty="0"/>
+          </a:p>
+        </p:txBody>
+      </p:sp>
+      <p:sp>
+        <p:nvSpPr>
+          <p:cNvPr id="18" name="Text 16"/>
+          <p:cNvSpPr txBox="1"/>
+          <p:nvPr/>
+        </p:nvSpPr>
+        <p:spPr>
+          <a:xfrm>
+            <a:off x="822960" y="2423160"/>
+            <a:ext cx="4572000" cy="365760"/>
+          </a:xfrm>
+          <a:prstGeom prst="rect">
+            <a:avLst/>
+          </a:prstGeom>
+          <a:noFill/>
+          <a:ln/>
+        </p:spPr>
+        <p:txBody>
+          <a:bodyPr wrap="square" lIns="0" tIns="0" rIns="0" bIns="0" rtlCol="0" anchor="ctr"/>
+          <a:lstStyle/>
+          <a:p>
+            <a:pPr indent="0" marL="0">
+              <a:buNone/>
+            </a:pPr>
+            <a:r>
+              <a:rPr lang="en-US" sz="1500" b="1" dirty="0">
+                <a:solidFill>
+                  <a:schemeClr val="tx2"/>
+                </a:solidFill>
+              </a:rPr>
+              <a:t>Waiting for your approval (15)</a:t>
+            </a:r>
+            <a:endParaRPr lang="en-US" sz="1500" dirty="0"/>
+          </a:p>
+        </p:txBody>
+      </p:sp>
+      <p:sp>
+        <p:nvSpPr>
+          <p:cNvPr id="19" name="row line 1"/>
+          <p:cNvSpPr/>
+          <p:nvPr/>
+        </p:nvSpPr>
+        <p:spPr>
+          <a:xfrm>
+            <a:off x="822960" y="3392424"/>
+            <a:ext cx="6400800" cy="0"/>
+          </a:xfrm>
+          <a:prstGeom prst="line">
+            <a:avLst/>
+          </a:prstGeom>
+          <a:noFill/>
+          <a:ln w="9525">
+            <a:solidFill>
+              <a:schemeClr val="accent3"/>
+            </a:solidFill>
+            <a:prstDash val="solid"/>
+          </a:ln>
+        </p:spPr>
+      </p:sp>
+      <p:sp>
+        <p:nvSpPr>
+          <p:cNvPr id="20" name="Text 18"/>
+          <p:cNvSpPr txBox="1"/>
+          <p:nvPr/>
+        </p:nvSpPr>
+        <p:spPr>
+          <a:xfrm>
+            <a:off x="822960" y="2880360"/>
+            <a:ext cx="3017520" cy="457200"/>
+          </a:xfrm>
+          <a:prstGeom prst="rect">
+            <a:avLst/>
+          </a:prstGeom>
+          <a:noFill/>
+          <a:ln/>
+        </p:spPr>
+        <p:txBody>
+          <a:bodyPr wrap="square" lIns="0" tIns="0" rIns="0" bIns="0" rtlCol="0" anchor="ctr"/>
+          <a:lstStyle/>
+          <a:p>
+            <a:pPr indent="0" marL="0">
+              <a:buNone/>
+            </a:pPr>
+            <a:r>
+              <a:rPr lang="en-US" sz="1300" dirty="0">
+                <a:solidFill>
+                  <a:schemeClr val="tx1"/>
+                </a:solidFill>
+              </a:rPr>
+              <a:t>Broadband provider</a:t>
+            </a:r>
+            <a:endParaRPr lang="en-US" sz="1300" dirty="0"/>
+          </a:p>
+        </p:txBody>
+      </p:sp>
+      <p:sp>
+        <p:nvSpPr>
+          <p:cNvPr id="21" name="Text 19"/>
+          <p:cNvSpPr txBox="1"/>
+          <p:nvPr/>
+        </p:nvSpPr>
+        <p:spPr>
+          <a:xfrm>
+            <a:off x="4572000" y="2880360"/>
+            <a:ext cx="914400" cy="457200"/>
+          </a:xfrm>
+          <a:prstGeom prst="rect">
+            <a:avLst/>
+          </a:prstGeom>
+          <a:noFill/>
+          <a:ln/>
+        </p:spPr>
+        <p:txBody>
+          <a:bodyPr wrap="square" lIns="0" tIns="0" rIns="0" bIns="0" rtlCol="0" anchor="ctr"/>
+          <a:lstStyle/>
+          <a:p>
+            <a:pPr indent="0" marL="0">
+              <a:buNone/>
+            </a:pPr>
+            <a:r>
+              <a:rPr lang="en-US" sz="1300" dirty="0">
+                <a:solidFill>
+                  <a:schemeClr val="tx1"/>
+                </a:solidFill>
+              </a:rPr>
+              <a:t>13 Nov</a:t>
+            </a:r>
+            <a:endParaRPr lang="en-US" sz="1300" dirty="0"/>
+          </a:p>
+        </p:txBody>
+      </p:sp>
+      <p:sp>
+        <p:nvSpPr>
+          <p:cNvPr id="22" name="button 1"/>
+          <p:cNvSpPr/>
+          <p:nvPr/>
+        </p:nvSpPr>
+        <p:spPr>
+          <a:xfrm>
+            <a:off x="5577840" y="2953512"/>
+            <a:ext cx="1645920" cy="329184"/>
+          </a:xfrm>
+          <a:prstGeom prst="roundRect">
+            <a:avLst>
+              <a:gd name="adj" fmla="val 22222"/>
+            </a:avLst>
+          </a:prstGeom>
+          <a:solidFill>
+            <a:schemeClr val="bg1"/>
+          </a:solidFill>
+          <a:ln w="12700">
+            <a:solidFill>
+              <a:schemeClr val="accent2"/>
+            </a:solidFill>
+            <a:prstDash val="solid"/>
+          </a:ln>
+        </p:spPr>
+      </p:sp>
+      <p:sp>
+        <p:nvSpPr>
+          <p:cNvPr id="23" name="Text 21"/>
+          <p:cNvSpPr txBox="1"/>
+          <p:nvPr/>
+        </p:nvSpPr>
+        <p:spPr>
+          <a:xfrm>
+            <a:off x="5577840" y="2953512"/>
+            <a:ext cx="1645920" cy="329184"/>
+          </a:xfrm>
+          <a:prstGeom prst="rect">
+            <a:avLst/>
+          </a:prstGeom>
+          <a:noFill/>
+          <a:ln/>
+        </p:spPr>
+        <p:txBody>
+          <a:bodyPr wrap="square" lIns="0" tIns="0" rIns="0" bIns="0" rtlCol="0" anchor="ctr"/>
+          <a:lstStyle/>
+          <a:p>
+            <a:pPr algn="ctr" indent="0" marL="0">
+              <a:buNone/>
+            </a:pPr>
+            <a:r>
+              <a:rPr lang="en-US" sz="1100" dirty="0">
+                <a:solidFill>
+                  <a:schemeClr val="tx2"/>
+                </a:solidFill>
+              </a:rPr>
+              <a:t>Read and approve</a:t>
+            </a:r>
+            <a:endParaRPr lang="en-US" sz="1100" dirty="0"/>
+          </a:p>
+        </p:txBody>
+      </p:sp>
+      <p:sp>
+        <p:nvSpPr>
+          <p:cNvPr id="24" name="row line 2"/>
+          <p:cNvSpPr/>
+          <p:nvPr/>
+        </p:nvSpPr>
+        <p:spPr>
+          <a:xfrm>
+            <a:off x="822960" y="3959352"/>
+            <a:ext cx="6400800" cy="0"/>
+          </a:xfrm>
+          <a:prstGeom prst="line">
+            <a:avLst/>
+          </a:prstGeom>
+          <a:noFill/>
+          <a:ln w="9525">
+            <a:solidFill>
+              <a:schemeClr val="accent3"/>
+            </a:solidFill>
+            <a:prstDash val="solid"/>
+          </a:ln>
+        </p:spPr>
+      </p:sp>
+      <p:sp>
+        <p:nvSpPr>
+          <p:cNvPr id="25" name="Text 23"/>
+          <p:cNvSpPr txBox="1"/>
+          <p:nvPr/>
+        </p:nvSpPr>
+        <p:spPr>
+          <a:xfrm>
+            <a:off x="822960" y="3447288"/>
+            <a:ext cx="3017520" cy="457200"/>
+          </a:xfrm>
+          <a:prstGeom prst="rect">
+            <a:avLst/>
+          </a:prstGeom>
+          <a:noFill/>
+          <a:ln/>
+        </p:spPr>
+        <p:txBody>
+          <a:bodyPr wrap="square" lIns="0" tIns="0" rIns="0" bIns="0" rtlCol="0" anchor="ctr"/>
+          <a:lstStyle/>
+          <a:p>
+            <a:pPr indent="0" marL="0">
+              <a:buNone/>
+            </a:pPr>
+            <a:r>
+              <a:rPr lang="en-US" sz="1300" dirty="0">
+                <a:solidFill>
+                  <a:schemeClr val="tx1"/>
+                </a:solidFill>
+              </a:rPr>
+              <a:t>Council tax: new council</a:t>
+            </a:r>
+            <a:endParaRPr lang="en-US" sz="1300" dirty="0"/>
+          </a:p>
+        </p:txBody>
+      </p:sp>
+      <p:sp>
+        <p:nvSpPr>
+          <p:cNvPr id="26" name="legal badge 2"/>
+          <p:cNvSpPr/>
+          <p:nvPr/>
+        </p:nvSpPr>
+        <p:spPr>
+          <a:xfrm>
+            <a:off x="3794760" y="3557016"/>
+            <a:ext cx="548640" cy="246888"/>
+          </a:xfrm>
+          <a:prstGeom prst="roundRect">
+            <a:avLst>
+              <a:gd name="adj" fmla="val 48148"/>
+            </a:avLst>
           </a:prstGeom>
           <a:solidFill>
             <a:schemeClr val="accent1"/>
@@ -4134,14 +4843,14 @@
       </p:sp>
       <p:sp>
         <p:nvSpPr>
-          <p:cNvPr id="9" name="Text 7"/>
+          <p:cNvPr id="27" name="Text 25"/>
           <p:cNvSpPr txBox="1"/>
           <p:nvPr/>
         </p:nvSpPr>
         <p:spPr>
           <a:xfrm>
-            <a:off x="3639312" y="2377440"/>
-            <a:ext cx="2194560" cy="548640"/>
+            <a:off x="3794760" y="3557016"/>
+            <a:ext cx="548640" cy="246888"/>
           </a:xfrm>
           <a:prstGeom prst="rect">
             <a:avLst/>
@@ -4153,109 +4862,153 @@
           <a:bodyPr wrap="square" lIns="0" tIns="0" rIns="0" bIns="0" rtlCol="0" anchor="ctr"/>
           <a:lstStyle/>
           <a:p>
+            <a:pPr algn="ctr" indent="0" marL="0">
+              <a:buNone/>
+            </a:pPr>
+            <a:r>
+              <a:rPr lang="en-US" sz="1000" dirty="0">
+                <a:solidFill>
+                  <a:schemeClr val="bg1"/>
+                </a:solidFill>
+              </a:rPr>
+              <a:t>legal</a:t>
+            </a:r>
+            <a:endParaRPr lang="en-US" sz="1000" dirty="0"/>
+          </a:p>
+        </p:txBody>
+      </p:sp>
+      <p:sp>
+        <p:nvSpPr>
+          <p:cNvPr id="28" name="Text 26"/>
+          <p:cNvSpPr txBox="1"/>
+          <p:nvPr/>
+        </p:nvSpPr>
+        <p:spPr>
+          <a:xfrm>
+            <a:off x="4572000" y="3447288"/>
+            <a:ext cx="914400" cy="457200"/>
+          </a:xfrm>
+          <a:prstGeom prst="rect">
+            <a:avLst/>
+          </a:prstGeom>
+          <a:noFill/>
+          <a:ln/>
+        </p:spPr>
+        <p:txBody>
+          <a:bodyPr wrap="square" lIns="0" tIns="0" rIns="0" bIns="0" rtlCol="0" anchor="ctr"/>
+          <a:lstStyle/>
+          <a:p>
             <a:pPr indent="0" marL="0">
               <a:buNone/>
             </a:pPr>
             <a:r>
-              <a:rPr lang="en-US" sz="2000" b="1" dirty="0">
-                <a:solidFill>
-                  <a:schemeClr val="tx2"/>
-                </a:solidFill>
-              </a:rPr>
-              <a:t>Wales</a:t>
-            </a:r>
-            <a:endParaRPr lang="en-US" sz="2000" dirty="0"/>
-          </a:p>
-        </p:txBody>
-      </p:sp>
-      <p:sp>
-        <p:nvSpPr>
-          <p:cNvPr id="10" name="Text 8"/>
-          <p:cNvSpPr txBox="1"/>
-          <p:nvPr/>
-        </p:nvSpPr>
-        <p:spPr>
-          <a:xfrm>
-            <a:off x="3639312" y="2971800"/>
-            <a:ext cx="2148840" cy="1691640"/>
-          </a:xfrm>
-          <a:prstGeom prst="rect">
-            <a:avLst/>
-          </a:prstGeom>
-          <a:noFill/>
-          <a:ln/>
-        </p:spPr>
-        <p:txBody>
-          <a:bodyPr wrap="square" lIns="0" tIns="0" rIns="0" bIns="0" rtlCol="0" anchor="t"/>
-          <a:lstStyle/>
-          <a:p>
-            <a:pPr indent="0" marL="0">
-              <a:buNone/>
-            </a:pPr>
-            <a:r>
-              <a:rPr lang="en-US" sz="1500" dirty="0">
+              <a:rPr lang="en-US" sz="1300" dirty="0">
                 <a:solidFill>
                   <a:schemeClr val="tx1"/>
                 </a:solidFill>
               </a:rPr>
-              <a:t>Close the Welsh water account; Welsh GP and school finders signposted</a:t>
-            </a:r>
-            <a:endParaRPr lang="en-US" sz="1500" dirty="0"/>
-          </a:p>
-        </p:txBody>
-      </p:sp>
-      <p:sp>
-        <p:nvSpPr>
-          <p:cNvPr id="11" name="Scotland"/>
+              <a:t>27 Nov</a:t>
+            </a:r>
+            <a:endParaRPr lang="en-US" sz="1300" dirty="0"/>
+          </a:p>
+        </p:txBody>
+      </p:sp>
+      <p:sp>
+        <p:nvSpPr>
+          <p:cNvPr id="29" name="button 2"/>
           <p:cNvSpPr/>
           <p:nvPr/>
         </p:nvSpPr>
         <p:spPr>
           <a:xfrm>
-            <a:off x="6181344" y="1463040"/>
-            <a:ext cx="2606040" cy="3291840"/>
+            <a:off x="5577840" y="3520440"/>
+            <a:ext cx="1645920" cy="329184"/>
           </a:xfrm>
           <a:prstGeom prst="roundRect">
             <a:avLst>
-              <a:gd name="adj" fmla="val 4211"/>
+              <a:gd name="adj" fmla="val 22222"/>
             </a:avLst>
           </a:prstGeom>
           <a:solidFill>
-            <a:schemeClr val="bg2"/>
+            <a:schemeClr val="bg1"/>
           </a:solidFill>
-          <a:ln/>
-        </p:spPr>
-      </p:sp>
-      <p:sp>
-        <p:nvSpPr>
-          <p:cNvPr id="12" name="Scotland dot"/>
+          <a:ln w="12700">
+            <a:solidFill>
+              <a:schemeClr val="accent2"/>
+            </a:solidFill>
+            <a:prstDash val="solid"/>
+          </a:ln>
+        </p:spPr>
+      </p:sp>
+      <p:sp>
+        <p:nvSpPr>
+          <p:cNvPr id="30" name="Text 28"/>
+          <p:cNvSpPr txBox="1"/>
+          <p:nvPr/>
+        </p:nvSpPr>
+        <p:spPr>
+          <a:xfrm>
+            <a:off x="5577840" y="3520440"/>
+            <a:ext cx="1645920" cy="329184"/>
+          </a:xfrm>
+          <a:prstGeom prst="rect">
+            <a:avLst/>
+          </a:prstGeom>
+          <a:noFill/>
+          <a:ln/>
+        </p:spPr>
+        <p:txBody>
+          <a:bodyPr wrap="square" lIns="0" tIns="0" rIns="0" bIns="0" rtlCol="0" anchor="ctr"/>
+          <a:lstStyle/>
+          <a:p>
+            <a:pPr algn="ctr" indent="0" marL="0">
+              <a:buNone/>
+            </a:pPr>
+            <a:r>
+              <a:rPr lang="en-US" sz="1100" dirty="0">
+                <a:solidFill>
+                  <a:schemeClr val="tx2"/>
+                </a:solidFill>
+              </a:rPr>
+              <a:t>Read and approve</a:t>
+            </a:r>
+            <a:endParaRPr lang="en-US" sz="1100" dirty="0"/>
+          </a:p>
+        </p:txBody>
+      </p:sp>
+      <p:sp>
+        <p:nvSpPr>
+          <p:cNvPr id="31" name="row line 3"/>
           <p:cNvSpPr/>
           <p:nvPr/>
         </p:nvSpPr>
         <p:spPr>
           <a:xfrm>
-            <a:off x="6455664" y="1737360"/>
-            <a:ext cx="502920" cy="502920"/>
-          </a:xfrm>
-          <a:prstGeom prst="ellipse">
-            <a:avLst/>
-          </a:prstGeom>
-          <a:solidFill>
-            <a:schemeClr val="accent5"/>
-          </a:solidFill>
-          <a:ln/>
-        </p:spPr>
-      </p:sp>
-      <p:sp>
-        <p:nvSpPr>
-          <p:cNvPr id="13" name="Text 11"/>
+            <a:off x="822960" y="4526280"/>
+            <a:ext cx="6400800" cy="0"/>
+          </a:xfrm>
+          <a:prstGeom prst="line">
+            <a:avLst/>
+          </a:prstGeom>
+          <a:noFill/>
+          <a:ln w="9525">
+            <a:solidFill>
+              <a:schemeClr val="accent3"/>
+            </a:solidFill>
+            <a:prstDash val="solid"/>
+          </a:ln>
+        </p:spPr>
+      </p:sp>
+      <p:sp>
+        <p:nvSpPr>
+          <p:cNvPr id="32" name="Text 30"/>
           <p:cNvSpPr txBox="1"/>
           <p:nvPr/>
         </p:nvSpPr>
         <p:spPr>
           <a:xfrm>
-            <a:off x="6455664" y="2377440"/>
-            <a:ext cx="2194560" cy="548640"/>
+            <a:off x="822960" y="4014216"/>
+            <a:ext cx="3017520" cy="457200"/>
           </a:xfrm>
           <a:prstGeom prst="rect">
             <a:avLst/>
@@ -4271,141 +5024,516 @@
               <a:buNone/>
             </a:pPr>
             <a:r>
-              <a:rPr lang="en-US" sz="2000" b="1" dirty="0">
-                <a:solidFill>
-                  <a:schemeClr val="tx2"/>
-                </a:solidFill>
-              </a:rPr>
-              <a:t>Scotland</a:t>
-            </a:r>
-            <a:endParaRPr lang="en-US" sz="2000" dirty="0"/>
-          </a:p>
-        </p:txBody>
-      </p:sp>
-      <p:sp>
-        <p:nvSpPr>
-          <p:cNvPr id="14" name="Text 12"/>
-          <p:cNvSpPr txBox="1"/>
-          <p:nvPr/>
-        </p:nvSpPr>
-        <p:spPr>
-          <a:xfrm>
-            <a:off x="6455664" y="2971800"/>
-            <a:ext cx="2148840" cy="1691640"/>
-          </a:xfrm>
-          <a:prstGeom prst="rect">
-            <a:avLst/>
-          </a:prstGeom>
-          <a:noFill/>
-          <a:ln/>
-        </p:spPr>
-        <p:txBody>
-          <a:bodyPr wrap="square" lIns="0" tIns="0" rIns="0" bIns="0" rtlCol="0" anchor="t"/>
-          <a:lstStyle/>
-          <a:p>
-            <a:pPr indent="0" marL="0">
-              <a:buNone/>
-            </a:pPr>
-            <a:r>
-              <a:rPr lang="en-US" sz="1500" dirty="0">
+              <a:rPr lang="en-US" sz="1300" dirty="0">
                 <a:solidFill>
                   <a:schemeClr val="tx1"/>
                 </a:solidFill>
               </a:rPr>
-              <a:t>Water billed with council tax, Scottish bank holidays, Scottish GP finder</a:t>
-            </a:r>
-            <a:endParaRPr lang="en-US" sz="1500" dirty="0"/>
-          </a:p>
-        </p:txBody>
-      </p:sp>
-      <p:sp>
-        <p:nvSpPr>
-          <p:cNvPr id="15" name="Northern Ireland"/>
+              <a:t>DVLA: driving licence</a:t>
+            </a:r>
+            <a:endParaRPr lang="en-US" sz="1300" dirty="0"/>
+          </a:p>
+        </p:txBody>
+      </p:sp>
+      <p:sp>
+        <p:nvSpPr>
+          <p:cNvPr id="33" name="legal badge 3"/>
           <p:cNvSpPr/>
           <p:nvPr/>
         </p:nvSpPr>
         <p:spPr>
           <a:xfrm>
-            <a:off x="8997696" y="1463040"/>
-            <a:ext cx="2606040" cy="3291840"/>
+            <a:off x="3794760" y="4123944"/>
+            <a:ext cx="548640" cy="246888"/>
           </a:xfrm>
           <a:prstGeom prst="roundRect">
             <a:avLst>
-              <a:gd name="adj" fmla="val 4211"/>
+              <a:gd name="adj" fmla="val 48148"/>
             </a:avLst>
           </a:prstGeom>
           <a:solidFill>
-            <a:schemeClr val="bg2"/>
+            <a:schemeClr val="accent1"/>
           </a:solidFill>
           <a:ln/>
         </p:spPr>
       </p:sp>
       <p:sp>
         <p:nvSpPr>
-          <p:cNvPr id="16" name="Northern Ireland dot"/>
+          <p:cNvPr id="34" name="Text 32"/>
+          <p:cNvSpPr txBox="1"/>
+          <p:nvPr/>
+        </p:nvSpPr>
+        <p:spPr>
+          <a:xfrm>
+            <a:off x="3794760" y="4123944"/>
+            <a:ext cx="548640" cy="246888"/>
+          </a:xfrm>
+          <a:prstGeom prst="rect">
+            <a:avLst/>
+          </a:prstGeom>
+          <a:noFill/>
+          <a:ln/>
+        </p:spPr>
+        <p:txBody>
+          <a:bodyPr wrap="square" lIns="0" tIns="0" rIns="0" bIns="0" rtlCol="0" anchor="ctr"/>
+          <a:lstStyle/>
+          <a:p>
+            <a:pPr algn="ctr" indent="0" marL="0">
+              <a:buNone/>
+            </a:pPr>
+            <a:r>
+              <a:rPr lang="en-US" sz="1000" dirty="0">
+                <a:solidFill>
+                  <a:schemeClr val="bg1"/>
+                </a:solidFill>
+              </a:rPr>
+              <a:t>legal</a:t>
+            </a:r>
+            <a:endParaRPr lang="en-US" sz="1000" dirty="0"/>
+          </a:p>
+        </p:txBody>
+      </p:sp>
+      <p:sp>
+        <p:nvSpPr>
+          <p:cNvPr id="35" name="Text 33"/>
+          <p:cNvSpPr txBox="1"/>
+          <p:nvPr/>
+        </p:nvSpPr>
+        <p:spPr>
+          <a:xfrm>
+            <a:off x="4572000" y="4014216"/>
+            <a:ext cx="914400" cy="457200"/>
+          </a:xfrm>
+          <a:prstGeom prst="rect">
+            <a:avLst/>
+          </a:prstGeom>
+          <a:noFill/>
+          <a:ln/>
+        </p:spPr>
+        <p:txBody>
+          <a:bodyPr wrap="square" lIns="0" tIns="0" rIns="0" bIns="0" rtlCol="0" anchor="ctr"/>
+          <a:lstStyle/>
+          <a:p>
+            <a:pPr indent="0" marL="0">
+              <a:buNone/>
+            </a:pPr>
+            <a:r>
+              <a:rPr lang="en-US" sz="1300" dirty="0">
+                <a:solidFill>
+                  <a:schemeClr val="tx1"/>
+                </a:solidFill>
+              </a:rPr>
+              <a:t>4 Dec</a:t>
+            </a:r>
+            <a:endParaRPr lang="en-US" sz="1300" dirty="0"/>
+          </a:p>
+        </p:txBody>
+      </p:sp>
+      <p:sp>
+        <p:nvSpPr>
+          <p:cNvPr id="36" name="button 3"/>
           <p:cNvSpPr/>
           <p:nvPr/>
         </p:nvSpPr>
         <p:spPr>
           <a:xfrm>
-            <a:off x="9272016" y="1737360"/>
-            <a:ext cx="502920" cy="502920"/>
+            <a:off x="5577840" y="4087368"/>
+            <a:ext cx="1645920" cy="329184"/>
+          </a:xfrm>
+          <a:prstGeom prst="roundRect">
+            <a:avLst>
+              <a:gd name="adj" fmla="val 22222"/>
+            </a:avLst>
+          </a:prstGeom>
+          <a:solidFill>
+            <a:schemeClr val="bg1"/>
+          </a:solidFill>
+          <a:ln w="12700">
+            <a:solidFill>
+              <a:schemeClr val="accent2"/>
+            </a:solidFill>
+            <a:prstDash val="solid"/>
+          </a:ln>
+        </p:spPr>
+      </p:sp>
+      <p:sp>
+        <p:nvSpPr>
+          <p:cNvPr id="37" name="Text 35"/>
+          <p:cNvSpPr txBox="1"/>
+          <p:nvPr/>
+        </p:nvSpPr>
+        <p:spPr>
+          <a:xfrm>
+            <a:off x="5577840" y="4087368"/>
+            <a:ext cx="1645920" cy="329184"/>
+          </a:xfrm>
+          <a:prstGeom prst="rect">
+            <a:avLst/>
+          </a:prstGeom>
+          <a:noFill/>
+          <a:ln/>
+        </p:spPr>
+        <p:txBody>
+          <a:bodyPr wrap="square" lIns="0" tIns="0" rIns="0" bIns="0" rtlCol="0" anchor="ctr"/>
+          <a:lstStyle/>
+          <a:p>
+            <a:pPr algn="ctr" indent="0" marL="0">
+              <a:buNone/>
+            </a:pPr>
+            <a:r>
+              <a:rPr lang="en-US" sz="1100" dirty="0">
+                <a:solidFill>
+                  <a:schemeClr val="tx2"/>
+                </a:solidFill>
+              </a:rPr>
+              <a:t>Read and approve</a:t>
+            </a:r>
+            <a:endParaRPr lang="en-US" sz="1100" dirty="0"/>
+          </a:p>
+        </p:txBody>
+      </p:sp>
+      <p:sp>
+        <p:nvSpPr>
+          <p:cNvPr id="38" name="row line 4"/>
+          <p:cNvSpPr/>
+          <p:nvPr/>
+        </p:nvSpPr>
+        <p:spPr>
+          <a:xfrm>
+            <a:off x="822960" y="5093208"/>
+            <a:ext cx="6400800" cy="0"/>
+          </a:xfrm>
+          <a:prstGeom prst="line">
+            <a:avLst/>
+          </a:prstGeom>
+          <a:noFill/>
+          <a:ln w="9525">
+            <a:solidFill>
+              <a:schemeClr val="accent3"/>
+            </a:solidFill>
+            <a:prstDash val="solid"/>
+          </a:ln>
+        </p:spPr>
+      </p:sp>
+      <p:sp>
+        <p:nvSpPr>
+          <p:cNvPr id="39" name="Text 37"/>
+          <p:cNvSpPr txBox="1"/>
+          <p:nvPr/>
+        </p:nvSpPr>
+        <p:spPr>
+          <a:xfrm>
+            <a:off x="822960" y="4581144"/>
+            <a:ext cx="3017520" cy="457200"/>
+          </a:xfrm>
+          <a:prstGeom prst="rect">
+            <a:avLst/>
+          </a:prstGeom>
+          <a:noFill/>
+          <a:ln/>
+        </p:spPr>
+        <p:txBody>
+          <a:bodyPr wrap="square" lIns="0" tIns="0" rIns="0" bIns="0" rtlCol="0" anchor="ctr"/>
+          <a:lstStyle/>
+          <a:p>
+            <a:pPr indent="0" marL="0">
+              <a:buNone/>
+            </a:pPr>
+            <a:r>
+              <a:rPr lang="en-US" sz="1300" dirty="0">
+                <a:solidFill>
+                  <a:schemeClr val="tx1"/>
+                </a:solidFill>
+              </a:rPr>
+              <a:t>Energy supplier</a:t>
+            </a:r>
+            <a:endParaRPr lang="en-US" sz="1300" dirty="0"/>
+          </a:p>
+        </p:txBody>
+      </p:sp>
+      <p:sp>
+        <p:nvSpPr>
+          <p:cNvPr id="40" name="Text 38"/>
+          <p:cNvSpPr txBox="1"/>
+          <p:nvPr/>
+        </p:nvSpPr>
+        <p:spPr>
+          <a:xfrm>
+            <a:off x="4572000" y="4581144"/>
+            <a:ext cx="914400" cy="457200"/>
+          </a:xfrm>
+          <a:prstGeom prst="rect">
+            <a:avLst/>
+          </a:prstGeom>
+          <a:noFill/>
+          <a:ln/>
+        </p:spPr>
+        <p:txBody>
+          <a:bodyPr wrap="square" lIns="0" tIns="0" rIns="0" bIns="0" rtlCol="0" anchor="ctr"/>
+          <a:lstStyle/>
+          <a:p>
+            <a:pPr indent="0" marL="0">
+              <a:buNone/>
+            </a:pPr>
+            <a:r>
+              <a:rPr lang="en-US" sz="1300" dirty="0">
+                <a:solidFill>
+                  <a:schemeClr val="tx1"/>
+                </a:solidFill>
+              </a:rPr>
+              <a:t>2 Dec</a:t>
+            </a:r>
+            <a:endParaRPr lang="en-US" sz="1300" dirty="0"/>
+          </a:p>
+        </p:txBody>
+      </p:sp>
+      <p:sp>
+        <p:nvSpPr>
+          <p:cNvPr id="41" name="button 4"/>
+          <p:cNvSpPr/>
+          <p:nvPr/>
+        </p:nvSpPr>
+        <p:spPr>
+          <a:xfrm>
+            <a:off x="5577840" y="4654296"/>
+            <a:ext cx="1645920" cy="329184"/>
+          </a:xfrm>
+          <a:prstGeom prst="roundRect">
+            <a:avLst>
+              <a:gd name="adj" fmla="val 22222"/>
+            </a:avLst>
+          </a:prstGeom>
+          <a:solidFill>
+            <a:schemeClr val="bg1"/>
+          </a:solidFill>
+          <a:ln w="12700">
+            <a:solidFill>
+              <a:schemeClr val="accent2"/>
+            </a:solidFill>
+            <a:prstDash val="solid"/>
+          </a:ln>
+        </p:spPr>
+      </p:sp>
+      <p:sp>
+        <p:nvSpPr>
+          <p:cNvPr id="42" name="Text 40"/>
+          <p:cNvSpPr txBox="1"/>
+          <p:nvPr/>
+        </p:nvSpPr>
+        <p:spPr>
+          <a:xfrm>
+            <a:off x="5577840" y="4654296"/>
+            <a:ext cx="1645920" cy="329184"/>
+          </a:xfrm>
+          <a:prstGeom prst="rect">
+            <a:avLst/>
+          </a:prstGeom>
+          <a:noFill/>
+          <a:ln/>
+        </p:spPr>
+        <p:txBody>
+          <a:bodyPr wrap="square" lIns="0" tIns="0" rIns="0" bIns="0" rtlCol="0" anchor="ctr"/>
+          <a:lstStyle/>
+          <a:p>
+            <a:pPr algn="ctr" indent="0" marL="0">
+              <a:buNone/>
+            </a:pPr>
+            <a:r>
+              <a:rPr lang="en-US" sz="1100" dirty="0">
+                <a:solidFill>
+                  <a:schemeClr val="tx2"/>
+                </a:solidFill>
+              </a:rPr>
+              <a:t>Read and approve</a:t>
+            </a:r>
+            <a:endParaRPr lang="en-US" sz="1100" dirty="0"/>
+          </a:p>
+        </p:txBody>
+      </p:sp>
+      <p:sp>
+        <p:nvSpPr>
+          <p:cNvPr id="43" name="Text 41"/>
+          <p:cNvSpPr txBox="1"/>
+          <p:nvPr/>
+        </p:nvSpPr>
+        <p:spPr>
+          <a:xfrm>
+            <a:off x="822960" y="5349240"/>
+            <a:ext cx="6400800" cy="365760"/>
+          </a:xfrm>
+          <a:prstGeom prst="rect">
+            <a:avLst/>
+          </a:prstGeom>
+          <a:noFill/>
+          <a:ln/>
+        </p:spPr>
+        <p:txBody>
+          <a:bodyPr wrap="square" lIns="0" tIns="0" rIns="0" bIns="0" rtlCol="0" anchor="ctr"/>
+          <a:lstStyle/>
+          <a:p>
+            <a:pPr indent="0" marL="0">
+              <a:buNone/>
+            </a:pPr>
+            <a:r>
+              <a:rPr lang="en-US" sz="1200" i="1" dirty="0">
+                <a:solidFill>
+                  <a:schemeClr val="accent6"/>
+                </a:solidFill>
+              </a:rPr>
+              <a:t>Portal page at /status, refreshed every 5 seconds</a:t>
+            </a:r>
+            <a:endParaRPr lang="en-US" sz="1200" dirty="0"/>
+          </a:p>
+        </p:txBody>
+      </p:sp>
+      <p:sp>
+        <p:nvSpPr>
+          <p:cNvPr id="44" name="Stage and next step circle"/>
+          <p:cNvSpPr/>
+          <p:nvPr/>
+        </p:nvSpPr>
+        <p:spPr>
+          <a:xfrm>
+            <a:off x="7863840" y="1463040"/>
+            <a:ext cx="685800" cy="685800"/>
           </a:xfrm>
           <a:prstGeom prst="ellipse">
             <a:avLst/>
           </a:prstGeom>
           <a:solidFill>
-            <a:schemeClr val="accent3"/>
+            <a:schemeClr val="accent2"/>
           </a:solidFill>
           <a:ln/>
         </p:spPr>
       </p:sp>
-      <p:sp>
-        <p:nvSpPr>
-          <p:cNvPr id="17" name="Text 15"/>
+      <p:pic>
+        <p:nvPicPr>
+          <p:cNvPr id="45" name="Stage and next step icon" descr="preencoded.png">    </p:cNvPr>
+          <p:cNvPicPr>
+            <a:picLocks noChangeAspect="1"/>
+          </p:cNvPicPr>
+          <p:nvPr/>
+        </p:nvPicPr>
+        <p:blipFill>
+          <a:blip r:embed="rId1"/>
+          <a:stretch>
+            <a:fillRect/>
+          </a:stretch>
+        </p:blipFill>
+        <p:spPr>
+          <a:xfrm>
+            <a:off x="8035290" y="1634490"/>
+            <a:ext cx="342900" cy="342900"/>
+          </a:xfrm>
+          <a:prstGeom prst="rect">
+            <a:avLst/>
+          </a:prstGeom>
+        </p:spPr>
+      </p:pic>
+      <p:sp>
+        <p:nvSpPr>
+          <p:cNvPr id="46" name="Text 43"/>
           <p:cNvSpPr txBox="1"/>
           <p:nvPr/>
         </p:nvSpPr>
         <p:spPr>
           <a:xfrm>
-            <a:off x="9272016" y="2377440"/>
-            <a:ext cx="2194560" cy="548640"/>
-          </a:xfrm>
-          <a:prstGeom prst="rect">
-            <a:avLst/>
-          </a:prstGeom>
-          <a:noFill/>
-          <a:ln/>
-        </p:spPr>
-        <p:txBody>
-          <a:bodyPr wrap="square" lIns="0" tIns="0" rIns="0" bIns="0" rtlCol="0" anchor="ctr"/>
+            <a:off x="8732520" y="1417320"/>
+            <a:ext cx="2926080" cy="1371600"/>
+          </a:xfrm>
+          <a:prstGeom prst="rect">
+            <a:avLst/>
+          </a:prstGeom>
+          <a:noFill/>
+          <a:ln/>
+        </p:spPr>
+        <p:txBody>
+          <a:bodyPr wrap="square" lIns="0" tIns="0" rIns="0" bIns="0" rtlCol="0" anchor="t"/>
           <a:lstStyle/>
           <a:p>
             <a:pPr indent="0" marL="0">
               <a:buNone/>
             </a:pPr>
             <a:r>
-              <a:rPr lang="en-US" sz="2000" b="1" dirty="0">
+              <a:rPr lang="en-US" sz="1700" b="1" dirty="0">
                 <a:solidFill>
                   <a:schemeClr val="tx2"/>
                 </a:solidFill>
               </a:rPr>
-              <a:t>Northern Ireland</a:t>
-            </a:r>
-            <a:endParaRPr lang="en-US" sz="2000" dirty="0"/>
-          </a:p>
-        </p:txBody>
-      </p:sp>
-      <p:sp>
-        <p:nvSpPr>
-          <p:cNvPr id="18" name="Text 16"/>
+              <a:t>Stage and next step</a:t>
+            </a:r>
+            <a:endParaRPr lang="en-US" sz="1700" dirty="0"/>
+          </a:p>
+          <a:p>
+            <a:pPr indent="0" marL="0">
+              <a:buNone/>
+            </a:pPr>
+            <a:r>
+              <a:rPr lang="en-US" sz="1400" dirty="0">
+                <a:solidFill>
+                  <a:schemeClr val="tx1"/>
+                </a:solidFill>
+              </a:rPr>
+              <a:t>Seven stages, what is waiting on you, and recent activity</a:t>
+            </a:r>
+            <a:endParaRPr lang="en-US" sz="1700" dirty="0"/>
+          </a:p>
+        </p:txBody>
+      </p:sp>
+      <p:sp>
+        <p:nvSpPr>
+          <p:cNvPr id="47" name="Read, then approve circle"/>
+          <p:cNvSpPr/>
+          <p:nvPr/>
+        </p:nvSpPr>
+        <p:spPr>
+          <a:xfrm>
+            <a:off x="7863840" y="2971800"/>
+            <a:ext cx="685800" cy="685800"/>
+          </a:xfrm>
+          <a:prstGeom prst="ellipse">
+            <a:avLst/>
+          </a:prstGeom>
+          <a:solidFill>
+            <a:schemeClr val="accent2"/>
+          </a:solidFill>
+          <a:ln/>
+        </p:spPr>
+      </p:sp>
+      <p:pic>
+        <p:nvPicPr>
+          <p:cNvPr id="48" name="Read, then approve icon" descr="preencoded.png">    </p:cNvPr>
+          <p:cNvPicPr>
+            <a:picLocks noChangeAspect="1"/>
+          </p:cNvPicPr>
+          <p:nvPr/>
+        </p:nvPicPr>
+        <p:blipFill>
+          <a:blip r:embed="rId2"/>
+          <a:stretch>
+            <a:fillRect/>
+          </a:stretch>
+        </p:blipFill>
+        <p:spPr>
+          <a:xfrm>
+            <a:off x="8035290" y="3143250"/>
+            <a:ext cx="342900" cy="342900"/>
+          </a:xfrm>
+          <a:prstGeom prst="rect">
+            <a:avLst/>
+          </a:prstGeom>
+        </p:spPr>
+      </p:pic>
+      <p:sp>
+        <p:nvSpPr>
+          <p:cNvPr id="49" name="Text 45"/>
           <p:cNvSpPr txBox="1"/>
           <p:nvPr/>
         </p:nvSpPr>
         <p:spPr>
           <a:xfrm>
-            <a:off x="9272016" y="2971800"/>
-            <a:ext cx="2148840" cy="1691640"/>
+            <a:off x="8732520" y="2926080"/>
+            <a:ext cx="2926080" cy="1371600"/>
           </a:xfrm>
           <a:prstGeom prst="rect">
             <a:avLst/>
@@ -4421,50 +5549,122 @@
               <a:buNone/>
             </a:pPr>
             <a:r>
-              <a:rPr lang="en-US" sz="1500" dirty="0">
+              <a:rPr lang="en-US" sz="1700" b="1" dirty="0">
+                <a:solidFill>
+                  <a:schemeClr val="tx2"/>
+                </a:solidFill>
+              </a:rPr>
+              <a:t>Read, then approve</a:t>
+            </a:r>
+            <a:endParaRPr lang="en-US" sz="1700" dirty="0"/>
+          </a:p>
+          <a:p>
+            <a:pPr indent="0" marL="0">
+              <a:buNone/>
+            </a:pPr>
+            <a:r>
+              <a:rPr lang="en-US" sz="1400" dirty="0">
                 <a:solidFill>
                   <a:schemeClr val="tx1"/>
                 </a:solidFill>
               </a:rPr>
-              <a:t>Domestic rates through Land &amp; Property Services; NI licence route via DVLA</a:t>
-            </a:r>
-            <a:endParaRPr lang="en-US" sz="1500" dirty="0"/>
-          </a:p>
-        </p:txBody>
-      </p:sp>
-      <p:sp>
-        <p:nvSpPr>
-          <p:cNvPr id="19" name="Text 17"/>
+              <a:t>A click from your own signed-in browser approves the exact wording you read</a:t>
+            </a:r>
+            <a:endParaRPr lang="en-US" sz="1700" dirty="0"/>
+          </a:p>
+        </p:txBody>
+      </p:sp>
+      <p:sp>
+        <p:nvSpPr>
+          <p:cNvPr id="50" name="Legal duties one by one circle"/>
+          <p:cNvSpPr/>
+          <p:nvPr/>
+        </p:nvSpPr>
+        <p:spPr>
+          <a:xfrm>
+            <a:off x="7863840" y="4480560"/>
+            <a:ext cx="685800" cy="685800"/>
+          </a:xfrm>
+          <a:prstGeom prst="ellipse">
+            <a:avLst/>
+          </a:prstGeom>
+          <a:solidFill>
+            <a:schemeClr val="accent1"/>
+          </a:solidFill>
+          <a:ln/>
+        </p:spPr>
+      </p:sp>
+      <p:pic>
+        <p:nvPicPr>
+          <p:cNvPr id="51" name="Legal duties one by one icon" descr="preencoded.png">    </p:cNvPr>
+          <p:cNvPicPr>
+            <a:picLocks noChangeAspect="1"/>
+          </p:cNvPicPr>
+          <p:nvPr/>
+        </p:nvPicPr>
+        <p:blipFill>
+          <a:blip r:embed="rId3"/>
+          <a:stretch>
+            <a:fillRect/>
+          </a:stretch>
+        </p:blipFill>
+        <p:spPr>
+          <a:xfrm>
+            <a:off x="8035290" y="4652010"/>
+            <a:ext cx="342900" cy="342900"/>
+          </a:xfrm>
+          <a:prstGeom prst="rect">
+            <a:avLst/>
+          </a:prstGeom>
+        </p:spPr>
+      </p:pic>
+      <p:sp>
+        <p:nvSpPr>
+          <p:cNvPr id="52" name="Text 47"/>
           <p:cNvSpPr txBox="1"/>
           <p:nvPr/>
         </p:nvSpPr>
         <p:spPr>
           <a:xfrm>
-            <a:off x="548640" y="5074920"/>
-            <a:ext cx="11064240" cy="731520"/>
-          </a:xfrm>
-          <a:prstGeom prst="rect">
-            <a:avLst/>
-          </a:prstGeom>
-          <a:noFill/>
-          <a:ln/>
-        </p:spPr>
-        <p:txBody>
-          <a:bodyPr wrap="square" lIns="0" tIns="0" rIns="0" bIns="0" rtlCol="0" anchor="ctr"/>
+            <a:off x="8732520" y="4434840"/>
+            <a:ext cx="2926080" cy="1371600"/>
+          </a:xfrm>
+          <a:prstGeom prst="rect">
+            <a:avLst/>
+          </a:prstGeom>
+          <a:noFill/>
+          <a:ln/>
+        </p:spPr>
+        <p:txBody>
+          <a:bodyPr wrap="square" lIns="0" tIns="0" rIns="0" bIns="0" rtlCol="0" anchor="t"/>
           <a:lstStyle/>
           <a:p>
             <a:pPr indent="0" marL="0">
               <a:buNone/>
             </a:pPr>
             <a:r>
-              <a:rPr lang="en-US" sz="1600" dirty="0">
+              <a:rPr lang="en-US" sz="1700" b="1" dirty="0">
+                <a:solidFill>
+                  <a:schemeClr val="tx2"/>
+                </a:solidFill>
+              </a:rPr>
+              <a:t>Legal duties one by one</a:t>
+            </a:r>
+            <a:endParaRPr lang="en-US" sz="1700" dirty="0"/>
+          </a:p>
+          <a:p>
+            <a:pPr indent="0" marL="0">
+              <a:buNone/>
+            </a:pPr>
+            <a:r>
+              <a:rPr lang="en-US" sz="1400" dirty="0">
                 <a:solidFill>
                   <a:schemeClr val="tx1"/>
                 </a:solidFill>
               </a:rPr>
-              <a:t>Tested with five customers: Leeds → Harrogate, Halifax → Chelmsford, Glasgow → Darlington, Cardiff → Edinburgh, Belfast → Leeds, plus a standalone Bristol → Nottingham move.</a:t>
-            </a:r>
-            <a:endParaRPr lang="en-US" sz="1600" dirty="0"/>
+              <a:t>Never in "approve all"; a reworded draft needs approving again</a:t>
+            </a:r>
+            <a:endParaRPr lang="en-US" sz="1700" dirty="0"/>
           </a:p>
         </p:txBody>
       </p:sp>
@@ -4570,7 +5770,7 @@
                   <a:schemeClr val="tx2"/>
                 </a:solidFill>
               </a:rPr>
-              <a:t>Who to contact near the new home</a:t>
+              <a:t>Works across all four UK nations</a:t>
             </a:r>
             <a:endParaRPr lang="en-US" sz="3400" dirty="0"/>
           </a:p>
@@ -4578,18 +5778,18 @@
       </p:sp>
       <p:sp>
         <p:nvSpPr>
-          <p:cNvPr id="3" name="GP practices"/>
+          <p:cNvPr id="3" name="England"/>
           <p:cNvSpPr/>
           <p:nvPr/>
         </p:nvSpPr>
         <p:spPr>
           <a:xfrm>
             <a:off x="548640" y="1463040"/>
-            <a:ext cx="3474720" cy="4023360"/>
+            <a:ext cx="2606040" cy="3291840"/>
           </a:xfrm>
           <a:prstGeom prst="roundRect">
             <a:avLst>
-              <a:gd name="adj" fmla="val 3158"/>
+              <a:gd name="adj" fmla="val 4211"/>
             </a:avLst>
           </a:prstGeom>
           <a:solidFill>
@@ -4600,14 +5800,14 @@
       </p:sp>
       <p:sp>
         <p:nvSpPr>
-          <p:cNvPr id="4" name="GP practices circle"/>
+          <p:cNvPr id="4" name="England dot"/>
           <p:cNvSpPr/>
           <p:nvPr/>
         </p:nvSpPr>
         <p:spPr>
           <a:xfrm>
-            <a:off x="822960" y="1691640"/>
-            <a:ext cx="731520" cy="731520"/>
+            <a:off x="822960" y="1737360"/>
+            <a:ext cx="502920" cy="502920"/>
           </a:xfrm>
           <a:prstGeom prst="ellipse">
             <a:avLst/>
@@ -4618,40 +5818,16 @@
           <a:ln/>
         </p:spPr>
       </p:sp>
-      <p:pic>
-        <p:nvPicPr>
-          <p:cNvPr id="5" name="GP practices icon" descr="preencoded.png">    </p:cNvPr>
-          <p:cNvPicPr>
-            <a:picLocks noChangeAspect="1"/>
-          </p:cNvPicPr>
-          <p:nvPr/>
-        </p:nvPicPr>
-        <p:blipFill>
-          <a:blip r:embed="rId1"/>
-          <a:stretch>
-            <a:fillRect/>
-          </a:stretch>
-        </p:blipFill>
-        <p:spPr>
-          <a:xfrm>
-            <a:off x="1005840" y="1874520"/>
-            <a:ext cx="365760" cy="365760"/>
-          </a:xfrm>
-          <a:prstGeom prst="rect">
-            <a:avLst/>
-          </a:prstGeom>
-        </p:spPr>
-      </p:pic>
-      <p:sp>
-        <p:nvSpPr>
-          <p:cNvPr id="6" name="Text 3"/>
+      <p:sp>
+        <p:nvSpPr>
+          <p:cNvPr id="5" name="Text 3"/>
           <p:cNvSpPr txBox="1"/>
           <p:nvPr/>
         </p:nvSpPr>
         <p:spPr>
           <a:xfrm>
-            <a:off x="1691640" y="1691640"/>
-            <a:ext cx="2194560" cy="731520"/>
+            <a:off x="822960" y="2377440"/>
+            <a:ext cx="2194560" cy="548640"/>
           </a:xfrm>
           <a:prstGeom prst="rect">
             <a:avLst/>
@@ -4667,143 +5843,67 @@
               <a:buNone/>
             </a:pPr>
             <a:r>
-              <a:rPr lang="en-US" sz="2200" b="1" dirty="0">
+              <a:rPr lang="en-US" sz="2000" b="1" dirty="0">
                 <a:solidFill>
                   <a:schemeClr val="tx2"/>
                 </a:solidFill>
               </a:rPr>
-              <a:t>GP practices</a:t>
-            </a:r>
-            <a:endParaRPr lang="en-US" sz="2200" dirty="0"/>
-          </a:p>
-        </p:txBody>
-      </p:sp>
-      <p:sp>
-        <p:nvSpPr>
-          <p:cNvPr id="7" name="Text 4"/>
+              <a:t>England</a:t>
+            </a:r>
+            <a:endParaRPr lang="en-US" sz="2000" dirty="0"/>
+          </a:p>
+        </p:txBody>
+      </p:sp>
+      <p:sp>
+        <p:nvSpPr>
+          <p:cNvPr id="6" name="Text 4"/>
           <p:cNvSpPr txBox="1"/>
           <p:nvPr/>
         </p:nvSpPr>
         <p:spPr>
           <a:xfrm>
-            <a:off x="822960" y="2606040"/>
-            <a:ext cx="3017520" cy="548640"/>
-          </a:xfrm>
-          <a:prstGeom prst="rect">
-            <a:avLst/>
-          </a:prstGeom>
-          <a:noFill/>
-          <a:ln/>
-        </p:spPr>
-        <p:txBody>
-          <a:bodyPr wrap="square" lIns="0" tIns="0" rIns="0" bIns="0" rtlCol="0" anchor="ctr"/>
+            <a:off x="822960" y="2971800"/>
+            <a:ext cx="2148840" cy="1691640"/>
+          </a:xfrm>
+          <a:prstGeom prst="rect">
+            <a:avLst/>
+          </a:prstGeom>
+          <a:noFill/>
+          <a:ln/>
+        </p:spPr>
+        <p:txBody>
+          <a:bodyPr wrap="square" lIns="0" tIns="0" rIns="0" bIns="0" rtlCol="0" anchor="t"/>
           <a:lstStyle/>
           <a:p>
             <a:pPr indent="0" marL="0">
               <a:buNone/>
             </a:pPr>
             <a:r>
-              <a:rPr lang="en-US" sz="1300" i="1" dirty="0">
-                <a:solidFill>
-                  <a:schemeClr val="accent6"/>
-                </a:solidFill>
-              </a:rPr>
-              <a:t>NHS Organisation Data Service, live</a:t>
-            </a:r>
-            <a:endParaRPr lang="en-US" sz="1300" dirty="0"/>
-          </a:p>
-        </p:txBody>
-      </p:sp>
-      <p:sp>
-        <p:nvSpPr>
-          <p:cNvPr id="8" name="Text 5"/>
-          <p:cNvSpPr txBox="1"/>
-          <p:nvPr/>
-        </p:nvSpPr>
-        <p:spPr>
-          <a:xfrm>
-            <a:off x="822960" y="3200400"/>
-            <a:ext cx="3017520" cy="2103120"/>
-          </a:xfrm>
-          <a:prstGeom prst="rect">
-            <a:avLst/>
-          </a:prstGeom>
-          <a:noFill/>
-          <a:ln/>
-        </p:spPr>
-        <p:txBody>
-          <a:bodyPr wrap="square" lIns="0" tIns="0" rIns="0" bIns="0" rtlCol="0" anchor="t"/>
-          <a:lstStyle/>
-          <a:p>
-            <a:pPr marL="342900" indent="-342900">
-              <a:spcAft>
-                <a:spcPts val="800"/>
-              </a:spcAft>
-              <a:buSzPct val="100000"/>
-              <a:buChar char="•"/>
-            </a:pPr>
-            <a:r>
               <a:rPr lang="en-US" sz="1500" dirty="0">
                 <a:solidFill>
                   <a:schemeClr val="tx1"/>
                 </a:solidFill>
               </a:rPr>
-              <a:t>Burton Croft Surgery · 0.2 km</a:t>
+              <a:t>Council tax, a water company for the old and new home, NHS GP and school search</a:t>
             </a:r>
             <a:endParaRPr lang="en-US" sz="1500" dirty="0"/>
           </a:p>
-          <a:p>
-            <a:pPr marL="342900" indent="-342900">
-              <a:spcAft>
-                <a:spcPts val="800"/>
-              </a:spcAft>
-              <a:buSzPct val="100000"/>
-              <a:buChar char="•"/>
-            </a:pPr>
-            <a:r>
-              <a:rPr lang="en-US" sz="1500" dirty="0">
-                <a:solidFill>
-                  <a:schemeClr val="tx1"/>
-                </a:solidFill>
-              </a:rPr>
-              <a:t>Laurel Bank Surgery · 0.6 km</a:t>
-            </a:r>
-            <a:endParaRPr lang="en-US" sz="1500" dirty="0"/>
-          </a:p>
-          <a:p>
-            <a:pPr marL="342900" indent="-342900">
-              <a:spcAft>
-                <a:spcPts val="800"/>
-              </a:spcAft>
-              <a:buSzPct val="100000"/>
-              <a:buChar char="•"/>
-            </a:pPr>
-            <a:r>
-              <a:rPr lang="en-US" sz="1500" dirty="0">
-                <a:solidFill>
-                  <a:schemeClr val="tx1"/>
-                </a:solidFill>
-              </a:rPr>
-              <a:t>Meanwood Health Centre · 1.3 km</a:t>
-            </a:r>
-            <a:endParaRPr lang="en-US" sz="1500" dirty="0"/>
-          </a:p>
-        </p:txBody>
-      </p:sp>
-      <p:sp>
-        <p:nvSpPr>
-          <p:cNvPr id="9" name="Schools"/>
+        </p:txBody>
+      </p:sp>
+      <p:sp>
+        <p:nvSpPr>
+          <p:cNvPr id="7" name="Wales"/>
           <p:cNvSpPr/>
           <p:nvPr/>
         </p:nvSpPr>
         <p:spPr>
           <a:xfrm>
-            <a:off x="4297680" y="1463040"/>
-            <a:ext cx="3474720" cy="4023360"/>
+            <a:off x="3364992" y="1463040"/>
+            <a:ext cx="2606040" cy="3291840"/>
           </a:xfrm>
           <a:prstGeom prst="roundRect">
             <a:avLst>
-              <a:gd name="adj" fmla="val 3158"/>
+              <a:gd name="adj" fmla="val 4211"/>
             </a:avLst>
           </a:prstGeom>
           <a:solidFill>
@@ -4814,58 +5914,34 @@
       </p:sp>
       <p:sp>
         <p:nvSpPr>
-          <p:cNvPr id="10" name="Schools circle"/>
+          <p:cNvPr id="8" name="Wales dot"/>
           <p:cNvSpPr/>
           <p:nvPr/>
         </p:nvSpPr>
         <p:spPr>
           <a:xfrm>
-            <a:off x="4572000" y="1691640"/>
-            <a:ext cx="731520" cy="731520"/>
+            <a:off x="3639312" y="1737360"/>
+            <a:ext cx="502920" cy="502920"/>
           </a:xfrm>
           <a:prstGeom prst="ellipse">
             <a:avLst/>
           </a:prstGeom>
           <a:solidFill>
-            <a:schemeClr val="accent2"/>
+            <a:schemeClr val="accent1"/>
           </a:solidFill>
           <a:ln/>
         </p:spPr>
       </p:sp>
-      <p:pic>
-        <p:nvPicPr>
-          <p:cNvPr id="11" name="Schools icon" descr="preencoded.png">    </p:cNvPr>
-          <p:cNvPicPr>
-            <a:picLocks noChangeAspect="1"/>
-          </p:cNvPicPr>
-          <p:nvPr/>
-        </p:nvPicPr>
-        <p:blipFill>
-          <a:blip r:embed="rId2"/>
-          <a:stretch>
-            <a:fillRect/>
-          </a:stretch>
-        </p:blipFill>
-        <p:spPr>
-          <a:xfrm>
-            <a:off x="4754880" y="1874520"/>
-            <a:ext cx="365760" cy="365760"/>
-          </a:xfrm>
-          <a:prstGeom prst="rect">
-            <a:avLst/>
-          </a:prstGeom>
-        </p:spPr>
-      </p:pic>
-      <p:sp>
-        <p:nvSpPr>
-          <p:cNvPr id="12" name="Text 8"/>
+      <p:sp>
+        <p:nvSpPr>
+          <p:cNvPr id="9" name="Text 7"/>
           <p:cNvSpPr txBox="1"/>
           <p:nvPr/>
         </p:nvSpPr>
         <p:spPr>
           <a:xfrm>
-            <a:off x="5440680" y="1691640"/>
-            <a:ext cx="2194560" cy="731520"/>
+            <a:off x="3639312" y="2377440"/>
+            <a:ext cx="2194560" cy="548640"/>
           </a:xfrm>
           <a:prstGeom prst="rect">
             <a:avLst/>
@@ -4881,143 +5957,67 @@
               <a:buNone/>
             </a:pPr>
             <a:r>
-              <a:rPr lang="en-US" sz="2200" b="1" dirty="0">
+              <a:rPr lang="en-US" sz="2000" b="1" dirty="0">
                 <a:solidFill>
                   <a:schemeClr val="tx2"/>
                 </a:solidFill>
               </a:rPr>
-              <a:t>Schools</a:t>
-            </a:r>
-            <a:endParaRPr lang="en-US" sz="2200" dirty="0"/>
-          </a:p>
-        </p:txBody>
-      </p:sp>
-      <p:sp>
-        <p:nvSpPr>
-          <p:cNvPr id="13" name="Text 9"/>
+              <a:t>Wales</a:t>
+            </a:r>
+            <a:endParaRPr lang="en-US" sz="2000" dirty="0"/>
+          </a:p>
+        </p:txBody>
+      </p:sp>
+      <p:sp>
+        <p:nvSpPr>
+          <p:cNvPr id="10" name="Text 8"/>
           <p:cNvSpPr txBox="1"/>
           <p:nvPr/>
         </p:nvSpPr>
         <p:spPr>
           <a:xfrm>
-            <a:off x="4572000" y="2606040"/>
-            <a:ext cx="3017520" cy="548640"/>
-          </a:xfrm>
-          <a:prstGeom prst="rect">
-            <a:avLst/>
-          </a:prstGeom>
-          <a:noFill/>
-          <a:ln/>
-        </p:spPr>
-        <p:txBody>
-          <a:bodyPr wrap="square" lIns="0" tIns="0" rIns="0" bIns="0" rtlCol="0" anchor="ctr"/>
+            <a:off x="3639312" y="2971800"/>
+            <a:ext cx="2148840" cy="1691640"/>
+          </a:xfrm>
+          <a:prstGeom prst="rect">
+            <a:avLst/>
+          </a:prstGeom>
+          <a:noFill/>
+          <a:ln/>
+        </p:spPr>
+        <p:txBody>
+          <a:bodyPr wrap="square" lIns="0" tIns="0" rIns="0" bIns="0" rtlCol="0" anchor="t"/>
           <a:lstStyle/>
           <a:p>
             <a:pPr indent="0" marL="0">
               <a:buNone/>
             </a:pPr>
             <a:r>
-              <a:rPr lang="en-US" sz="1300" i="1" dirty="0">
-                <a:solidFill>
-                  <a:schemeClr val="accent6"/>
-                </a:solidFill>
-              </a:rPr>
-              <a:t>Department for Education, 26,483 schools</a:t>
-            </a:r>
-            <a:endParaRPr lang="en-US" sz="1300" dirty="0"/>
-          </a:p>
-        </p:txBody>
-      </p:sp>
-      <p:sp>
-        <p:nvSpPr>
-          <p:cNvPr id="14" name="Text 10"/>
-          <p:cNvSpPr txBox="1"/>
-          <p:nvPr/>
-        </p:nvSpPr>
-        <p:spPr>
-          <a:xfrm>
-            <a:off x="4572000" y="3200400"/>
-            <a:ext cx="3017520" cy="2103120"/>
-          </a:xfrm>
-          <a:prstGeom prst="rect">
-            <a:avLst/>
-          </a:prstGeom>
-          <a:noFill/>
-          <a:ln/>
-        </p:spPr>
-        <p:txBody>
-          <a:bodyPr wrap="square" lIns="0" tIns="0" rIns="0" bIns="0" rtlCol="0" anchor="t"/>
-          <a:lstStyle/>
-          <a:p>
-            <a:pPr marL="342900" indent="-342900">
-              <a:spcAft>
-                <a:spcPts val="800"/>
-              </a:spcAft>
-              <a:buSzPct val="100000"/>
-              <a:buChar char="•"/>
-            </a:pPr>
-            <a:r>
               <a:rPr lang="en-US" sz="1500" dirty="0">
                 <a:solidFill>
                   <a:schemeClr val="tx1"/>
                 </a:solidFill>
               </a:rPr>
-              <a:t>Nearest schools for each child's age</a:t>
+              <a:t>Close the Welsh water account; Welsh GP and school finders signposted</a:t>
             </a:r>
             <a:endParaRPr lang="en-US" sz="1500" dirty="0"/>
           </a:p>
-          <a:p>
-            <a:pPr marL="342900" indent="-342900">
-              <a:spcAft>
-                <a:spcPts val="800"/>
-              </a:spcAft>
-              <a:buSzPct val="100000"/>
-              <a:buChar char="•"/>
-            </a:pPr>
-            <a:r>
-              <a:rPr lang="en-US" sz="1500" dirty="0">
-                <a:solidFill>
-                  <a:schemeClr val="tx1"/>
-                </a:solidFill>
-              </a:rPr>
-              <a:t>Phone, website and distance</a:t>
-            </a:r>
-            <a:endParaRPr lang="en-US" sz="1500" dirty="0"/>
-          </a:p>
-          <a:p>
-            <a:pPr marL="342900" indent="-342900">
-              <a:spcAft>
-                <a:spcPts val="800"/>
-              </a:spcAft>
-              <a:buSzPct val="100000"/>
-              <a:buChar char="•"/>
-            </a:pPr>
-            <a:r>
-              <a:rPr lang="en-US" sz="1500" dirty="0">
-                <a:solidFill>
-                  <a:schemeClr val="tx1"/>
-                </a:solidFill>
-              </a:rPr>
-              <a:t>Council admissions and childcare links</a:t>
-            </a:r>
-            <a:endParaRPr lang="en-US" sz="1500" dirty="0"/>
-          </a:p>
-        </p:txBody>
-      </p:sp>
-      <p:sp>
-        <p:nvSpPr>
-          <p:cNvPr id="15" name="Water"/>
+        </p:txBody>
+      </p:sp>
+      <p:sp>
+        <p:nvSpPr>
+          <p:cNvPr id="11" name="Scotland"/>
           <p:cNvSpPr/>
           <p:nvPr/>
         </p:nvSpPr>
         <p:spPr>
           <a:xfrm>
-            <a:off x="8046720" y="1463040"/>
-            <a:ext cx="3474720" cy="4023360"/>
+            <a:off x="6181344" y="1463040"/>
+            <a:ext cx="2606040" cy="3291840"/>
           </a:xfrm>
           <a:prstGeom prst="roundRect">
             <a:avLst>
-              <a:gd name="adj" fmla="val 3158"/>
+              <a:gd name="adj" fmla="val 4211"/>
             </a:avLst>
           </a:prstGeom>
           <a:solidFill>
@@ -5028,58 +6028,34 @@
       </p:sp>
       <p:sp>
         <p:nvSpPr>
-          <p:cNvPr id="16" name="Water circle"/>
+          <p:cNvPr id="12" name="Scotland dot"/>
           <p:cNvSpPr/>
           <p:nvPr/>
         </p:nvSpPr>
         <p:spPr>
           <a:xfrm>
-            <a:off x="8321040" y="1691640"/>
-            <a:ext cx="731520" cy="731520"/>
+            <a:off x="6455664" y="1737360"/>
+            <a:ext cx="502920" cy="502920"/>
           </a:xfrm>
           <a:prstGeom prst="ellipse">
             <a:avLst/>
           </a:prstGeom>
           <a:solidFill>
-            <a:schemeClr val="accent2"/>
+            <a:schemeClr val="accent5"/>
           </a:solidFill>
           <a:ln/>
         </p:spPr>
       </p:sp>
-      <p:pic>
-        <p:nvPicPr>
-          <p:cNvPr id="17" name="Water icon" descr="preencoded.png">    </p:cNvPr>
-          <p:cNvPicPr>
-            <a:picLocks noChangeAspect="1"/>
-          </p:cNvPicPr>
-          <p:nvPr/>
-        </p:nvPicPr>
-        <p:blipFill>
-          <a:blip r:embed="rId3"/>
-          <a:stretch>
-            <a:fillRect/>
-          </a:stretch>
-        </p:blipFill>
-        <p:spPr>
-          <a:xfrm>
-            <a:off x="8503920" y="1874520"/>
-            <a:ext cx="365760" cy="365760"/>
-          </a:xfrm>
-          <a:prstGeom prst="rect">
-            <a:avLst/>
-          </a:prstGeom>
-        </p:spPr>
-      </p:pic>
-      <p:sp>
-        <p:nvSpPr>
-          <p:cNvPr id="18" name="Text 13"/>
+      <p:sp>
+        <p:nvSpPr>
+          <p:cNvPr id="13" name="Text 11"/>
           <p:cNvSpPr txBox="1"/>
           <p:nvPr/>
         </p:nvSpPr>
         <p:spPr>
           <a:xfrm>
-            <a:off x="9189720" y="1691640"/>
-            <a:ext cx="2194560" cy="731520"/>
+            <a:off x="6455664" y="2377440"/>
+            <a:ext cx="2194560" cy="548640"/>
           </a:xfrm>
           <a:prstGeom prst="rect">
             <a:avLst/>
@@ -5095,27 +6071,105 @@
               <a:buNone/>
             </a:pPr>
             <a:r>
-              <a:rPr lang="en-US" sz="2200" b="1" dirty="0">
+              <a:rPr lang="en-US" sz="2000" b="1" dirty="0">
                 <a:solidFill>
                   <a:schemeClr val="tx2"/>
                 </a:solidFill>
               </a:rPr>
-              <a:t>Water</a:t>
-            </a:r>
-            <a:endParaRPr lang="en-US" sz="2200" dirty="0"/>
-          </a:p>
-        </p:txBody>
-      </p:sp>
-      <p:sp>
-        <p:nvSpPr>
-          <p:cNvPr id="19" name="Text 14"/>
+              <a:t>Scotland</a:t>
+            </a:r>
+            <a:endParaRPr lang="en-US" sz="2000" dirty="0"/>
+          </a:p>
+        </p:txBody>
+      </p:sp>
+      <p:sp>
+        <p:nvSpPr>
+          <p:cNvPr id="14" name="Text 12"/>
           <p:cNvSpPr txBox="1"/>
           <p:nvPr/>
         </p:nvSpPr>
         <p:spPr>
           <a:xfrm>
-            <a:off x="8321040" y="2606040"/>
-            <a:ext cx="3017520" cy="548640"/>
+            <a:off x="6455664" y="2971800"/>
+            <a:ext cx="2148840" cy="1691640"/>
+          </a:xfrm>
+          <a:prstGeom prst="rect">
+            <a:avLst/>
+          </a:prstGeom>
+          <a:noFill/>
+          <a:ln/>
+        </p:spPr>
+        <p:txBody>
+          <a:bodyPr wrap="square" lIns="0" tIns="0" rIns="0" bIns="0" rtlCol="0" anchor="t"/>
+          <a:lstStyle/>
+          <a:p>
+            <a:pPr indent="0" marL="0">
+              <a:buNone/>
+            </a:pPr>
+            <a:r>
+              <a:rPr lang="en-US" sz="1500" dirty="0">
+                <a:solidFill>
+                  <a:schemeClr val="tx1"/>
+                </a:solidFill>
+              </a:rPr>
+              <a:t>Water billed with council tax, Scottish bank holidays, Scottish GP finder</a:t>
+            </a:r>
+            <a:endParaRPr lang="en-US" sz="1500" dirty="0"/>
+          </a:p>
+        </p:txBody>
+      </p:sp>
+      <p:sp>
+        <p:nvSpPr>
+          <p:cNvPr id="15" name="Northern Ireland"/>
+          <p:cNvSpPr/>
+          <p:nvPr/>
+        </p:nvSpPr>
+        <p:spPr>
+          <a:xfrm>
+            <a:off x="8997696" y="1463040"/>
+            <a:ext cx="2606040" cy="3291840"/>
+          </a:xfrm>
+          <a:prstGeom prst="roundRect">
+            <a:avLst>
+              <a:gd name="adj" fmla="val 4211"/>
+            </a:avLst>
+          </a:prstGeom>
+          <a:solidFill>
+            <a:schemeClr val="bg2"/>
+          </a:solidFill>
+          <a:ln/>
+        </p:spPr>
+      </p:sp>
+      <p:sp>
+        <p:nvSpPr>
+          <p:cNvPr id="16" name="Northern Ireland dot"/>
+          <p:cNvSpPr/>
+          <p:nvPr/>
+        </p:nvSpPr>
+        <p:spPr>
+          <a:xfrm>
+            <a:off x="9272016" y="1737360"/>
+            <a:ext cx="502920" cy="502920"/>
+          </a:xfrm>
+          <a:prstGeom prst="ellipse">
+            <a:avLst/>
+          </a:prstGeom>
+          <a:solidFill>
+            <a:schemeClr val="accent3"/>
+          </a:solidFill>
+          <a:ln/>
+        </p:spPr>
+      </p:sp>
+      <p:sp>
+        <p:nvSpPr>
+          <p:cNvPr id="17" name="Text 15"/>
+          <p:cNvSpPr txBox="1"/>
+          <p:nvPr/>
+        </p:nvSpPr>
+        <p:spPr>
+          <a:xfrm>
+            <a:off x="9272016" y="2377440"/>
+            <a:ext cx="2194560" cy="548640"/>
           </a:xfrm>
           <a:prstGeom prst="rect">
             <a:avLst/>
@@ -5131,27 +6185,27 @@
               <a:buNone/>
             </a:pPr>
             <a:r>
-              <a:rPr lang="en-US" sz="1300" i="1" dirty="0">
-                <a:solidFill>
-                  <a:schemeClr val="accent6"/>
-                </a:solidFill>
-              </a:rPr>
-              <a:t>Checked table plus the official CCW checker</a:t>
-            </a:r>
-            <a:endParaRPr lang="en-US" sz="1300" dirty="0"/>
-          </a:p>
-        </p:txBody>
-      </p:sp>
-      <p:sp>
-        <p:nvSpPr>
-          <p:cNvPr id="20" name="Text 15"/>
+              <a:rPr lang="en-US" sz="2000" b="1" dirty="0">
+                <a:solidFill>
+                  <a:schemeClr val="tx2"/>
+                </a:solidFill>
+              </a:rPr>
+              <a:t>Northern Ireland</a:t>
+            </a:r>
+            <a:endParaRPr lang="en-US" sz="2000" dirty="0"/>
+          </a:p>
+        </p:txBody>
+      </p:sp>
+      <p:sp>
+        <p:nvSpPr>
+          <p:cNvPr id="18" name="Text 16"/>
           <p:cNvSpPr txBox="1"/>
           <p:nvPr/>
         </p:nvSpPr>
         <p:spPr>
           <a:xfrm>
-            <a:off x="8321040" y="3200400"/>
-            <a:ext cx="3017520" cy="2103120"/>
+            <a:off x="9272016" y="2971800"/>
+            <a:ext cx="2148840" cy="1691640"/>
           </a:xfrm>
           <a:prstGeom prst="rect">
             <a:avLst/>
@@ -5163,12 +6217,8 @@
           <a:bodyPr wrap="square" lIns="0" tIns="0" rIns="0" bIns="0" rtlCol="0" anchor="t"/>
           <a:lstStyle/>
           <a:p>
-            <a:pPr marL="342900" indent="-342900">
-              <a:spcAft>
-                <a:spcPts val="800"/>
-              </a:spcAft>
-              <a:buSzPct val="100000"/>
-              <a:buChar char="•"/>
+            <a:pPr indent="0" marL="0">
+              <a:buNone/>
             </a:pPr>
             <a:r>
               <a:rPr lang="en-US" sz="1500" dirty="0">
@@ -5176,81 +6226,45 @@
                   <a:schemeClr val="tx1"/>
                 </a:solidFill>
               </a:rPr>
-              <a:t>Yorkshire Water (to confirm)</a:t>
+              <a:t>Domestic rates through Land &amp; Property Services; NI licence route via DVLA</a:t>
             </a:r>
             <a:endParaRPr lang="en-US" sz="1500" dirty="0"/>
           </a:p>
-          <a:p>
-            <a:pPr marL="342900" indent="-342900">
-              <a:spcAft>
-                <a:spcPts val="800"/>
-              </a:spcAft>
-              <a:buSzPct val="100000"/>
-              <a:buChar char="•"/>
-            </a:pPr>
-            <a:r>
-              <a:rPr lang="en-US" sz="1500" dirty="0">
+        </p:txBody>
+      </p:sp>
+      <p:sp>
+        <p:nvSpPr>
+          <p:cNvPr id="19" name="Text 17"/>
+          <p:cNvSpPr txBox="1"/>
+          <p:nvPr/>
+        </p:nvSpPr>
+        <p:spPr>
+          <a:xfrm>
+            <a:off x="548640" y="5074920"/>
+            <a:ext cx="11064240" cy="731520"/>
+          </a:xfrm>
+          <a:prstGeom prst="rect">
+            <a:avLst/>
+          </a:prstGeom>
+          <a:noFill/>
+          <a:ln/>
+        </p:spPr>
+        <p:txBody>
+          <a:bodyPr wrap="square" lIns="0" tIns="0" rIns="0" bIns="0" rtlCol="0" anchor="ctr"/>
+          <a:lstStyle/>
+          <a:p>
+            <a:pPr indent="0" marL="0">
+              <a:buNone/>
+            </a:pPr>
+            <a:r>
+              <a:rPr lang="en-US" sz="1600" dirty="0">
                 <a:solidFill>
                   <a:schemeClr val="tx1"/>
                 </a:solidFill>
               </a:rPr>
-              <a:t>Water and sewerage named separately</a:t>
-            </a:r>
-            <a:endParaRPr lang="en-US" sz="1500" dirty="0"/>
-          </a:p>
-          <a:p>
-            <a:pPr marL="342900" indent="-342900">
-              <a:spcAft>
-                <a:spcPts val="800"/>
-              </a:spcAft>
-              <a:buSzPct val="100000"/>
-              <a:buChar char="•"/>
-            </a:pPr>
-            <a:r>
-              <a:rPr lang="en-US" sz="1500" dirty="0">
-                <a:solidFill>
-                  <a:schemeClr val="tx1"/>
-                </a:solidFill>
-              </a:rPr>
-              <a:t>Scotland and NI: no account needed</a:t>
-            </a:r>
-            <a:endParaRPr lang="en-US" sz="1500" dirty="0"/>
-          </a:p>
-        </p:txBody>
-      </p:sp>
-      <p:sp>
-        <p:nvSpPr>
-          <p:cNvPr id="21" name="Text 16"/>
-          <p:cNvSpPr txBox="1"/>
-          <p:nvPr/>
-        </p:nvSpPr>
-        <p:spPr>
-          <a:xfrm>
-            <a:off x="548640" y="5715000"/>
-            <a:ext cx="11064240" cy="457200"/>
-          </a:xfrm>
-          <a:prstGeom prst="rect">
-            <a:avLst/>
-          </a:prstGeom>
-          <a:noFill/>
-          <a:ln/>
-        </p:spPr>
-        <p:txBody>
-          <a:bodyPr wrap="square" lIns="0" tIns="0" rIns="0" bIns="0" rtlCol="0" anchor="ctr"/>
-          <a:lstStyle/>
-          <a:p>
-            <a:pPr indent="0" marL="0">
-              <a:buNone/>
-            </a:pPr>
-            <a:r>
-              <a:rPr lang="en-US" sz="1500" i="1" dirty="0">
-                <a:solidFill>
-                  <a:schemeClr val="tx2"/>
-                </a:solidFill>
-              </a:rPr>
-              <a:t>Live example: Belfast → Leeds LS6 3BQ. Distance is not catchment: the list says how to check practice areas and school admissions.</a:t>
-            </a:r>
-            <a:endParaRPr lang="en-US" sz="1500" dirty="0"/>
+              <a:t>Tested with five customers: Leeds → Harrogate, Halifax → Chelmsford, Glasgow → Darlington, Cardiff → Edinburgh, Belfast → Leeds, plus a standalone Bristol → Nottingham move.</a:t>
+            </a:r>
+            <a:endParaRPr lang="en-US" sz="1600" dirty="0"/>
           </a:p>
         </p:txBody>
       </p:sp>
@@ -5356,7 +6370,7 @@
                   <a:schemeClr val="tx2"/>
                 </a:solidFill>
               </a:rPr>
-              <a:t>What we built in the hackathon</a:t>
+              <a:t>Who to contact near the new home</a:t>
             </a:r>
             <a:endParaRPr lang="en-US" sz="3400" dirty="0"/>
           </a:p>
@@ -5364,18 +6378,18 @@
       </p:sp>
       <p:sp>
         <p:nvSpPr>
-          <p:cNvPr id="3" name="number 1"/>
+          <p:cNvPr id="3" name="GP practices"/>
           <p:cNvSpPr/>
           <p:nvPr/>
         </p:nvSpPr>
         <p:spPr>
           <a:xfrm>
             <a:off x="548640" y="1463040"/>
-            <a:ext cx="3474720" cy="2011680"/>
+            <a:ext cx="3474720" cy="4023360"/>
           </a:xfrm>
           <a:prstGeom prst="roundRect">
             <a:avLst>
-              <a:gd name="adj" fmla="val 5455"/>
+              <a:gd name="adj" fmla="val 3158"/>
             </a:avLst>
           </a:prstGeom>
           <a:solidFill>
@@ -5386,14 +6400,58 @@
       </p:sp>
       <p:sp>
         <p:nvSpPr>
-          <p:cNvPr id="4" name="Text 2"/>
+          <p:cNvPr id="4" name="GP practices circle"/>
+          <p:cNvSpPr/>
+          <p:nvPr/>
+        </p:nvSpPr>
+        <p:spPr>
+          <a:xfrm>
+            <a:off x="822960" y="1691640"/>
+            <a:ext cx="731520" cy="731520"/>
+          </a:xfrm>
+          <a:prstGeom prst="ellipse">
+            <a:avLst/>
+          </a:prstGeom>
+          <a:solidFill>
+            <a:schemeClr val="accent2"/>
+          </a:solidFill>
+          <a:ln/>
+        </p:spPr>
+      </p:sp>
+      <p:pic>
+        <p:nvPicPr>
+          <p:cNvPr id="5" name="GP practices icon" descr="preencoded.png">    </p:cNvPr>
+          <p:cNvPicPr>
+            <a:picLocks noChangeAspect="1"/>
+          </p:cNvPicPr>
+          <p:nvPr/>
+        </p:nvPicPr>
+        <p:blipFill>
+          <a:blip r:embed="rId1"/>
+          <a:stretch>
+            <a:fillRect/>
+          </a:stretch>
+        </p:blipFill>
+        <p:spPr>
+          <a:xfrm>
+            <a:off x="1005840" y="1874520"/>
+            <a:ext cx="365760" cy="365760"/>
+          </a:xfrm>
+          <a:prstGeom prst="rect">
+            <a:avLst/>
+          </a:prstGeom>
+        </p:spPr>
+      </p:pic>
+      <p:sp>
+        <p:nvSpPr>
+          <p:cNvPr id="6" name="Text 3"/>
           <p:cNvSpPr txBox="1"/>
           <p:nvPr/>
         </p:nvSpPr>
         <p:spPr>
           <a:xfrm>
-            <a:off x="822960" y="1645920"/>
-            <a:ext cx="2926080" cy="1005840"/>
+            <a:off x="1691640" y="1691640"/>
+            <a:ext cx="2194560" cy="731520"/>
           </a:xfrm>
           <a:prstGeom prst="rect">
             <a:avLst/>
@@ -5409,30 +6467,63 @@
               <a:buNone/>
             </a:pPr>
             <a:r>
-              <a:rPr lang="en-US" sz="5400" b="1" dirty="0">
-                <a:solidFill>
-                  <a:schemeClr val="accent2"/>
-                </a:solidFill>
-                <a:latin typeface="Cambria" pitchFamily="34" charset="0"/>
-                <a:ea typeface="Cambria" pitchFamily="34" charset="-122"/>
-                <a:cs typeface="Cambria" pitchFamily="34" charset="-120"/>
-              </a:rPr>
-              <a:t>14</a:t>
-            </a:r>
-            <a:endParaRPr lang="en-US" sz="5400" dirty="0"/>
-          </a:p>
-        </p:txBody>
-      </p:sp>
-      <p:sp>
-        <p:nvSpPr>
-          <p:cNvPr id="5" name="Text 3"/>
+              <a:rPr lang="en-US" sz="2200" b="1" dirty="0">
+                <a:solidFill>
+                  <a:schemeClr val="tx2"/>
+                </a:solidFill>
+              </a:rPr>
+              <a:t>GP practices</a:t>
+            </a:r>
+            <a:endParaRPr lang="en-US" sz="2200" dirty="0"/>
+          </a:p>
+        </p:txBody>
+      </p:sp>
+      <p:sp>
+        <p:nvSpPr>
+          <p:cNvPr id="7" name="Text 4"/>
           <p:cNvSpPr txBox="1"/>
           <p:nvPr/>
         </p:nvSpPr>
         <p:spPr>
           <a:xfrm>
-            <a:off x="822960" y="2697480"/>
-            <a:ext cx="2926080" cy="640080"/>
+            <a:off x="822960" y="2606040"/>
+            <a:ext cx="3017520" cy="548640"/>
+          </a:xfrm>
+          <a:prstGeom prst="rect">
+            <a:avLst/>
+          </a:prstGeom>
+          <a:noFill/>
+          <a:ln/>
+        </p:spPr>
+        <p:txBody>
+          <a:bodyPr wrap="square" lIns="0" tIns="0" rIns="0" bIns="0" rtlCol="0" anchor="ctr"/>
+          <a:lstStyle/>
+          <a:p>
+            <a:pPr indent="0" marL="0">
+              <a:buNone/>
+            </a:pPr>
+            <a:r>
+              <a:rPr lang="en-US" sz="1300" i="1" dirty="0">
+                <a:solidFill>
+                  <a:schemeClr val="accent6"/>
+                </a:solidFill>
+              </a:rPr>
+              <a:t>NHS Organisation Data Service, live</a:t>
+            </a:r>
+            <a:endParaRPr lang="en-US" sz="1300" dirty="0"/>
+          </a:p>
+        </p:txBody>
+      </p:sp>
+      <p:sp>
+        <p:nvSpPr>
+          <p:cNvPr id="8" name="Text 5"/>
+          <p:cNvSpPr txBox="1"/>
+          <p:nvPr/>
+        </p:nvSpPr>
+        <p:spPr>
+          <a:xfrm>
+            <a:off x="822960" y="3200400"/>
+            <a:ext cx="3017520" cy="2103120"/>
           </a:xfrm>
           <a:prstGeom prst="rect">
             <a:avLst/>
@@ -5444,35 +6535,75 @@
           <a:bodyPr wrap="square" lIns="0" tIns="0" rIns="0" bIns="0" rtlCol="0" anchor="t"/>
           <a:lstStyle/>
           <a:p>
-            <a:pPr indent="0" marL="0">
-              <a:buNone/>
-            </a:pPr>
-            <a:r>
-              <a:rPr lang="en-US" sz="1700" dirty="0">
+            <a:pPr marL="342900" indent="-342900">
+              <a:spcAft>
+                <a:spcPts val="800"/>
+              </a:spcAft>
+              <a:buSzPct val="100000"/>
+              <a:buChar char="•"/>
+            </a:pPr>
+            <a:r>
+              <a:rPr lang="en-US" sz="1500" dirty="0">
                 <a:solidFill>
                   <a:schemeClr val="tx1"/>
                 </a:solidFill>
               </a:rPr>
-              <a:t>LLM agents</a:t>
-            </a:r>
-            <a:endParaRPr lang="en-US" sz="1700" dirty="0"/>
-          </a:p>
-        </p:txBody>
-      </p:sp>
-      <p:sp>
-        <p:nvSpPr>
-          <p:cNvPr id="6" name="number 2"/>
+              <a:t>Burton Croft Surgery · 0.2 km</a:t>
+            </a:r>
+            <a:endParaRPr lang="en-US" sz="1500" dirty="0"/>
+          </a:p>
+          <a:p>
+            <a:pPr marL="342900" indent="-342900">
+              <a:spcAft>
+                <a:spcPts val="800"/>
+              </a:spcAft>
+              <a:buSzPct val="100000"/>
+              <a:buChar char="•"/>
+            </a:pPr>
+            <a:r>
+              <a:rPr lang="en-US" sz="1500" dirty="0">
+                <a:solidFill>
+                  <a:schemeClr val="tx1"/>
+                </a:solidFill>
+              </a:rPr>
+              <a:t>Laurel Bank Surgery · 0.6 km</a:t>
+            </a:r>
+            <a:endParaRPr lang="en-US" sz="1500" dirty="0"/>
+          </a:p>
+          <a:p>
+            <a:pPr marL="342900" indent="-342900">
+              <a:spcAft>
+                <a:spcPts val="800"/>
+              </a:spcAft>
+              <a:buSzPct val="100000"/>
+              <a:buChar char="•"/>
+            </a:pPr>
+            <a:r>
+              <a:rPr lang="en-US" sz="1500" dirty="0">
+                <a:solidFill>
+                  <a:schemeClr val="tx1"/>
+                </a:solidFill>
+              </a:rPr>
+              <a:t>Meanwood Health Centre · 1.3 km</a:t>
+            </a:r>
+            <a:endParaRPr lang="en-US" sz="1500" dirty="0"/>
+          </a:p>
+        </p:txBody>
+      </p:sp>
+      <p:sp>
+        <p:nvSpPr>
+          <p:cNvPr id="9" name="Schools"/>
           <p:cNvSpPr/>
           <p:nvPr/>
         </p:nvSpPr>
         <p:spPr>
           <a:xfrm>
             <a:off x="4297680" y="1463040"/>
-            <a:ext cx="3474720" cy="2011680"/>
+            <a:ext cx="3474720" cy="4023360"/>
           </a:xfrm>
           <a:prstGeom prst="roundRect">
             <a:avLst>
-              <a:gd name="adj" fmla="val 5455"/>
+              <a:gd name="adj" fmla="val 3158"/>
             </a:avLst>
           </a:prstGeom>
           <a:solidFill>
@@ -5483,14 +6614,58 @@
       </p:sp>
       <p:sp>
         <p:nvSpPr>
-          <p:cNvPr id="7" name="Text 5"/>
+          <p:cNvPr id="10" name="Schools circle"/>
+          <p:cNvSpPr/>
+          <p:nvPr/>
+        </p:nvSpPr>
+        <p:spPr>
+          <a:xfrm>
+            <a:off x="4572000" y="1691640"/>
+            <a:ext cx="731520" cy="731520"/>
+          </a:xfrm>
+          <a:prstGeom prst="ellipse">
+            <a:avLst/>
+          </a:prstGeom>
+          <a:solidFill>
+            <a:schemeClr val="accent2"/>
+          </a:solidFill>
+          <a:ln/>
+        </p:spPr>
+      </p:sp>
+      <p:pic>
+        <p:nvPicPr>
+          <p:cNvPr id="11" name="Schools icon" descr="preencoded.png">    </p:cNvPr>
+          <p:cNvPicPr>
+            <a:picLocks noChangeAspect="1"/>
+          </p:cNvPicPr>
+          <p:nvPr/>
+        </p:nvPicPr>
+        <p:blipFill>
+          <a:blip r:embed="rId2"/>
+          <a:stretch>
+            <a:fillRect/>
+          </a:stretch>
+        </p:blipFill>
+        <p:spPr>
+          <a:xfrm>
+            <a:off x="4754880" y="1874520"/>
+            <a:ext cx="365760" cy="365760"/>
+          </a:xfrm>
+          <a:prstGeom prst="rect">
+            <a:avLst/>
+          </a:prstGeom>
+        </p:spPr>
+      </p:pic>
+      <p:sp>
+        <p:nvSpPr>
+          <p:cNvPr id="12" name="Text 8"/>
           <p:cNvSpPr txBox="1"/>
           <p:nvPr/>
         </p:nvSpPr>
         <p:spPr>
           <a:xfrm>
-            <a:off x="4572000" y="1645920"/>
-            <a:ext cx="2926080" cy="1005840"/>
+            <a:off x="5440680" y="1691640"/>
+            <a:ext cx="2194560" cy="731520"/>
           </a:xfrm>
           <a:prstGeom prst="rect">
             <a:avLst/>
@@ -5506,30 +6681,63 @@
               <a:buNone/>
             </a:pPr>
             <a:r>
-              <a:rPr lang="en-US" sz="5400" b="1" dirty="0">
-                <a:solidFill>
-                  <a:schemeClr val="accent2"/>
-                </a:solidFill>
-                <a:latin typeface="Cambria" pitchFamily="34" charset="0"/>
-                <a:ea typeface="Cambria" pitchFamily="34" charset="-122"/>
-                <a:cs typeface="Cambria" pitchFamily="34" charset="-120"/>
-              </a:rPr>
-              <a:t>27</a:t>
-            </a:r>
-            <a:endParaRPr lang="en-US" sz="5400" dirty="0"/>
-          </a:p>
-        </p:txBody>
-      </p:sp>
-      <p:sp>
-        <p:nvSpPr>
-          <p:cNvPr id="8" name="Text 6"/>
+              <a:rPr lang="en-US" sz="2200" b="1" dirty="0">
+                <a:solidFill>
+                  <a:schemeClr val="tx2"/>
+                </a:solidFill>
+              </a:rPr>
+              <a:t>Schools</a:t>
+            </a:r>
+            <a:endParaRPr lang="en-US" sz="2200" dirty="0"/>
+          </a:p>
+        </p:txBody>
+      </p:sp>
+      <p:sp>
+        <p:nvSpPr>
+          <p:cNvPr id="13" name="Text 9"/>
           <p:cNvSpPr txBox="1"/>
           <p:nvPr/>
         </p:nvSpPr>
         <p:spPr>
           <a:xfrm>
-            <a:off x="4572000" y="2697480"/>
-            <a:ext cx="2926080" cy="640080"/>
+            <a:off x="4572000" y="2606040"/>
+            <a:ext cx="3017520" cy="548640"/>
+          </a:xfrm>
+          <a:prstGeom prst="rect">
+            <a:avLst/>
+          </a:prstGeom>
+          <a:noFill/>
+          <a:ln/>
+        </p:spPr>
+        <p:txBody>
+          <a:bodyPr wrap="square" lIns="0" tIns="0" rIns="0" bIns="0" rtlCol="0" anchor="ctr"/>
+          <a:lstStyle/>
+          <a:p>
+            <a:pPr indent="0" marL="0">
+              <a:buNone/>
+            </a:pPr>
+            <a:r>
+              <a:rPr lang="en-US" sz="1300" i="1" dirty="0">
+                <a:solidFill>
+                  <a:schemeClr val="accent6"/>
+                </a:solidFill>
+              </a:rPr>
+              <a:t>Department for Education, 26,483 schools</a:t>
+            </a:r>
+            <a:endParaRPr lang="en-US" sz="1300" dirty="0"/>
+          </a:p>
+        </p:txBody>
+      </p:sp>
+      <p:sp>
+        <p:nvSpPr>
+          <p:cNvPr id="14" name="Text 10"/>
+          <p:cNvSpPr txBox="1"/>
+          <p:nvPr/>
+        </p:nvSpPr>
+        <p:spPr>
+          <a:xfrm>
+            <a:off x="4572000" y="3200400"/>
+            <a:ext cx="3017520" cy="2103120"/>
           </a:xfrm>
           <a:prstGeom prst="rect">
             <a:avLst/>
@@ -5541,35 +6749,75 @@
           <a:bodyPr wrap="square" lIns="0" tIns="0" rIns="0" bIns="0" rtlCol="0" anchor="t"/>
           <a:lstStyle/>
           <a:p>
-            <a:pPr indent="0" marL="0">
-              <a:buNone/>
-            </a:pPr>
-            <a:r>
-              <a:rPr lang="en-US" sz="1700" dirty="0">
+            <a:pPr marL="342900" indent="-342900">
+              <a:spcAft>
+                <a:spcPts val="800"/>
+              </a:spcAft>
+              <a:buSzPct val="100000"/>
+              <a:buChar char="•"/>
+            </a:pPr>
+            <a:r>
+              <a:rPr lang="en-US" sz="1500" dirty="0">
                 <a:solidFill>
                   <a:schemeClr val="tx1"/>
                 </a:solidFill>
               </a:rPr>
-              <a:t>coded tools</a:t>
-            </a:r>
-            <a:endParaRPr lang="en-US" sz="1700" dirty="0"/>
-          </a:p>
-        </p:txBody>
-      </p:sp>
-      <p:sp>
-        <p:nvSpPr>
-          <p:cNvPr id="9" name="number 3"/>
+              <a:t>Nearest schools for each child's age</a:t>
+            </a:r>
+            <a:endParaRPr lang="en-US" sz="1500" dirty="0"/>
+          </a:p>
+          <a:p>
+            <a:pPr marL="342900" indent="-342900">
+              <a:spcAft>
+                <a:spcPts val="800"/>
+              </a:spcAft>
+              <a:buSzPct val="100000"/>
+              <a:buChar char="•"/>
+            </a:pPr>
+            <a:r>
+              <a:rPr lang="en-US" sz="1500" dirty="0">
+                <a:solidFill>
+                  <a:schemeClr val="tx1"/>
+                </a:solidFill>
+              </a:rPr>
+              <a:t>Phone, website and distance</a:t>
+            </a:r>
+            <a:endParaRPr lang="en-US" sz="1500" dirty="0"/>
+          </a:p>
+          <a:p>
+            <a:pPr marL="342900" indent="-342900">
+              <a:spcAft>
+                <a:spcPts val="800"/>
+              </a:spcAft>
+              <a:buSzPct val="100000"/>
+              <a:buChar char="•"/>
+            </a:pPr>
+            <a:r>
+              <a:rPr lang="en-US" sz="1500" dirty="0">
+                <a:solidFill>
+                  <a:schemeClr val="tx1"/>
+                </a:solidFill>
+              </a:rPr>
+              <a:t>Council admissions and childcare links</a:t>
+            </a:r>
+            <a:endParaRPr lang="en-US" sz="1500" dirty="0"/>
+          </a:p>
+        </p:txBody>
+      </p:sp>
+      <p:sp>
+        <p:nvSpPr>
+          <p:cNvPr id="15" name="Water"/>
           <p:cNvSpPr/>
           <p:nvPr/>
         </p:nvSpPr>
         <p:spPr>
           <a:xfrm>
             <a:off x="8046720" y="1463040"/>
-            <a:ext cx="3474720" cy="2011680"/>
+            <a:ext cx="3474720" cy="4023360"/>
           </a:xfrm>
           <a:prstGeom prst="roundRect">
             <a:avLst>
-              <a:gd name="adj" fmla="val 5455"/>
+              <a:gd name="adj" fmla="val 3158"/>
             </a:avLst>
           </a:prstGeom>
           <a:solidFill>
@@ -5580,14 +6828,58 @@
       </p:sp>
       <p:sp>
         <p:nvSpPr>
-          <p:cNvPr id="10" name="Text 8"/>
+          <p:cNvPr id="16" name="Water circle"/>
+          <p:cNvSpPr/>
+          <p:nvPr/>
+        </p:nvSpPr>
+        <p:spPr>
+          <a:xfrm>
+            <a:off x="8321040" y="1691640"/>
+            <a:ext cx="731520" cy="731520"/>
+          </a:xfrm>
+          <a:prstGeom prst="ellipse">
+            <a:avLst/>
+          </a:prstGeom>
+          <a:solidFill>
+            <a:schemeClr val="accent2"/>
+          </a:solidFill>
+          <a:ln/>
+        </p:spPr>
+      </p:sp>
+      <p:pic>
+        <p:nvPicPr>
+          <p:cNvPr id="17" name="Water icon" descr="preencoded.png">    </p:cNvPr>
+          <p:cNvPicPr>
+            <a:picLocks noChangeAspect="1"/>
+          </p:cNvPicPr>
+          <p:nvPr/>
+        </p:nvPicPr>
+        <p:blipFill>
+          <a:blip r:embed="rId3"/>
+          <a:stretch>
+            <a:fillRect/>
+          </a:stretch>
+        </p:blipFill>
+        <p:spPr>
+          <a:xfrm>
+            <a:off x="8503920" y="1874520"/>
+            <a:ext cx="365760" cy="365760"/>
+          </a:xfrm>
+          <a:prstGeom prst="rect">
+            <a:avLst/>
+          </a:prstGeom>
+        </p:spPr>
+      </p:pic>
+      <p:sp>
+        <p:nvSpPr>
+          <p:cNvPr id="18" name="Text 13"/>
           <p:cNvSpPr txBox="1"/>
           <p:nvPr/>
         </p:nvSpPr>
         <p:spPr>
           <a:xfrm>
-            <a:off x="8321040" y="1645920"/>
-            <a:ext cx="2926080" cy="1005840"/>
+            <a:off x="9189720" y="1691640"/>
+            <a:ext cx="2194560" cy="731520"/>
           </a:xfrm>
           <a:prstGeom prst="rect">
             <a:avLst/>
@@ -5603,30 +6895,63 @@
               <a:buNone/>
             </a:pPr>
             <a:r>
-              <a:rPr lang="en-US" sz="5400" b="1" dirty="0">
-                <a:solidFill>
-                  <a:schemeClr val="accent2"/>
-                </a:solidFill>
-                <a:latin typeface="Cambria" pitchFamily="34" charset="0"/>
-                <a:ea typeface="Cambria" pitchFamily="34" charset="-122"/>
-                <a:cs typeface="Cambria" pitchFamily="34" charset="-120"/>
-              </a:rPr>
-              <a:t>23</a:t>
-            </a:r>
-            <a:endParaRPr lang="en-US" sz="5400" dirty="0"/>
-          </a:p>
-        </p:txBody>
-      </p:sp>
-      <p:sp>
-        <p:nvSpPr>
-          <p:cNvPr id="11" name="Text 9"/>
+              <a:rPr lang="en-US" sz="2200" b="1" dirty="0">
+                <a:solidFill>
+                  <a:schemeClr val="tx2"/>
+                </a:solidFill>
+              </a:rPr>
+              <a:t>Water</a:t>
+            </a:r>
+            <a:endParaRPr lang="en-US" sz="2200" dirty="0"/>
+          </a:p>
+        </p:txBody>
+      </p:sp>
+      <p:sp>
+        <p:nvSpPr>
+          <p:cNvPr id="19" name="Text 14"/>
           <p:cNvSpPr txBox="1"/>
           <p:nvPr/>
         </p:nvSpPr>
         <p:spPr>
           <a:xfrm>
-            <a:off x="8321040" y="2697480"/>
-            <a:ext cx="2926080" cy="640080"/>
+            <a:off x="8321040" y="2606040"/>
+            <a:ext cx="3017520" cy="548640"/>
+          </a:xfrm>
+          <a:prstGeom prst="rect">
+            <a:avLst/>
+          </a:prstGeom>
+          <a:noFill/>
+          <a:ln/>
+        </p:spPr>
+        <p:txBody>
+          <a:bodyPr wrap="square" lIns="0" tIns="0" rIns="0" bIns="0" rtlCol="0" anchor="ctr"/>
+          <a:lstStyle/>
+          <a:p>
+            <a:pPr indent="0" marL="0">
+              <a:buNone/>
+            </a:pPr>
+            <a:r>
+              <a:rPr lang="en-US" sz="1300" i="1" dirty="0">
+                <a:solidFill>
+                  <a:schemeClr val="accent6"/>
+                </a:solidFill>
+              </a:rPr>
+              <a:t>Checked table plus the official CCW checker</a:t>
+            </a:r>
+            <a:endParaRPr lang="en-US" sz="1300" dirty="0"/>
+          </a:p>
+        </p:txBody>
+      </p:sp>
+      <p:sp>
+        <p:nvSpPr>
+          <p:cNvPr id="20" name="Text 15"/>
+          <p:cNvSpPr txBox="1"/>
+          <p:nvPr/>
+        </p:nvSpPr>
+        <p:spPr>
+          <a:xfrm>
+            <a:off x="8321040" y="3200400"/>
+            <a:ext cx="3017520" cy="2103120"/>
           </a:xfrm>
           <a:prstGeom prst="rect">
             <a:avLst/>
@@ -5638,309 +6963,94 @@
           <a:bodyPr wrap="square" lIns="0" tIns="0" rIns="0" bIns="0" rtlCol="0" anchor="t"/>
           <a:lstStyle/>
           <a:p>
+            <a:pPr marL="342900" indent="-342900">
+              <a:spcAft>
+                <a:spcPts val="800"/>
+              </a:spcAft>
+              <a:buSzPct val="100000"/>
+              <a:buChar char="•"/>
+            </a:pPr>
+            <a:r>
+              <a:rPr lang="en-US" sz="1500" dirty="0">
+                <a:solidFill>
+                  <a:schemeClr val="tx1"/>
+                </a:solidFill>
+              </a:rPr>
+              <a:t>Yorkshire Water (to confirm)</a:t>
+            </a:r>
+            <a:endParaRPr lang="en-US" sz="1500" dirty="0"/>
+          </a:p>
+          <a:p>
+            <a:pPr marL="342900" indent="-342900">
+              <a:spcAft>
+                <a:spcPts val="800"/>
+              </a:spcAft>
+              <a:buSzPct val="100000"/>
+              <a:buChar char="•"/>
+            </a:pPr>
+            <a:r>
+              <a:rPr lang="en-US" sz="1500" dirty="0">
+                <a:solidFill>
+                  <a:schemeClr val="tx1"/>
+                </a:solidFill>
+              </a:rPr>
+              <a:t>Water and sewerage named separately</a:t>
+            </a:r>
+            <a:endParaRPr lang="en-US" sz="1500" dirty="0"/>
+          </a:p>
+          <a:p>
+            <a:pPr marL="342900" indent="-342900">
+              <a:spcAft>
+                <a:spcPts val="800"/>
+              </a:spcAft>
+              <a:buSzPct val="100000"/>
+              <a:buChar char="•"/>
+            </a:pPr>
+            <a:r>
+              <a:rPr lang="en-US" sz="1500" dirty="0">
+                <a:solidFill>
+                  <a:schemeClr val="tx1"/>
+                </a:solidFill>
+              </a:rPr>
+              <a:t>Scotland and NI: no account needed</a:t>
+            </a:r>
+            <a:endParaRPr lang="en-US" sz="1500" dirty="0"/>
+          </a:p>
+        </p:txBody>
+      </p:sp>
+      <p:sp>
+        <p:nvSpPr>
+          <p:cNvPr id="21" name="Text 16"/>
+          <p:cNvSpPr txBox="1"/>
+          <p:nvPr/>
+        </p:nvSpPr>
+        <p:spPr>
+          <a:xfrm>
+            <a:off x="548640" y="5715000"/>
+            <a:ext cx="11064240" cy="457200"/>
+          </a:xfrm>
+          <a:prstGeom prst="rect">
+            <a:avLst/>
+          </a:prstGeom>
+          <a:noFill/>
+          <a:ln/>
+        </p:spPr>
+        <p:txBody>
+          <a:bodyPr wrap="square" lIns="0" tIns="0" rIns="0" bIns="0" rtlCol="0" anchor="ctr"/>
+          <a:lstStyle/>
+          <a:p>
             <a:pPr indent="0" marL="0">
               <a:buNone/>
             </a:pPr>
             <a:r>
-              <a:rPr lang="en-US" sz="1700" dirty="0">
-                <a:solidFill>
-                  <a:schemeClr val="tx1"/>
-                </a:solidFill>
-              </a:rPr>
-              <a:t>rules, 20 verified</a:t>
-            </a:r>
-            <a:endParaRPr lang="en-US" sz="1700" dirty="0"/>
-          </a:p>
-        </p:txBody>
-      </p:sp>
-      <p:sp>
-        <p:nvSpPr>
-          <p:cNvPr id="12" name="number 4"/>
-          <p:cNvSpPr/>
-          <p:nvPr/>
-        </p:nvSpPr>
-        <p:spPr>
-          <a:xfrm>
-            <a:off x="548640" y="3703320"/>
-            <a:ext cx="3474720" cy="2011680"/>
-          </a:xfrm>
-          <a:prstGeom prst="roundRect">
-            <a:avLst>
-              <a:gd name="adj" fmla="val 5455"/>
-            </a:avLst>
-          </a:prstGeom>
-          <a:solidFill>
-            <a:schemeClr val="bg2"/>
-          </a:solidFill>
-          <a:ln/>
-        </p:spPr>
-      </p:sp>
-      <p:sp>
-        <p:nvSpPr>
-          <p:cNvPr id="13" name="Text 11"/>
-          <p:cNvSpPr txBox="1"/>
-          <p:nvPr/>
-        </p:nvSpPr>
-        <p:spPr>
-          <a:xfrm>
-            <a:off x="822960" y="3886200"/>
-            <a:ext cx="2926080" cy="1005840"/>
-          </a:xfrm>
-          <a:prstGeom prst="rect">
-            <a:avLst/>
-          </a:prstGeom>
-          <a:noFill/>
-          <a:ln/>
-        </p:spPr>
-        <p:txBody>
-          <a:bodyPr wrap="square" lIns="0" tIns="0" rIns="0" bIns="0" rtlCol="0" anchor="ctr"/>
-          <a:lstStyle/>
-          <a:p>
-            <a:pPr indent="0" marL="0">
-              <a:buNone/>
-            </a:pPr>
-            <a:r>
-              <a:rPr lang="en-US" sz="5400" b="1" dirty="0">
-                <a:solidFill>
-                  <a:schemeClr val="accent2"/>
-                </a:solidFill>
-                <a:latin typeface="Cambria" pitchFamily="34" charset="0"/>
-                <a:ea typeface="Cambria" pitchFamily="34" charset="-122"/>
-                <a:cs typeface="Cambria" pitchFamily="34" charset="-120"/>
-              </a:rPr>
-              <a:t>82</a:t>
-            </a:r>
-            <a:endParaRPr lang="en-US" sz="5400" dirty="0"/>
-          </a:p>
-        </p:txBody>
-      </p:sp>
-      <p:sp>
-        <p:nvSpPr>
-          <p:cNvPr id="14" name="Text 12"/>
-          <p:cNvSpPr txBox="1"/>
-          <p:nvPr/>
-        </p:nvSpPr>
-        <p:spPr>
-          <a:xfrm>
-            <a:off x="822960" y="4937760"/>
-            <a:ext cx="2926080" cy="640080"/>
-          </a:xfrm>
-          <a:prstGeom prst="rect">
-            <a:avLst/>
-          </a:prstGeom>
-          <a:noFill/>
-          <a:ln/>
-        </p:spPr>
-        <p:txBody>
-          <a:bodyPr wrap="square" lIns="0" tIns="0" rIns="0" bIns="0" rtlCol="0" anchor="t"/>
-          <a:lstStyle/>
-          <a:p>
-            <a:pPr indent="0" marL="0">
-              <a:buNone/>
-            </a:pPr>
-            <a:r>
-              <a:rPr lang="en-US" sz="1700" dirty="0">
-                <a:solidFill>
-                  <a:schemeClr val="tx1"/>
-                </a:solidFill>
-              </a:rPr>
-              <a:t>automated tests</a:t>
-            </a:r>
-            <a:endParaRPr lang="en-US" sz="1700" dirty="0"/>
-          </a:p>
-        </p:txBody>
-      </p:sp>
-      <p:sp>
-        <p:nvSpPr>
-          <p:cNvPr id="15" name="number 5"/>
-          <p:cNvSpPr/>
-          <p:nvPr/>
-        </p:nvSpPr>
-        <p:spPr>
-          <a:xfrm>
-            <a:off x="4297680" y="3703320"/>
-            <a:ext cx="3474720" cy="2011680"/>
-          </a:xfrm>
-          <a:prstGeom prst="roundRect">
-            <a:avLst>
-              <a:gd name="adj" fmla="val 5455"/>
-            </a:avLst>
-          </a:prstGeom>
-          <a:solidFill>
-            <a:schemeClr val="bg2"/>
-          </a:solidFill>
-          <a:ln/>
-        </p:spPr>
-      </p:sp>
-      <p:sp>
-        <p:nvSpPr>
-          <p:cNvPr id="16" name="Text 14"/>
-          <p:cNvSpPr txBox="1"/>
-          <p:nvPr/>
-        </p:nvSpPr>
-        <p:spPr>
-          <a:xfrm>
-            <a:off x="4572000" y="3886200"/>
-            <a:ext cx="2926080" cy="1005840"/>
-          </a:xfrm>
-          <a:prstGeom prst="rect">
-            <a:avLst/>
-          </a:prstGeom>
-          <a:noFill/>
-          <a:ln/>
-        </p:spPr>
-        <p:txBody>
-          <a:bodyPr wrap="square" lIns="0" tIns="0" rIns="0" bIns="0" rtlCol="0" anchor="ctr"/>
-          <a:lstStyle/>
-          <a:p>
-            <a:pPr indent="0" marL="0">
-              <a:buNone/>
-            </a:pPr>
-            <a:r>
-              <a:rPr lang="en-US" sz="5400" b="1" dirty="0">
-                <a:solidFill>
-                  <a:schemeClr val="accent2"/>
-                </a:solidFill>
-                <a:latin typeface="Cambria" pitchFamily="34" charset="0"/>
-                <a:ea typeface="Cambria" pitchFamily="34" charset="-122"/>
-                <a:cs typeface="Cambria" pitchFamily="34" charset="-120"/>
-              </a:rPr>
-              <a:t>6</a:t>
-            </a:r>
-            <a:endParaRPr lang="en-US" sz="5400" dirty="0"/>
-          </a:p>
-        </p:txBody>
-      </p:sp>
-      <p:sp>
-        <p:nvSpPr>
-          <p:cNvPr id="17" name="Text 15"/>
-          <p:cNvSpPr txBox="1"/>
-          <p:nvPr/>
-        </p:nvSpPr>
-        <p:spPr>
-          <a:xfrm>
-            <a:off x="4572000" y="4937760"/>
-            <a:ext cx="2926080" cy="640080"/>
-          </a:xfrm>
-          <a:prstGeom prst="rect">
-            <a:avLst/>
-          </a:prstGeom>
-          <a:noFill/>
-          <a:ln/>
-        </p:spPr>
-        <p:txBody>
-          <a:bodyPr wrap="square" lIns="0" tIns="0" rIns="0" bIns="0" rtlCol="0" anchor="t"/>
-          <a:lstStyle/>
-          <a:p>
-            <a:pPr indent="0" marL="0">
-              <a:buNone/>
-            </a:pPr>
-            <a:r>
-              <a:rPr lang="en-US" sz="1700" dirty="0">
-                <a:solidFill>
-                  <a:schemeClr val="tx1"/>
-                </a:solidFill>
-              </a:rPr>
-              <a:t>test journeys</a:t>
-            </a:r>
-            <a:endParaRPr lang="en-US" sz="1700" dirty="0"/>
-          </a:p>
-        </p:txBody>
-      </p:sp>
-      <p:sp>
-        <p:nvSpPr>
-          <p:cNvPr id="18" name="number 6"/>
-          <p:cNvSpPr/>
-          <p:nvPr/>
-        </p:nvSpPr>
-        <p:spPr>
-          <a:xfrm>
-            <a:off x="8046720" y="3703320"/>
-            <a:ext cx="3474720" cy="2011680"/>
-          </a:xfrm>
-          <a:prstGeom prst="roundRect">
-            <a:avLst>
-              <a:gd name="adj" fmla="val 5455"/>
-            </a:avLst>
-          </a:prstGeom>
-          <a:solidFill>
-            <a:schemeClr val="bg2"/>
-          </a:solidFill>
-          <a:ln/>
-        </p:spPr>
-      </p:sp>
-      <p:sp>
-        <p:nvSpPr>
-          <p:cNvPr id="19" name="Text 17"/>
-          <p:cNvSpPr txBox="1"/>
-          <p:nvPr/>
-        </p:nvSpPr>
-        <p:spPr>
-          <a:xfrm>
-            <a:off x="8321040" y="3886200"/>
-            <a:ext cx="2926080" cy="1005840"/>
-          </a:xfrm>
-          <a:prstGeom prst="rect">
-            <a:avLst/>
-          </a:prstGeom>
-          <a:noFill/>
-          <a:ln/>
-        </p:spPr>
-        <p:txBody>
-          <a:bodyPr wrap="square" lIns="0" tIns="0" rIns="0" bIns="0" rtlCol="0" anchor="ctr"/>
-          <a:lstStyle/>
-          <a:p>
-            <a:pPr indent="0" marL="0">
-              <a:buNone/>
-            </a:pPr>
-            <a:r>
-              <a:rPr lang="en-US" sz="5400" b="1" dirty="0">
-                <a:solidFill>
-                  <a:schemeClr val="accent1"/>
-                </a:solidFill>
-                <a:latin typeface="Cambria" pitchFamily="34" charset="0"/>
-                <a:ea typeface="Cambria" pitchFamily="34" charset="-122"/>
-                <a:cs typeface="Cambria" pitchFamily="34" charset="-120"/>
-              </a:rPr>
-              <a:t>4</a:t>
-            </a:r>
-            <a:endParaRPr lang="en-US" sz="5400" dirty="0"/>
-          </a:p>
-        </p:txBody>
-      </p:sp>
-      <p:sp>
-        <p:nvSpPr>
-          <p:cNvPr id="20" name="Text 18"/>
-          <p:cNvSpPr txBox="1"/>
-          <p:nvPr/>
-        </p:nvSpPr>
-        <p:spPr>
-          <a:xfrm>
-            <a:off x="8321040" y="4937760"/>
-            <a:ext cx="2926080" cy="640080"/>
-          </a:xfrm>
-          <a:prstGeom prst="rect">
-            <a:avLst/>
-          </a:prstGeom>
-          <a:noFill/>
-          <a:ln/>
-        </p:spPr>
-        <p:txBody>
-          <a:bodyPr wrap="square" lIns="0" tIns="0" rIns="0" bIns="0" rtlCol="0" anchor="t"/>
-          <a:lstStyle/>
-          <a:p>
-            <a:pPr indent="0" marL="0">
-              <a:buNone/>
-            </a:pPr>
-            <a:r>
-              <a:rPr lang="en-US" sz="1700" dirty="0">
-                <a:solidFill>
-                  <a:schemeClr val="tx1"/>
-                </a:solidFill>
-              </a:rPr>
-              <a:t>UK nations' rules covered</a:t>
-            </a:r>
-            <a:endParaRPr lang="en-US" sz="1700" dirty="0"/>
+              <a:rPr lang="en-US" sz="1500" i="1" dirty="0">
+                <a:solidFill>
+                  <a:schemeClr val="tx2"/>
+                </a:solidFill>
+              </a:rPr>
+              <a:t>Live example: Belfast → Leeds LS6 3BQ. Distance is not catchment: the list says how to check practice areas and school admissions.</a:t>
+            </a:r>
+            <a:endParaRPr lang="en-US" sz="1500" dirty="0"/>
           </a:p>
         </p:txBody>
       </p:sp>
@@ -6046,7 +7156,7 @@
                   <a:schemeClr val="tx2"/>
                 </a:solidFill>
               </a:rPr>
-              <a:t>Why a bank, and what we would measure</a:t>
+              <a:t>What we built in the hackathon</a:t>
             </a:r>
             <a:endParaRPr lang="en-US" sz="3400" dirty="0"/>
           </a:p>
@@ -6054,22 +7164,22 @@
       </p:sp>
       <p:sp>
         <p:nvSpPr>
-          <p:cNvPr id="3" name="why bank card"/>
+          <p:cNvPr id="3" name="number 1"/>
           <p:cNvSpPr/>
           <p:nvPr/>
         </p:nvSpPr>
         <p:spPr>
           <a:xfrm>
             <a:off x="548640" y="1463040"/>
-            <a:ext cx="4206240" cy="4297680"/>
+            <a:ext cx="3474720" cy="2011680"/>
           </a:xfrm>
           <a:prstGeom prst="roundRect">
             <a:avLst>
-              <a:gd name="adj" fmla="val 2609"/>
+              <a:gd name="adj" fmla="val 5455"/>
             </a:avLst>
           </a:prstGeom>
           <a:solidFill>
-            <a:schemeClr val="tx2"/>
+            <a:schemeClr val="bg2"/>
           </a:solidFill>
           <a:ln/>
         </p:spPr>
@@ -6082,8 +7192,8 @@
         </p:nvSpPr>
         <p:spPr>
           <a:xfrm>
-            <a:off x="822960" y="1691640"/>
-            <a:ext cx="3657600" cy="822960"/>
+            <a:off x="822960" y="1645920"/>
+            <a:ext cx="2926080" cy="1005840"/>
           </a:xfrm>
           <a:prstGeom prst="rect">
             <a:avLst/>
@@ -6099,14 +7209,17 @@
               <a:buNone/>
             </a:pPr>
             <a:r>
-              <a:rPr lang="en-US" sz="2200" b="1" dirty="0">
-                <a:solidFill>
-                  <a:schemeClr val="accent4"/>
-                </a:solidFill>
-              </a:rPr>
-              <a:t>Why a bank, not a moving app</a:t>
-            </a:r>
-            <a:endParaRPr lang="en-US" sz="2200" dirty="0"/>
+              <a:rPr lang="en-US" sz="5400" b="1" dirty="0">
+                <a:solidFill>
+                  <a:schemeClr val="accent2"/>
+                </a:solidFill>
+                <a:latin typeface="Cambria" pitchFamily="34" charset="0"/>
+                <a:ea typeface="Cambria" pitchFamily="34" charset="-122"/>
+                <a:cs typeface="Cambria" pitchFamily="34" charset="-120"/>
+              </a:rPr>
+              <a:t>14</a:t>
+            </a:r>
+            <a:endParaRPr lang="en-US" sz="5400" dirty="0"/>
           </a:p>
         </p:txBody>
       </p:sp>
@@ -6118,8 +7231,8 @@
         </p:nvSpPr>
         <p:spPr>
           <a:xfrm>
-            <a:off x="822960" y="2651760"/>
-            <a:ext cx="3657600" cy="2743200"/>
+            <a:off x="822960" y="2697480"/>
+            <a:ext cx="2926080" cy="640080"/>
           </a:xfrm>
           <a:prstGeom prst="rect">
             <a:avLst/>
@@ -6131,77 +7244,39 @@
           <a:bodyPr wrap="square" lIns="0" tIns="0" rIns="0" bIns="0" rtlCol="0" anchor="t"/>
           <a:lstStyle/>
           <a:p>
-            <a:pPr marL="342900" indent="-342900">
-              <a:spcAft>
-                <a:spcPts val="1200"/>
-              </a:spcAft>
-              <a:buSzPct val="100000"/>
-              <a:buChar char="•"/>
-            </a:pPr>
-            <a:r>
-              <a:rPr lang="en-US" sz="1800" dirty="0">
-                <a:solidFill>
-                  <a:schemeClr val="bg1"/>
-                </a:solidFill>
-              </a:rPr>
-              <a:t>Sees who the customer pays</a:t>
-            </a:r>
-            <a:endParaRPr lang="en-US" sz="1800" dirty="0"/>
-          </a:p>
-          <a:p>
-            <a:pPr marL="342900" indent="-342900">
-              <a:spcAft>
-                <a:spcPts val="1200"/>
-              </a:spcAft>
-              <a:buSzPct val="100000"/>
-              <a:buChar char="•"/>
-            </a:pPr>
-            <a:r>
-              <a:rPr lang="en-US" sz="1800" dirty="0">
-                <a:solidFill>
-                  <a:schemeClr val="bg1"/>
-                </a:solidFill>
-              </a:rPr>
-              <a:t>Knows the completion date</a:t>
-            </a:r>
-            <a:endParaRPr lang="en-US" sz="1800" dirty="0"/>
-          </a:p>
-          <a:p>
-            <a:pPr marL="342900" indent="-342900">
-              <a:spcAft>
-                <a:spcPts val="1200"/>
-              </a:spcAft>
-              <a:buSzPct val="100000"/>
-              <a:buChar char="•"/>
-            </a:pPr>
-            <a:r>
-              <a:rPr lang="en-US" sz="1800" dirty="0">
-                <a:solidFill>
-                  <a:schemeClr val="bg1"/>
-                </a:solidFill>
-              </a:rPr>
-              <a:t>Already trusted with the data</a:t>
-            </a:r>
-            <a:endParaRPr lang="en-US" sz="1800" dirty="0"/>
-          </a:p>
-        </p:txBody>
-      </p:sp>
-      <p:sp>
-        <p:nvSpPr>
-          <p:cNvPr id="6" name="kpi dot 1"/>
+            <a:pPr indent="0" marL="0">
+              <a:buNone/>
+            </a:pPr>
+            <a:r>
+              <a:rPr lang="en-US" sz="1700" dirty="0">
+                <a:solidFill>
+                  <a:schemeClr val="tx1"/>
+                </a:solidFill>
+              </a:rPr>
+              <a:t>LLM agents</a:t>
+            </a:r>
+            <a:endParaRPr lang="en-US" sz="1700" dirty="0"/>
+          </a:p>
+        </p:txBody>
+      </p:sp>
+      <p:sp>
+        <p:nvSpPr>
+          <p:cNvPr id="6" name="number 2"/>
           <p:cNvSpPr/>
           <p:nvPr/>
         </p:nvSpPr>
         <p:spPr>
           <a:xfrm>
-            <a:off x="5120640" y="1572768"/>
-            <a:ext cx="274320" cy="274320"/>
-          </a:xfrm>
-          <a:prstGeom prst="ellipse">
-            <a:avLst/>
+            <a:off x="4297680" y="1463040"/>
+            <a:ext cx="3474720" cy="2011680"/>
+          </a:xfrm>
+          <a:prstGeom prst="roundRect">
+            <a:avLst>
+              <a:gd name="adj" fmla="val 5455"/>
+            </a:avLst>
           </a:prstGeom>
           <a:solidFill>
-            <a:schemeClr val="accent1"/>
+            <a:schemeClr val="bg2"/>
           </a:solidFill>
           <a:ln/>
         </p:spPr>
@@ -6214,8 +7289,47 @@
         </p:nvSpPr>
         <p:spPr>
           <a:xfrm>
-            <a:off x="5532120" y="1463040"/>
-            <a:ext cx="2743200" cy="1280160"/>
+            <a:off x="4572000" y="1645920"/>
+            <a:ext cx="2926080" cy="1005840"/>
+          </a:xfrm>
+          <a:prstGeom prst="rect">
+            <a:avLst/>
+          </a:prstGeom>
+          <a:noFill/>
+          <a:ln/>
+        </p:spPr>
+        <p:txBody>
+          <a:bodyPr wrap="square" lIns="0" tIns="0" rIns="0" bIns="0" rtlCol="0" anchor="ctr"/>
+          <a:lstStyle/>
+          <a:p>
+            <a:pPr indent="0" marL="0">
+              <a:buNone/>
+            </a:pPr>
+            <a:r>
+              <a:rPr lang="en-US" sz="5400" b="1" dirty="0">
+                <a:solidFill>
+                  <a:schemeClr val="accent2"/>
+                </a:solidFill>
+                <a:latin typeface="Cambria" pitchFamily="34" charset="0"/>
+                <a:ea typeface="Cambria" pitchFamily="34" charset="-122"/>
+                <a:cs typeface="Cambria" pitchFamily="34" charset="-120"/>
+              </a:rPr>
+              <a:t>27</a:t>
+            </a:r>
+            <a:endParaRPr lang="en-US" sz="5400" dirty="0"/>
+          </a:p>
+        </p:txBody>
+      </p:sp>
+      <p:sp>
+        <p:nvSpPr>
+          <p:cNvPr id="8" name="Text 6"/>
+          <p:cNvSpPr txBox="1"/>
+          <p:nvPr/>
+        </p:nvSpPr>
+        <p:spPr>
+          <a:xfrm>
+            <a:off x="4572000" y="2697480"/>
+            <a:ext cx="2926080" cy="640080"/>
           </a:xfrm>
           <a:prstGeom prst="rect">
             <a:avLst/>
@@ -6231,120 +7345,77 @@
               <a:buNone/>
             </a:pPr>
             <a:r>
-              <a:rPr lang="en-US" sz="1600" b="1" dirty="0">
-                <a:solidFill>
-                  <a:schemeClr val="tx2"/>
-                </a:solidFill>
-              </a:rPr>
-              <a:t>Fewer servicing contacts</a:t>
-            </a:r>
-            <a:endParaRPr lang="en-US" sz="1600" dirty="0"/>
-          </a:p>
+              <a:rPr lang="en-US" sz="1700" dirty="0">
+                <a:solidFill>
+                  <a:schemeClr val="tx1"/>
+                </a:solidFill>
+              </a:rPr>
+              <a:t>coded tools</a:t>
+            </a:r>
+            <a:endParaRPr lang="en-US" sz="1700" dirty="0"/>
+          </a:p>
+        </p:txBody>
+      </p:sp>
+      <p:sp>
+        <p:nvSpPr>
+          <p:cNvPr id="9" name="number 3"/>
+          <p:cNvSpPr/>
+          <p:nvPr/>
+        </p:nvSpPr>
+        <p:spPr>
+          <a:xfrm>
+            <a:off x="8046720" y="1463040"/>
+            <a:ext cx="3474720" cy="2011680"/>
+          </a:xfrm>
+          <a:prstGeom prst="roundRect">
+            <a:avLst>
+              <a:gd name="adj" fmla="val 5455"/>
+            </a:avLst>
+          </a:prstGeom>
+          <a:solidFill>
+            <a:schemeClr val="bg2"/>
+          </a:solidFill>
+          <a:ln/>
+        </p:spPr>
+      </p:sp>
+      <p:sp>
+        <p:nvSpPr>
+          <p:cNvPr id="10" name="Text 8"/>
+          <p:cNvSpPr txBox="1"/>
+          <p:nvPr/>
+        </p:nvSpPr>
+        <p:spPr>
+          <a:xfrm>
+            <a:off x="8321040" y="1645920"/>
+            <a:ext cx="2926080" cy="1005840"/>
+          </a:xfrm>
+          <a:prstGeom prst="rect">
+            <a:avLst/>
+          </a:prstGeom>
+          <a:noFill/>
+          <a:ln/>
+        </p:spPr>
+        <p:txBody>
+          <a:bodyPr wrap="square" lIns="0" tIns="0" rIns="0" bIns="0" rtlCol="0" anchor="ctr"/>
+          <a:lstStyle/>
           <a:p>
             <a:pPr indent="0" marL="0">
               <a:buNone/>
             </a:pPr>
             <a:r>
-              <a:rPr lang="en-US" sz="1400" dirty="0">
-                <a:solidFill>
-                  <a:schemeClr val="tx1"/>
-                </a:solidFill>
-              </a:rPr>
-              <a:t>address changes and moving queries</a:t>
-            </a:r>
-            <a:endParaRPr lang="en-US" sz="1600" dirty="0"/>
-          </a:p>
-        </p:txBody>
-      </p:sp>
-      <p:sp>
-        <p:nvSpPr>
-          <p:cNvPr id="8" name="kpi dot 2"/>
-          <p:cNvSpPr/>
-          <p:nvPr/>
-        </p:nvSpPr>
-        <p:spPr>
-          <a:xfrm>
-            <a:off x="8412480" y="1572768"/>
-            <a:ext cx="274320" cy="274320"/>
-          </a:xfrm>
-          <a:prstGeom prst="ellipse">
-            <a:avLst/>
-          </a:prstGeom>
-          <a:solidFill>
-            <a:schemeClr val="accent1"/>
-          </a:solidFill>
-          <a:ln/>
-        </p:spPr>
-      </p:sp>
-      <p:sp>
-        <p:nvSpPr>
-          <p:cNvPr id="9" name="Text 7"/>
-          <p:cNvSpPr txBox="1"/>
-          <p:nvPr/>
-        </p:nvSpPr>
-        <p:spPr>
-          <a:xfrm>
-            <a:off x="8823960" y="1463040"/>
-            <a:ext cx="2743200" cy="1280160"/>
-          </a:xfrm>
-          <a:prstGeom prst="rect">
-            <a:avLst/>
-          </a:prstGeom>
-          <a:noFill/>
-          <a:ln/>
-        </p:spPr>
-        <p:txBody>
-          <a:bodyPr wrap="square" lIns="0" tIns="0" rIns="0" bIns="0" rtlCol="0" anchor="t"/>
-          <a:lstStyle/>
-          <a:p>
-            <a:pPr indent="0" marL="0">
-              <a:buNone/>
-            </a:pPr>
-            <a:r>
-              <a:rPr lang="en-US" sz="1600" b="1" dirty="0">
-                <a:solidFill>
-                  <a:schemeClr val="tx2"/>
-                </a:solidFill>
-              </a:rPr>
-              <a:t>Satisfaction at completion</a:t>
-            </a:r>
-            <a:endParaRPr lang="en-US" sz="1600" dirty="0"/>
-          </a:p>
-          <a:p>
-            <a:pPr indent="0" marL="0">
-              <a:buNone/>
-            </a:pPr>
-            <a:r>
-              <a:rPr lang="en-US" sz="1400" dirty="0">
-                <a:solidFill>
-                  <a:schemeClr val="tx1"/>
-                </a:solidFill>
-              </a:rPr>
-              <a:t>and Consumer Duty evidence</a:t>
-            </a:r>
-            <a:endParaRPr lang="en-US" sz="1600" dirty="0"/>
-          </a:p>
-        </p:txBody>
-      </p:sp>
-      <p:sp>
-        <p:nvSpPr>
-          <p:cNvPr id="10" name="kpi dot 3"/>
-          <p:cNvSpPr/>
-          <p:nvPr/>
-        </p:nvSpPr>
-        <p:spPr>
-          <a:xfrm>
-            <a:off x="5120640" y="3035808"/>
-            <a:ext cx="274320" cy="274320"/>
-          </a:xfrm>
-          <a:prstGeom prst="ellipse">
-            <a:avLst/>
-          </a:prstGeom>
-          <a:solidFill>
-            <a:schemeClr val="accent1"/>
-          </a:solidFill>
-          <a:ln/>
-        </p:spPr>
+              <a:rPr lang="en-US" sz="5400" b="1" dirty="0">
+                <a:solidFill>
+                  <a:schemeClr val="accent2"/>
+                </a:solidFill>
+                <a:latin typeface="Cambria" pitchFamily="34" charset="0"/>
+                <a:ea typeface="Cambria" pitchFamily="34" charset="-122"/>
+                <a:cs typeface="Cambria" pitchFamily="34" charset="-120"/>
+              </a:rPr>
+              <a:t>23</a:t>
+            </a:r>
+            <a:endParaRPr lang="en-US" sz="5400" dirty="0"/>
+          </a:p>
+        </p:txBody>
       </p:sp>
       <p:sp>
         <p:nvSpPr>
@@ -6354,8 +7425,8 @@
         </p:nvSpPr>
         <p:spPr>
           <a:xfrm>
-            <a:off x="5532120" y="2926080"/>
-            <a:ext cx="2743200" cy="1280160"/>
+            <a:off x="8321040" y="2697480"/>
+            <a:ext cx="2926080" cy="640080"/>
           </a:xfrm>
           <a:prstGeom prst="rect">
             <a:avLst/>
@@ -6371,47 +7442,35 @@
               <a:buNone/>
             </a:pPr>
             <a:r>
-              <a:rPr lang="en-US" sz="1600" b="1" dirty="0">
-                <a:solidFill>
-                  <a:schemeClr val="tx2"/>
-                </a:solidFill>
-              </a:rPr>
-              <a:t>Home insurance conversion</a:t>
-            </a:r>
-            <a:endParaRPr lang="en-US" sz="1600" dirty="0"/>
-          </a:p>
-          <a:p>
-            <a:pPr indent="0" marL="0">
-              <a:buNone/>
-            </a:pPr>
-            <a:r>
-              <a:rPr lang="en-US" sz="1400" dirty="0">
+              <a:rPr lang="en-US" sz="1700" dirty="0">
                 <a:solidFill>
                   <a:schemeClr val="tx1"/>
                 </a:solidFill>
               </a:rPr>
-              <a:t>an opt-in offer at the moment it is needed</a:t>
-            </a:r>
-            <a:endParaRPr lang="en-US" sz="1600" dirty="0"/>
-          </a:p>
-        </p:txBody>
-      </p:sp>
-      <p:sp>
-        <p:nvSpPr>
-          <p:cNvPr id="12" name="kpi dot 4"/>
+              <a:t>rules, 20 verified</a:t>
+            </a:r>
+            <a:endParaRPr lang="en-US" sz="1700" dirty="0"/>
+          </a:p>
+        </p:txBody>
+      </p:sp>
+      <p:sp>
+        <p:nvSpPr>
+          <p:cNvPr id="12" name="number 4"/>
           <p:cNvSpPr/>
           <p:nvPr/>
         </p:nvSpPr>
         <p:spPr>
           <a:xfrm>
-            <a:off x="8412480" y="3035808"/>
-            <a:ext cx="274320" cy="274320"/>
-          </a:xfrm>
-          <a:prstGeom prst="ellipse">
-            <a:avLst/>
+            <a:off x="548640" y="3703320"/>
+            <a:ext cx="3474720" cy="2011680"/>
+          </a:xfrm>
+          <a:prstGeom prst="roundRect">
+            <a:avLst>
+              <a:gd name="adj" fmla="val 5455"/>
+            </a:avLst>
           </a:prstGeom>
           <a:solidFill>
-            <a:schemeClr val="accent1"/>
+            <a:schemeClr val="bg2"/>
           </a:solidFill>
           <a:ln/>
         </p:spPr>
@@ -6424,8 +7483,47 @@
         </p:nvSpPr>
         <p:spPr>
           <a:xfrm>
-            <a:off x="8823960" y="2926080"/>
-            <a:ext cx="2743200" cy="1280160"/>
+            <a:off x="822960" y="3886200"/>
+            <a:ext cx="2926080" cy="1005840"/>
+          </a:xfrm>
+          <a:prstGeom prst="rect">
+            <a:avLst/>
+          </a:prstGeom>
+          <a:noFill/>
+          <a:ln/>
+        </p:spPr>
+        <p:txBody>
+          <a:bodyPr wrap="square" lIns="0" tIns="0" rIns="0" bIns="0" rtlCol="0" anchor="ctr"/>
+          <a:lstStyle/>
+          <a:p>
+            <a:pPr indent="0" marL="0">
+              <a:buNone/>
+            </a:pPr>
+            <a:r>
+              <a:rPr lang="en-US" sz="5400" b="1" dirty="0">
+                <a:solidFill>
+                  <a:schemeClr val="accent2"/>
+                </a:solidFill>
+                <a:latin typeface="Cambria" pitchFamily="34" charset="0"/>
+                <a:ea typeface="Cambria" pitchFamily="34" charset="-122"/>
+                <a:cs typeface="Cambria" pitchFamily="34" charset="-120"/>
+              </a:rPr>
+              <a:t>95</a:t>
+            </a:r>
+            <a:endParaRPr lang="en-US" sz="5400" dirty="0"/>
+          </a:p>
+        </p:txBody>
+      </p:sp>
+      <p:sp>
+        <p:nvSpPr>
+          <p:cNvPr id="14" name="Text 12"/>
+          <p:cNvSpPr txBox="1"/>
+          <p:nvPr/>
+        </p:nvSpPr>
+        <p:spPr>
+          <a:xfrm>
+            <a:off x="822960" y="4937760"/>
+            <a:ext cx="2926080" cy="640080"/>
           </a:xfrm>
           <a:prstGeom prst="rect">
             <a:avLst/>
@@ -6441,120 +7539,77 @@
               <a:buNone/>
             </a:pPr>
             <a:r>
-              <a:rPr lang="en-US" sz="1600" b="1" dirty="0">
-                <a:solidFill>
-                  <a:schemeClr val="tx2"/>
-                </a:solidFill>
-              </a:rPr>
-              <a:t>Tasks done before their due date</a:t>
-            </a:r>
-            <a:endParaRPr lang="en-US" sz="1600" dirty="0"/>
-          </a:p>
+              <a:rPr lang="en-US" sz="1700" dirty="0">
+                <a:solidFill>
+                  <a:schemeClr val="tx1"/>
+                </a:solidFill>
+              </a:rPr>
+              <a:t>automated tests</a:t>
+            </a:r>
+            <a:endParaRPr lang="en-US" sz="1700" dirty="0"/>
+          </a:p>
+        </p:txBody>
+      </p:sp>
+      <p:sp>
+        <p:nvSpPr>
+          <p:cNvPr id="15" name="number 5"/>
+          <p:cNvSpPr/>
+          <p:nvPr/>
+        </p:nvSpPr>
+        <p:spPr>
+          <a:xfrm>
+            <a:off x="4297680" y="3703320"/>
+            <a:ext cx="3474720" cy="2011680"/>
+          </a:xfrm>
+          <a:prstGeom prst="roundRect">
+            <a:avLst>
+              <a:gd name="adj" fmla="val 5455"/>
+            </a:avLst>
+          </a:prstGeom>
+          <a:solidFill>
+            <a:schemeClr val="bg2"/>
+          </a:solidFill>
+          <a:ln/>
+        </p:spPr>
+      </p:sp>
+      <p:sp>
+        <p:nvSpPr>
+          <p:cNvPr id="16" name="Text 14"/>
+          <p:cNvSpPr txBox="1"/>
+          <p:nvPr/>
+        </p:nvSpPr>
+        <p:spPr>
+          <a:xfrm>
+            <a:off x="4572000" y="3886200"/>
+            <a:ext cx="2926080" cy="1005840"/>
+          </a:xfrm>
+          <a:prstGeom prst="rect">
+            <a:avLst/>
+          </a:prstGeom>
+          <a:noFill/>
+          <a:ln/>
+        </p:spPr>
+        <p:txBody>
+          <a:bodyPr wrap="square" lIns="0" tIns="0" rIns="0" bIns="0" rtlCol="0" anchor="ctr"/>
+          <a:lstStyle/>
           <a:p>
             <a:pPr indent="0" marL="0">
               <a:buNone/>
             </a:pPr>
             <a:r>
-              <a:rPr lang="en-US" sz="1400" dirty="0">
-                <a:solidFill>
-                  <a:schemeClr val="tx1"/>
-                </a:solidFill>
-              </a:rPr>
-              <a:t>fewer missed legal obligations</a:t>
-            </a:r>
-            <a:endParaRPr lang="en-US" sz="1600" dirty="0"/>
-          </a:p>
-        </p:txBody>
-      </p:sp>
-      <p:sp>
-        <p:nvSpPr>
-          <p:cNvPr id="14" name="kpi dot 5"/>
-          <p:cNvSpPr/>
-          <p:nvPr/>
-        </p:nvSpPr>
-        <p:spPr>
-          <a:xfrm>
-            <a:off x="5120640" y="4498848"/>
-            <a:ext cx="274320" cy="274320"/>
-          </a:xfrm>
-          <a:prstGeom prst="ellipse">
-            <a:avLst/>
-          </a:prstGeom>
-          <a:solidFill>
-            <a:schemeClr val="accent1"/>
-          </a:solidFill>
-          <a:ln/>
-        </p:spPr>
-      </p:sp>
-      <p:sp>
-        <p:nvSpPr>
-          <p:cNvPr id="15" name="Text 13"/>
-          <p:cNvSpPr txBox="1"/>
-          <p:nvPr/>
-        </p:nvSpPr>
-        <p:spPr>
-          <a:xfrm>
-            <a:off x="5532120" y="4389120"/>
-            <a:ext cx="2743200" cy="1280160"/>
-          </a:xfrm>
-          <a:prstGeom prst="rect">
-            <a:avLst/>
-          </a:prstGeom>
-          <a:noFill/>
-          <a:ln/>
-        </p:spPr>
-        <p:txBody>
-          <a:bodyPr wrap="square" lIns="0" tIns="0" rIns="0" bIns="0" rtlCol="0" anchor="t"/>
-          <a:lstStyle/>
-          <a:p>
-            <a:pPr indent="0" marL="0">
-              <a:buNone/>
-            </a:pPr>
-            <a:r>
-              <a:rPr lang="en-US" sz="1600" b="1" dirty="0">
-                <a:solidFill>
-                  <a:schemeClr val="tx2"/>
-                </a:solidFill>
-              </a:rPr>
-              <a:t>Customer time saved per move</a:t>
-            </a:r>
-            <a:endParaRPr lang="en-US" sz="1600" dirty="0"/>
-          </a:p>
-          <a:p>
-            <a:pPr indent="0" marL="0">
-              <a:buNone/>
-            </a:pPr>
-            <a:r>
-              <a:rPr lang="en-US" sz="1400" dirty="0">
-                <a:solidFill>
-                  <a:schemeClr val="tx1"/>
-                </a:solidFill>
-              </a:rPr>
-              <a:t>from a task-time study</a:t>
-            </a:r>
-            <a:endParaRPr lang="en-US" sz="1600" dirty="0"/>
-          </a:p>
-        </p:txBody>
-      </p:sp>
-      <p:sp>
-        <p:nvSpPr>
-          <p:cNvPr id="16" name="kpi dot 6"/>
-          <p:cNvSpPr/>
-          <p:nvPr/>
-        </p:nvSpPr>
-        <p:spPr>
-          <a:xfrm>
-            <a:off x="8412480" y="4498848"/>
-            <a:ext cx="274320" cy="274320"/>
-          </a:xfrm>
-          <a:prstGeom prst="ellipse">
-            <a:avLst/>
-          </a:prstGeom>
-          <a:solidFill>
-            <a:schemeClr val="accent1"/>
-          </a:solidFill>
-          <a:ln/>
-        </p:spPr>
+              <a:rPr lang="en-US" sz="5400" b="1" dirty="0">
+                <a:solidFill>
+                  <a:schemeClr val="accent2"/>
+                </a:solidFill>
+                <a:latin typeface="Cambria" pitchFamily="34" charset="0"/>
+                <a:ea typeface="Cambria" pitchFamily="34" charset="-122"/>
+                <a:cs typeface="Cambria" pitchFamily="34" charset="-120"/>
+              </a:rPr>
+              <a:t>6</a:t>
+            </a:r>
+            <a:endParaRPr lang="en-US" sz="5400" dirty="0"/>
+          </a:p>
+        </p:txBody>
       </p:sp>
       <p:sp>
         <p:nvSpPr>
@@ -6564,8 +7619,8 @@
         </p:nvSpPr>
         <p:spPr>
           <a:xfrm>
-            <a:off x="8823960" y="4389120"/>
-            <a:ext cx="2743200" cy="1280160"/>
+            <a:off x="4572000" y="4937760"/>
+            <a:ext cx="2926080" cy="640080"/>
           </a:xfrm>
           <a:prstGeom prst="rect">
             <a:avLst/>
@@ -6581,64 +7636,111 @@
               <a:buNone/>
             </a:pPr>
             <a:r>
-              <a:rPr lang="en-US" sz="1600" b="1" dirty="0">
-                <a:solidFill>
-                  <a:schemeClr val="tx2"/>
-                </a:solidFill>
-              </a:rPr>
-              <a:t>Retention at product transfer</a:t>
-            </a:r>
-            <a:endParaRPr lang="en-US" sz="1600" dirty="0"/>
-          </a:p>
+              <a:rPr lang="en-US" sz="1700" dirty="0">
+                <a:solidFill>
+                  <a:schemeClr val="tx1"/>
+                </a:solidFill>
+              </a:rPr>
+              <a:t>test journeys</a:t>
+            </a:r>
+            <a:endParaRPr lang="en-US" sz="1700" dirty="0"/>
+          </a:p>
+        </p:txBody>
+      </p:sp>
+      <p:sp>
+        <p:nvSpPr>
+          <p:cNvPr id="18" name="number 6"/>
+          <p:cNvSpPr/>
+          <p:nvPr/>
+        </p:nvSpPr>
+        <p:spPr>
+          <a:xfrm>
+            <a:off x="8046720" y="3703320"/>
+            <a:ext cx="3474720" cy="2011680"/>
+          </a:xfrm>
+          <a:prstGeom prst="roundRect">
+            <a:avLst>
+              <a:gd name="adj" fmla="val 5455"/>
+            </a:avLst>
+          </a:prstGeom>
+          <a:solidFill>
+            <a:schemeClr val="bg2"/>
+          </a:solidFill>
+          <a:ln/>
+        </p:spPr>
+      </p:sp>
+      <p:sp>
+        <p:nvSpPr>
+          <p:cNvPr id="19" name="Text 17"/>
+          <p:cNvSpPr txBox="1"/>
+          <p:nvPr/>
+        </p:nvSpPr>
+        <p:spPr>
+          <a:xfrm>
+            <a:off x="8321040" y="3886200"/>
+            <a:ext cx="2926080" cy="1005840"/>
+          </a:xfrm>
+          <a:prstGeom prst="rect">
+            <a:avLst/>
+          </a:prstGeom>
+          <a:noFill/>
+          <a:ln/>
+        </p:spPr>
+        <p:txBody>
+          <a:bodyPr wrap="square" lIns="0" tIns="0" rIns="0" bIns="0" rtlCol="0" anchor="ctr"/>
+          <a:lstStyle/>
           <a:p>
             <a:pPr indent="0" marL="0">
               <a:buNone/>
             </a:pPr>
             <a:r>
-              <a:rPr lang="en-US" sz="1400" dirty="0">
+              <a:rPr lang="en-US" sz="5400" b="1" dirty="0">
+                <a:solidFill>
+                  <a:schemeClr val="accent1"/>
+                </a:solidFill>
+                <a:latin typeface="Cambria" pitchFamily="34" charset="0"/>
+                <a:ea typeface="Cambria" pitchFamily="34" charset="-122"/>
+                <a:cs typeface="Cambria" pitchFamily="34" charset="-120"/>
+              </a:rPr>
+              <a:t>4</a:t>
+            </a:r>
+            <a:endParaRPr lang="en-US" sz="5400" dirty="0"/>
+          </a:p>
+        </p:txBody>
+      </p:sp>
+      <p:sp>
+        <p:nvSpPr>
+          <p:cNvPr id="20" name="Text 18"/>
+          <p:cNvSpPr txBox="1"/>
+          <p:nvPr/>
+        </p:nvSpPr>
+        <p:spPr>
+          <a:xfrm>
+            <a:off x="8321040" y="4937760"/>
+            <a:ext cx="2926080" cy="640080"/>
+          </a:xfrm>
+          <a:prstGeom prst="rect">
+            <a:avLst/>
+          </a:prstGeom>
+          <a:noFill/>
+          <a:ln/>
+        </p:spPr>
+        <p:txBody>
+          <a:bodyPr wrap="square" lIns="0" tIns="0" rIns="0" bIns="0" rtlCol="0" anchor="t"/>
+          <a:lstStyle/>
+          <a:p>
+            <a:pPr indent="0" marL="0">
+              <a:buNone/>
+            </a:pPr>
+            <a:r>
+              <a:rPr lang="en-US" sz="1700" dirty="0">
                 <a:solidFill>
                   <a:schemeClr val="tx1"/>
                 </a:solidFill>
               </a:rPr>
-              <a:t>long-term relationship value</a:t>
-            </a:r>
-            <a:endParaRPr lang="en-US" sz="1600" dirty="0"/>
-          </a:p>
-        </p:txBody>
-      </p:sp>
-      <p:sp>
-        <p:nvSpPr>
-          <p:cNvPr id="18" name="Text 16"/>
-          <p:cNvSpPr txBox="1"/>
-          <p:nvPr/>
-        </p:nvSpPr>
-        <p:spPr>
-          <a:xfrm>
-            <a:off x="5120640" y="5897880"/>
-            <a:ext cx="6492240" cy="365760"/>
-          </a:xfrm>
-          <a:prstGeom prst="rect">
-            <a:avLst/>
-          </a:prstGeom>
-          <a:noFill/>
-          <a:ln/>
-        </p:spPr>
-        <p:txBody>
-          <a:bodyPr wrap="square" lIns="0" tIns="0" rIns="0" bIns="0" rtlCol="0" anchor="ctr"/>
-          <a:lstStyle/>
-          <a:p>
-            <a:pPr indent="0" marL="0">
-              <a:buNone/>
-            </a:pPr>
-            <a:r>
-              <a:rPr lang="en-US" sz="1200" i="1" dirty="0">
-                <a:solidFill>
-                  <a:schemeClr val="accent6"/>
-                </a:solidFill>
-              </a:rPr>
-              <a:t>Targets to measure in a pilot, not claimed results.</a:t>
-            </a:r>
-            <a:endParaRPr lang="en-US" sz="1200" dirty="0"/>
+              <a:t>UK nations' rules covered</a:t>
+            </a:r>
+            <a:endParaRPr lang="en-US" sz="1700" dirty="0"/>
           </a:p>
         </p:txBody>
       </p:sp>
@@ -6744,7 +7846,7 @@
                   <a:schemeClr val="tx2"/>
                 </a:solidFill>
               </a:rPr>
-              <a:t>Roadmap</a:t>
+              <a:t>Why a bank, and what we would measure</a:t>
             </a:r>
             <a:endParaRPr lang="en-US" sz="3400" dirty="0"/>
           </a:p>
@@ -6752,37 +7854,148 @@
       </p:sp>
       <p:sp>
         <p:nvSpPr>
-          <p:cNvPr id="3" name="timeline"/>
+          <p:cNvPr id="3" name="why bank card"/>
           <p:cNvSpPr/>
           <p:nvPr/>
         </p:nvSpPr>
         <p:spPr>
           <a:xfrm>
-            <a:off x="1097280" y="2331720"/>
-            <a:ext cx="9966960" cy="0"/>
-          </a:xfrm>
-          <a:prstGeom prst="line">
-            <a:avLst/>
-          </a:prstGeom>
-          <a:noFill/>
-          <a:ln w="38100">
-            <a:solidFill>
-              <a:schemeClr val="accent3"/>
-            </a:solidFill>
-            <a:prstDash val="solid"/>
-          </a:ln>
-        </p:spPr>
-      </p:sp>
-      <p:sp>
-        <p:nvSpPr>
-          <p:cNvPr id="4" name="step 1"/>
+            <a:off x="548640" y="1463040"/>
+            <a:ext cx="4206240" cy="4297680"/>
+          </a:xfrm>
+          <a:prstGeom prst="roundRect">
+            <a:avLst>
+              <a:gd name="adj" fmla="val 2609"/>
+            </a:avLst>
+          </a:prstGeom>
+          <a:solidFill>
+            <a:schemeClr val="tx2"/>
+          </a:solidFill>
+          <a:ln/>
+        </p:spPr>
+      </p:sp>
+      <p:sp>
+        <p:nvSpPr>
+          <p:cNvPr id="4" name="Text 2"/>
+          <p:cNvSpPr txBox="1"/>
+          <p:nvPr/>
+        </p:nvSpPr>
+        <p:spPr>
+          <a:xfrm>
+            <a:off x="822960" y="1691640"/>
+            <a:ext cx="3657600" cy="822960"/>
+          </a:xfrm>
+          <a:prstGeom prst="rect">
+            <a:avLst/>
+          </a:prstGeom>
+          <a:noFill/>
+          <a:ln/>
+        </p:spPr>
+        <p:txBody>
+          <a:bodyPr wrap="square" lIns="0" tIns="0" rIns="0" bIns="0" rtlCol="0" anchor="ctr"/>
+          <a:lstStyle/>
+          <a:p>
+            <a:pPr indent="0" marL="0">
+              <a:buNone/>
+            </a:pPr>
+            <a:r>
+              <a:rPr lang="en-US" sz="2200" b="1" dirty="0">
+                <a:solidFill>
+                  <a:schemeClr val="accent4"/>
+                </a:solidFill>
+              </a:rPr>
+              <a:t>Why a bank, not a moving app</a:t>
+            </a:r>
+            <a:endParaRPr lang="en-US" sz="2200" dirty="0"/>
+          </a:p>
+        </p:txBody>
+      </p:sp>
+      <p:sp>
+        <p:nvSpPr>
+          <p:cNvPr id="5" name="Text 3"/>
+          <p:cNvSpPr txBox="1"/>
+          <p:nvPr/>
+        </p:nvSpPr>
+        <p:spPr>
+          <a:xfrm>
+            <a:off x="822960" y="2651760"/>
+            <a:ext cx="3657600" cy="2743200"/>
+          </a:xfrm>
+          <a:prstGeom prst="rect">
+            <a:avLst/>
+          </a:prstGeom>
+          <a:noFill/>
+          <a:ln/>
+        </p:spPr>
+        <p:txBody>
+          <a:bodyPr wrap="square" lIns="0" tIns="0" rIns="0" bIns="0" rtlCol="0" anchor="t"/>
+          <a:lstStyle/>
+          <a:p>
+            <a:pPr marL="342900" indent="-342900">
+              <a:spcAft>
+                <a:spcPts val="1200"/>
+              </a:spcAft>
+              <a:buSzPct val="100000"/>
+              <a:buChar char="•"/>
+            </a:pPr>
+            <a:r>
+              <a:rPr lang="en-US" sz="1800" dirty="0">
+                <a:solidFill>
+                  <a:schemeClr val="bg1"/>
+                </a:solidFill>
+              </a:rPr>
+              <a:t>Sees who the customer pays</a:t>
+            </a:r>
+            <a:endParaRPr lang="en-US" sz="1800" dirty="0"/>
+          </a:p>
+          <a:p>
+            <a:pPr marL="342900" indent="-342900">
+              <a:spcAft>
+                <a:spcPts val="1200"/>
+              </a:spcAft>
+              <a:buSzPct val="100000"/>
+              <a:buChar char="•"/>
+            </a:pPr>
+            <a:r>
+              <a:rPr lang="en-US" sz="1800" dirty="0">
+                <a:solidFill>
+                  <a:schemeClr val="bg1"/>
+                </a:solidFill>
+              </a:rPr>
+              <a:t>Knows the completion date</a:t>
+            </a:r>
+            <a:endParaRPr lang="en-US" sz="1800" dirty="0"/>
+          </a:p>
+          <a:p>
+            <a:pPr marL="342900" indent="-342900">
+              <a:spcAft>
+                <a:spcPts val="1200"/>
+              </a:spcAft>
+              <a:buSzPct val="100000"/>
+              <a:buChar char="•"/>
+            </a:pPr>
+            <a:r>
+              <a:rPr lang="en-US" sz="1800" dirty="0">
+                <a:solidFill>
+                  <a:schemeClr val="bg1"/>
+                </a:solidFill>
+              </a:rPr>
+              <a:t>Already trusted with the data</a:t>
+            </a:r>
+            <a:endParaRPr lang="en-US" sz="1800" dirty="0"/>
+          </a:p>
+        </p:txBody>
+      </p:sp>
+      <p:sp>
+        <p:nvSpPr>
+          <p:cNvPr id="6" name="kpi dot 1"/>
           <p:cNvSpPr/>
           <p:nvPr/>
         </p:nvSpPr>
         <p:spPr>
           <a:xfrm>
-            <a:off x="1051560" y="2011680"/>
-            <a:ext cx="640080" cy="640080"/>
+            <a:off x="5120640" y="1572768"/>
+            <a:ext cx="274320" cy="274320"/>
           </a:xfrm>
           <a:prstGeom prst="ellipse">
             <a:avLst/>
@@ -6795,86 +8008,14 @@
       </p:sp>
       <p:sp>
         <p:nvSpPr>
-          <p:cNvPr id="5" name="Text 3"/>
-          <p:cNvSpPr txBox="1"/>
-          <p:nvPr/>
-        </p:nvSpPr>
-        <p:spPr>
-          <a:xfrm>
-            <a:off x="1051560" y="2011680"/>
-            <a:ext cx="640080" cy="640080"/>
-          </a:xfrm>
-          <a:prstGeom prst="rect">
-            <a:avLst/>
-          </a:prstGeom>
-          <a:noFill/>
-          <a:ln/>
-        </p:spPr>
-        <p:txBody>
-          <a:bodyPr wrap="square" lIns="0" tIns="0" rIns="0" bIns="0" rtlCol="0" anchor="ctr"/>
-          <a:lstStyle/>
-          <a:p>
-            <a:pPr algn="ctr" indent="0" marL="0">
-              <a:buNone/>
-            </a:pPr>
-            <a:r>
-              <a:rPr lang="en-US" sz="2000" b="1" dirty="0">
-                <a:solidFill>
-                  <a:schemeClr val="bg1"/>
-                </a:solidFill>
-              </a:rPr>
-              <a:t>1</a:t>
-            </a:r>
-            <a:endParaRPr lang="en-US" sz="2000" dirty="0"/>
-          </a:p>
-        </p:txBody>
-      </p:sp>
-      <p:sp>
-        <p:nvSpPr>
-          <p:cNvPr id="6" name="Text 4"/>
-          <p:cNvSpPr txBox="1"/>
-          <p:nvPr/>
-        </p:nvSpPr>
-        <p:spPr>
-          <a:xfrm>
-            <a:off x="548640" y="2880360"/>
-            <a:ext cx="2057400" cy="457200"/>
-          </a:xfrm>
-          <a:prstGeom prst="rect">
-            <a:avLst/>
-          </a:prstGeom>
-          <a:noFill/>
-          <a:ln/>
-        </p:spPr>
-        <p:txBody>
-          <a:bodyPr wrap="square" lIns="0" tIns="0" rIns="0" bIns="0" rtlCol="0" anchor="ctr"/>
-          <a:lstStyle/>
-          <a:p>
-            <a:pPr indent="0" marL="0">
-              <a:buNone/>
-            </a:pPr>
-            <a:r>
-              <a:rPr lang="en-US" sz="1900" b="1" dirty="0">
-                <a:solidFill>
-                  <a:schemeClr val="tx2"/>
-                </a:solidFill>
-              </a:rPr>
-              <a:t>Open Banking</a:t>
-            </a:r>
-            <a:endParaRPr lang="en-US" sz="1900" dirty="0"/>
-          </a:p>
-        </p:txBody>
-      </p:sp>
-      <p:sp>
-        <p:nvSpPr>
           <p:cNvPr id="7" name="Text 5"/>
           <p:cNvSpPr txBox="1"/>
           <p:nvPr/>
         </p:nvSpPr>
         <p:spPr>
           <a:xfrm>
-            <a:off x="548640" y="3383280"/>
-            <a:ext cx="2057400" cy="1737360"/>
+            <a:off x="5532120" y="1463040"/>
+            <a:ext cx="2743200" cy="1280160"/>
           </a:xfrm>
           <a:prstGeom prst="rect">
             <a:avLst/>
@@ -6890,33 +8031,47 @@
               <a:buNone/>
             </a:pPr>
             <a:r>
-              <a:rPr lang="en-US" sz="1500" dirty="0">
+              <a:rPr lang="en-US" sz="1600" b="1" dirty="0">
+                <a:solidFill>
+                  <a:schemeClr val="tx2"/>
+                </a:solidFill>
+              </a:rPr>
+              <a:t>Fewer servicing contacts</a:t>
+            </a:r>
+            <a:endParaRPr lang="en-US" sz="1600" dirty="0"/>
+          </a:p>
+          <a:p>
+            <a:pPr indent="0" marL="0">
+              <a:buNone/>
+            </a:pPr>
+            <a:r>
+              <a:rPr lang="en-US" sz="1400" dirty="0">
                 <a:solidFill>
                   <a:schemeClr val="tx1"/>
                 </a:solidFill>
               </a:rPr>
-              <a:t>Transactions and Direct Debits from any UK bank, with consent</a:t>
-            </a:r>
-            <a:endParaRPr lang="en-US" sz="1500" dirty="0"/>
-          </a:p>
-        </p:txBody>
-      </p:sp>
-      <p:sp>
-        <p:nvSpPr>
-          <p:cNvPr id="8" name="step 2"/>
+              <a:t>address changes and moving queries</a:t>
+            </a:r>
+            <a:endParaRPr lang="en-US" sz="1600" dirty="0"/>
+          </a:p>
+        </p:txBody>
+      </p:sp>
+      <p:sp>
+        <p:nvSpPr>
+          <p:cNvPr id="8" name="kpi dot 2"/>
           <p:cNvSpPr/>
           <p:nvPr/>
         </p:nvSpPr>
         <p:spPr>
           <a:xfrm>
-            <a:off x="3291840" y="2011680"/>
-            <a:ext cx="640080" cy="640080"/>
+            <a:off x="8412480" y="1572768"/>
+            <a:ext cx="274320" cy="274320"/>
           </a:xfrm>
           <a:prstGeom prst="ellipse">
             <a:avLst/>
           </a:prstGeom>
           <a:solidFill>
-            <a:schemeClr val="accent2"/>
+            <a:schemeClr val="accent1"/>
           </a:solidFill>
           <a:ln/>
         </p:spPr>
@@ -6929,69 +8084,67 @@
         </p:nvSpPr>
         <p:spPr>
           <a:xfrm>
-            <a:off x="3291840" y="2011680"/>
-            <a:ext cx="640080" cy="640080"/>
-          </a:xfrm>
-          <a:prstGeom prst="rect">
-            <a:avLst/>
-          </a:prstGeom>
-          <a:noFill/>
-          <a:ln/>
-        </p:spPr>
-        <p:txBody>
-          <a:bodyPr wrap="square" lIns="0" tIns="0" rIns="0" bIns="0" rtlCol="0" anchor="ctr"/>
-          <a:lstStyle/>
-          <a:p>
-            <a:pPr algn="ctr" indent="0" marL="0">
-              <a:buNone/>
-            </a:pPr>
-            <a:r>
-              <a:rPr lang="en-US" sz="2000" b="1" dirty="0">
-                <a:solidFill>
-                  <a:schemeClr val="bg1"/>
-                </a:solidFill>
-              </a:rPr>
-              <a:t>2</a:t>
-            </a:r>
-            <a:endParaRPr lang="en-US" sz="2000" dirty="0"/>
-          </a:p>
-        </p:txBody>
-      </p:sp>
-      <p:sp>
-        <p:nvSpPr>
-          <p:cNvPr id="10" name="Text 8"/>
-          <p:cNvSpPr txBox="1"/>
-          <p:nvPr/>
-        </p:nvSpPr>
-        <p:spPr>
-          <a:xfrm>
-            <a:off x="2788920" y="2880360"/>
-            <a:ext cx="2057400" cy="457200"/>
-          </a:xfrm>
-          <a:prstGeom prst="rect">
-            <a:avLst/>
-          </a:prstGeom>
-          <a:noFill/>
-          <a:ln/>
-        </p:spPr>
-        <p:txBody>
-          <a:bodyPr wrap="square" lIns="0" tIns="0" rIns="0" bIns="0" rtlCol="0" anchor="ctr"/>
+            <a:off x="8823960" y="1463040"/>
+            <a:ext cx="2743200" cy="1280160"/>
+          </a:xfrm>
+          <a:prstGeom prst="rect">
+            <a:avLst/>
+          </a:prstGeom>
+          <a:noFill/>
+          <a:ln/>
+        </p:spPr>
+        <p:txBody>
+          <a:bodyPr wrap="square" lIns="0" tIns="0" rIns="0" bIns="0" rtlCol="0" anchor="t"/>
           <a:lstStyle/>
           <a:p>
             <a:pPr indent="0" marL="0">
               <a:buNone/>
             </a:pPr>
             <a:r>
-              <a:rPr lang="en-US" sz="1900" b="1" dirty="0">
+              <a:rPr lang="en-US" sz="1600" b="1" dirty="0">
                 <a:solidFill>
                   <a:schemeClr val="tx2"/>
                 </a:solidFill>
               </a:rPr>
-              <a:t>Pilot</a:t>
-            </a:r>
-            <a:endParaRPr lang="en-US" sz="1900" dirty="0"/>
-          </a:p>
-        </p:txBody>
+              <a:t>Satisfaction at completion</a:t>
+            </a:r>
+            <a:endParaRPr lang="en-US" sz="1600" dirty="0"/>
+          </a:p>
+          <a:p>
+            <a:pPr indent="0" marL="0">
+              <a:buNone/>
+            </a:pPr>
+            <a:r>
+              <a:rPr lang="en-US" sz="1400" dirty="0">
+                <a:solidFill>
+                  <a:schemeClr val="tx1"/>
+                </a:solidFill>
+              </a:rPr>
+              <a:t>and Consumer Duty evidence</a:t>
+            </a:r>
+            <a:endParaRPr lang="en-US" sz="1600" dirty="0"/>
+          </a:p>
+        </p:txBody>
+      </p:sp>
+      <p:sp>
+        <p:nvSpPr>
+          <p:cNvPr id="10" name="kpi dot 3"/>
+          <p:cNvSpPr/>
+          <p:nvPr/>
+        </p:nvSpPr>
+        <p:spPr>
+          <a:xfrm>
+            <a:off x="5120640" y="3035808"/>
+            <a:ext cx="274320" cy="274320"/>
+          </a:xfrm>
+          <a:prstGeom prst="ellipse">
+            <a:avLst/>
+          </a:prstGeom>
+          <a:solidFill>
+            <a:schemeClr val="accent1"/>
+          </a:solidFill>
+          <a:ln/>
+        </p:spPr>
       </p:sp>
       <p:sp>
         <p:nvSpPr>
@@ -7001,8 +8154,8 @@
         </p:nvSpPr>
         <p:spPr>
           <a:xfrm>
-            <a:off x="2788920" y="3383280"/>
-            <a:ext cx="2057400" cy="1737360"/>
+            <a:off x="5532120" y="2926080"/>
+            <a:ext cx="2743200" cy="1280160"/>
           </a:xfrm>
           <a:prstGeom prst="rect">
             <a:avLst/>
@@ -7018,33 +8171,47 @@
               <a:buNone/>
             </a:pPr>
             <a:r>
-              <a:rPr lang="en-US" sz="1500" dirty="0">
+              <a:rPr lang="en-US" sz="1600" b="1" dirty="0">
+                <a:solidFill>
+                  <a:schemeClr val="tx2"/>
+                </a:solidFill>
+              </a:rPr>
+              <a:t>Home insurance conversion</a:t>
+            </a:r>
+            <a:endParaRPr lang="en-US" sz="1600" dirty="0"/>
+          </a:p>
+          <a:p>
+            <a:pPr indent="0" marL="0">
+              <a:buNone/>
+            </a:pPr>
+            <a:r>
+              <a:rPr lang="en-US" sz="1400" dirty="0">
                 <a:solidFill>
                   <a:schemeClr val="tx1"/>
                 </a:solidFill>
               </a:rPr>
-              <a:t>Consenting mortgage customers; address update and home insurance live</a:t>
-            </a:r>
-            <a:endParaRPr lang="en-US" sz="1500" dirty="0"/>
-          </a:p>
-        </p:txBody>
-      </p:sp>
-      <p:sp>
-        <p:nvSpPr>
-          <p:cNvPr id="12" name="step 3"/>
+              <a:t>an opt-in offer at the moment it is needed</a:t>
+            </a:r>
+            <a:endParaRPr lang="en-US" sz="1600" dirty="0"/>
+          </a:p>
+        </p:txBody>
+      </p:sp>
+      <p:sp>
+        <p:nvSpPr>
+          <p:cNvPr id="12" name="kpi dot 4"/>
           <p:cNvSpPr/>
           <p:nvPr/>
         </p:nvSpPr>
         <p:spPr>
           <a:xfrm>
-            <a:off x="5532120" y="2011680"/>
-            <a:ext cx="640080" cy="640080"/>
+            <a:off x="8412480" y="3035808"/>
+            <a:ext cx="274320" cy="274320"/>
           </a:xfrm>
           <a:prstGeom prst="ellipse">
             <a:avLst/>
           </a:prstGeom>
           <a:solidFill>
-            <a:schemeClr val="accent2"/>
+            <a:schemeClr val="accent1"/>
           </a:solidFill>
           <a:ln/>
         </p:spPr>
@@ -7057,69 +8224,67 @@
         </p:nvSpPr>
         <p:spPr>
           <a:xfrm>
-            <a:off x="5532120" y="2011680"/>
-            <a:ext cx="640080" cy="640080"/>
-          </a:xfrm>
-          <a:prstGeom prst="rect">
-            <a:avLst/>
-          </a:prstGeom>
-          <a:noFill/>
-          <a:ln/>
-        </p:spPr>
-        <p:txBody>
-          <a:bodyPr wrap="square" lIns="0" tIns="0" rIns="0" bIns="0" rtlCol="0" anchor="ctr"/>
-          <a:lstStyle/>
-          <a:p>
-            <a:pPr algn="ctr" indent="0" marL="0">
-              <a:buNone/>
-            </a:pPr>
-            <a:r>
-              <a:rPr lang="en-US" sz="2000" b="1" dirty="0">
-                <a:solidFill>
-                  <a:schemeClr val="bg1"/>
-                </a:solidFill>
-              </a:rPr>
-              <a:t>3</a:t>
-            </a:r>
-            <a:endParaRPr lang="en-US" sz="2000" dirty="0"/>
-          </a:p>
-        </p:txBody>
-      </p:sp>
-      <p:sp>
-        <p:nvSpPr>
-          <p:cNvPr id="14" name="Text 12"/>
-          <p:cNvSpPr txBox="1"/>
-          <p:nvPr/>
-        </p:nvSpPr>
-        <p:spPr>
-          <a:xfrm>
-            <a:off x="5029200" y="2880360"/>
-            <a:ext cx="2057400" cy="457200"/>
-          </a:xfrm>
-          <a:prstGeom prst="rect">
-            <a:avLst/>
-          </a:prstGeom>
-          <a:noFill/>
-          <a:ln/>
-        </p:spPr>
-        <p:txBody>
-          <a:bodyPr wrap="square" lIns="0" tIns="0" rIns="0" bIns="0" rtlCol="0" anchor="ctr"/>
+            <a:off x="8823960" y="2926080"/>
+            <a:ext cx="2743200" cy="1280160"/>
+          </a:xfrm>
+          <a:prstGeom prst="rect">
+            <a:avLst/>
+          </a:prstGeom>
+          <a:noFill/>
+          <a:ln/>
+        </p:spPr>
+        <p:txBody>
+          <a:bodyPr wrap="square" lIns="0" tIns="0" rIns="0" bIns="0" rtlCol="0" anchor="t"/>
           <a:lstStyle/>
           <a:p>
             <a:pPr indent="0" marL="0">
               <a:buNone/>
             </a:pPr>
             <a:r>
-              <a:rPr lang="en-US" sz="1900" b="1" dirty="0">
+              <a:rPr lang="en-US" sz="1600" b="1" dirty="0">
                 <a:solidFill>
                   <a:schemeClr val="tx2"/>
                 </a:solidFill>
               </a:rPr>
-              <a:t>Partner APIs</a:t>
-            </a:r>
-            <a:endParaRPr lang="en-US" sz="1900" dirty="0"/>
-          </a:p>
-        </p:txBody>
+              <a:t>Tasks done before their due date</a:t>
+            </a:r>
+            <a:endParaRPr lang="en-US" sz="1600" dirty="0"/>
+          </a:p>
+          <a:p>
+            <a:pPr indent="0" marL="0">
+              <a:buNone/>
+            </a:pPr>
+            <a:r>
+              <a:rPr lang="en-US" sz="1400" dirty="0">
+                <a:solidFill>
+                  <a:schemeClr val="tx1"/>
+                </a:solidFill>
+              </a:rPr>
+              <a:t>fewer missed legal obligations</a:t>
+            </a:r>
+            <a:endParaRPr lang="en-US" sz="1600" dirty="0"/>
+          </a:p>
+        </p:txBody>
+      </p:sp>
+      <p:sp>
+        <p:nvSpPr>
+          <p:cNvPr id="14" name="kpi dot 5"/>
+          <p:cNvSpPr/>
+          <p:nvPr/>
+        </p:nvSpPr>
+        <p:spPr>
+          <a:xfrm>
+            <a:off x="5120640" y="4498848"/>
+            <a:ext cx="274320" cy="274320"/>
+          </a:xfrm>
+          <a:prstGeom prst="ellipse">
+            <a:avLst/>
+          </a:prstGeom>
+          <a:solidFill>
+            <a:schemeClr val="accent1"/>
+          </a:solidFill>
+          <a:ln/>
+        </p:spPr>
       </p:sp>
       <p:sp>
         <p:nvSpPr>
@@ -7129,8 +8294,8 @@
         </p:nvSpPr>
         <p:spPr>
           <a:xfrm>
-            <a:off x="5029200" y="3383280"/>
-            <a:ext cx="2057400" cy="1737360"/>
+            <a:off x="5532120" y="4389120"/>
+            <a:ext cx="2743200" cy="1280160"/>
           </a:xfrm>
           <a:prstGeom prst="rect">
             <a:avLst/>
@@ -7146,33 +8311,47 @@
               <a:buNone/>
             </a:pPr>
             <a:r>
-              <a:rPr lang="en-US" sz="1500" dirty="0">
+              <a:rPr lang="en-US" sz="1600" b="1" dirty="0">
+                <a:solidFill>
+                  <a:schemeClr val="tx2"/>
+                </a:solidFill>
+              </a:rPr>
+              <a:t>Customer time saved per move</a:t>
+            </a:r>
+            <a:endParaRPr lang="en-US" sz="1600" dirty="0"/>
+          </a:p>
+          <a:p>
+            <a:pPr indent="0" marL="0">
+              <a:buNone/>
+            </a:pPr>
+            <a:r>
+              <a:rPr lang="en-US" sz="1400" dirty="0">
                 <a:solidFill>
                   <a:schemeClr val="tx1"/>
                 </a:solidFill>
               </a:rPr>
-              <a:t>Energy, water and broadband providers</a:t>
-            </a:r>
-            <a:endParaRPr lang="en-US" sz="1500" dirty="0"/>
-          </a:p>
-        </p:txBody>
-      </p:sp>
-      <p:sp>
-        <p:nvSpPr>
-          <p:cNvPr id="16" name="step 4"/>
+              <a:t>from a task-time study</a:t>
+            </a:r>
+            <a:endParaRPr lang="en-US" sz="1600" dirty="0"/>
+          </a:p>
+        </p:txBody>
+      </p:sp>
+      <p:sp>
+        <p:nvSpPr>
+          <p:cNvPr id="16" name="kpi dot 6"/>
           <p:cNvSpPr/>
           <p:nvPr/>
         </p:nvSpPr>
         <p:spPr>
           <a:xfrm>
-            <a:off x="7772400" y="2011680"/>
-            <a:ext cx="640080" cy="640080"/>
+            <a:off x="8412480" y="4498848"/>
+            <a:ext cx="274320" cy="274320"/>
           </a:xfrm>
           <a:prstGeom prst="ellipse">
             <a:avLst/>
           </a:prstGeom>
           <a:solidFill>
-            <a:schemeClr val="accent2"/>
+            <a:schemeClr val="accent1"/>
           </a:solidFill>
           <a:ln/>
         </p:spPr>
@@ -7185,31 +8364,45 @@
         </p:nvSpPr>
         <p:spPr>
           <a:xfrm>
-            <a:off x="7772400" y="2011680"/>
-            <a:ext cx="640080" cy="640080"/>
-          </a:xfrm>
-          <a:prstGeom prst="rect">
-            <a:avLst/>
-          </a:prstGeom>
-          <a:noFill/>
-          <a:ln/>
-        </p:spPr>
-        <p:txBody>
-          <a:bodyPr wrap="square" lIns="0" tIns="0" rIns="0" bIns="0" rtlCol="0" anchor="ctr"/>
-          <a:lstStyle/>
-          <a:p>
-            <a:pPr algn="ctr" indent="0" marL="0">
-              <a:buNone/>
-            </a:pPr>
-            <a:r>
-              <a:rPr lang="en-US" sz="2000" b="1" dirty="0">
-                <a:solidFill>
-                  <a:schemeClr val="bg1"/>
-                </a:solidFill>
-              </a:rPr>
-              <a:t>4</a:t>
-            </a:r>
-            <a:endParaRPr lang="en-US" sz="2000" dirty="0"/>
+            <a:off x="8823960" y="4389120"/>
+            <a:ext cx="2743200" cy="1280160"/>
+          </a:xfrm>
+          <a:prstGeom prst="rect">
+            <a:avLst/>
+          </a:prstGeom>
+          <a:noFill/>
+          <a:ln/>
+        </p:spPr>
+        <p:txBody>
+          <a:bodyPr wrap="square" lIns="0" tIns="0" rIns="0" bIns="0" rtlCol="0" anchor="t"/>
+          <a:lstStyle/>
+          <a:p>
+            <a:pPr indent="0" marL="0">
+              <a:buNone/>
+            </a:pPr>
+            <a:r>
+              <a:rPr lang="en-US" sz="1600" b="1" dirty="0">
+                <a:solidFill>
+                  <a:schemeClr val="tx2"/>
+                </a:solidFill>
+              </a:rPr>
+              <a:t>Retention at product transfer</a:t>
+            </a:r>
+            <a:endParaRPr lang="en-US" sz="1600" dirty="0"/>
+          </a:p>
+          <a:p>
+            <a:pPr indent="0" marL="0">
+              <a:buNone/>
+            </a:pPr>
+            <a:r>
+              <a:rPr lang="en-US" sz="1400" dirty="0">
+                <a:solidFill>
+                  <a:schemeClr val="tx1"/>
+                </a:solidFill>
+              </a:rPr>
+              <a:t>long-term relationship value</a:t>
+            </a:r>
+            <a:endParaRPr lang="en-US" sz="1600" dirty="0"/>
           </a:p>
         </p:txBody>
       </p:sp>
@@ -7221,8 +8414,8 @@
         </p:nvSpPr>
         <p:spPr>
           <a:xfrm>
-            <a:off x="7269480" y="2880360"/>
-            <a:ext cx="2057400" cy="457200"/>
+            <a:off x="5120640" y="5897880"/>
+            <a:ext cx="6492240" cy="365760"/>
           </a:xfrm>
           <a:prstGeom prst="rect">
             <a:avLst/>
@@ -7238,214 +8431,14 @@
               <a:buNone/>
             </a:pPr>
             <a:r>
-              <a:rPr lang="en-US" sz="1900" b="1" dirty="0">
-                <a:solidFill>
-                  <a:schemeClr val="tx2"/>
-                </a:solidFill>
-              </a:rPr>
-              <a:t>gov.uk links</a:t>
-            </a:r>
-            <a:endParaRPr lang="en-US" sz="1900" dirty="0"/>
-          </a:p>
-        </p:txBody>
-      </p:sp>
-      <p:sp>
-        <p:nvSpPr>
-          <p:cNvPr id="19" name="Text 17"/>
-          <p:cNvSpPr txBox="1"/>
-          <p:nvPr/>
-        </p:nvSpPr>
-        <p:spPr>
-          <a:xfrm>
-            <a:off x="7269480" y="3383280"/>
-            <a:ext cx="2057400" cy="1737360"/>
-          </a:xfrm>
-          <a:prstGeom prst="rect">
-            <a:avLst/>
-          </a:prstGeom>
-          <a:noFill/>
-          <a:ln/>
-        </p:spPr>
-        <p:txBody>
-          <a:bodyPr wrap="square" lIns="0" tIns="0" rIns="0" bIns="0" rtlCol="0" anchor="t"/>
-          <a:lstStyle/>
-          <a:p>
-            <a:pPr indent="0" marL="0">
-              <a:buNone/>
-            </a:pPr>
-            <a:r>
-              <a:rPr lang="en-US" sz="1500" dirty="0">
-                <a:solidFill>
-                  <a:schemeClr val="tx1"/>
-                </a:solidFill>
-              </a:rPr>
-              <a:t>Official change-of-address services as they open up</a:t>
-            </a:r>
-            <a:endParaRPr lang="en-US" sz="1500" dirty="0"/>
-          </a:p>
-        </p:txBody>
-      </p:sp>
-      <p:sp>
-        <p:nvSpPr>
-          <p:cNvPr id="20" name="step 5"/>
-          <p:cNvSpPr/>
-          <p:nvPr/>
-        </p:nvSpPr>
-        <p:spPr>
-          <a:xfrm>
-            <a:off x="10012680" y="2011680"/>
-            <a:ext cx="640080" cy="640080"/>
-          </a:xfrm>
-          <a:prstGeom prst="ellipse">
-            <a:avLst/>
-          </a:prstGeom>
-          <a:solidFill>
-            <a:schemeClr val="accent2"/>
-          </a:solidFill>
-          <a:ln/>
-        </p:spPr>
-      </p:sp>
-      <p:sp>
-        <p:nvSpPr>
-          <p:cNvPr id="21" name="Text 19"/>
-          <p:cNvSpPr txBox="1"/>
-          <p:nvPr/>
-        </p:nvSpPr>
-        <p:spPr>
-          <a:xfrm>
-            <a:off x="10012680" y="2011680"/>
-            <a:ext cx="640080" cy="640080"/>
-          </a:xfrm>
-          <a:prstGeom prst="rect">
-            <a:avLst/>
-          </a:prstGeom>
-          <a:noFill/>
-          <a:ln/>
-        </p:spPr>
-        <p:txBody>
-          <a:bodyPr wrap="square" lIns="0" tIns="0" rIns="0" bIns="0" rtlCol="0" anchor="ctr"/>
-          <a:lstStyle/>
-          <a:p>
-            <a:pPr algn="ctr" indent="0" marL="0">
-              <a:buNone/>
-            </a:pPr>
-            <a:r>
-              <a:rPr lang="en-US" sz="2000" b="1" dirty="0">
-                <a:solidFill>
-                  <a:schemeClr val="bg1"/>
-                </a:solidFill>
-              </a:rPr>
-              <a:t>5</a:t>
-            </a:r>
-            <a:endParaRPr lang="en-US" sz="2000" dirty="0"/>
-          </a:p>
-        </p:txBody>
-      </p:sp>
-      <p:sp>
-        <p:nvSpPr>
-          <p:cNvPr id="22" name="Text 20"/>
-          <p:cNvSpPr txBox="1"/>
-          <p:nvPr/>
-        </p:nvSpPr>
-        <p:spPr>
-          <a:xfrm>
-            <a:off x="9509760" y="2880360"/>
-            <a:ext cx="2057400" cy="457200"/>
-          </a:xfrm>
-          <a:prstGeom prst="rect">
-            <a:avLst/>
-          </a:prstGeom>
-          <a:noFill/>
-          <a:ln/>
-        </p:spPr>
-        <p:txBody>
-          <a:bodyPr wrap="square" lIns="0" tIns="0" rIns="0" bIns="0" rtlCol="0" anchor="ctr"/>
-          <a:lstStyle/>
-          <a:p>
-            <a:pPr indent="0" marL="0">
-              <a:buNone/>
-            </a:pPr>
-            <a:r>
-              <a:rPr lang="en-US" sz="1900" b="1" dirty="0">
-                <a:solidFill>
-                  <a:schemeClr val="tx2"/>
-                </a:solidFill>
-              </a:rPr>
-              <a:t>New journeys</a:t>
-            </a:r>
-            <a:endParaRPr lang="en-US" sz="1900" dirty="0"/>
-          </a:p>
-        </p:txBody>
-      </p:sp>
-      <p:sp>
-        <p:nvSpPr>
-          <p:cNvPr id="23" name="Text 21"/>
-          <p:cNvSpPr txBox="1"/>
-          <p:nvPr/>
-        </p:nvSpPr>
-        <p:spPr>
-          <a:xfrm>
-            <a:off x="9509760" y="3383280"/>
-            <a:ext cx="2057400" cy="1737360"/>
-          </a:xfrm>
-          <a:prstGeom prst="rect">
-            <a:avLst/>
-          </a:prstGeom>
-          <a:noFill/>
-          <a:ln/>
-        </p:spPr>
-        <p:txBody>
-          <a:bodyPr wrap="square" lIns="0" tIns="0" rIns="0" bIns="0" rtlCol="0" anchor="t"/>
-          <a:lstStyle/>
-          <a:p>
-            <a:pPr indent="0" marL="0">
-              <a:buNone/>
-            </a:pPr>
-            <a:r>
-              <a:rPr lang="en-US" sz="1500" dirty="0">
-                <a:solidFill>
-                  <a:schemeClr val="tx1"/>
-                </a:solidFill>
-              </a:rPr>
-              <a:t>Business premises moves, bereavement, marriage, a new baby</a:t>
-            </a:r>
-            <a:endParaRPr lang="en-US" sz="1500" dirty="0"/>
-          </a:p>
-        </p:txBody>
-      </p:sp>
-      <p:sp>
-        <p:nvSpPr>
-          <p:cNvPr id="24" name="Text 22"/>
-          <p:cNvSpPr txBox="1"/>
-          <p:nvPr/>
-        </p:nvSpPr>
-        <p:spPr>
-          <a:xfrm>
-            <a:off x="548640" y="5349240"/>
-            <a:ext cx="11064240" cy="731520"/>
-          </a:xfrm>
-          <a:prstGeom prst="rect">
-            <a:avLst/>
-          </a:prstGeom>
-          <a:noFill/>
-          <a:ln/>
-        </p:spPr>
-        <p:txBody>
-          <a:bodyPr wrap="square" lIns="0" tIns="0" rIns="0" bIns="0" rtlCol="0" anchor="ctr"/>
-          <a:lstStyle/>
-          <a:p>
-            <a:pPr indent="0" marL="0">
-              <a:buNone/>
-            </a:pPr>
-            <a:r>
-              <a:rPr lang="en-US" sz="1500" dirty="0">
+              <a:rPr lang="en-US" sz="1200" i="1" dirty="0">
                 <a:solidFill>
                   <a:schemeClr val="accent6"/>
                 </a:solidFill>
               </a:rPr>
-              <a:t>Production work: Consumer Duty review, authority to act for the customer, data-sharing agreements, managed encryption keys and model risk governance.</a:t>
-            </a:r>
-            <a:endParaRPr lang="en-US" sz="1500" dirty="0"/>
+              <a:t>Targets to measure in a pilot, not claimed results.</a:t>
+            </a:r>
+            <a:endParaRPr lang="en-US" sz="1200" dirty="0"/>
           </a:p>
         </p:txBody>
       </p:sp>
@@ -7529,6 +8522,813 @@
         </p:nvSpPr>
         <p:spPr>
           <a:xfrm>
+            <a:off x="548640" y="320040"/>
+            <a:ext cx="11064240" cy="868680"/>
+          </a:xfrm>
+          <a:prstGeom prst="rect">
+            <a:avLst/>
+          </a:prstGeom>
+          <a:noFill/>
+          <a:ln/>
+        </p:spPr>
+        <p:txBody>
+          <a:bodyPr wrap="square" lIns="0" tIns="0" rIns="0" bIns="0" rtlCol="0" anchor="ctr"/>
+          <a:lstStyle/>
+          <a:p>
+            <a:pPr indent="0" marL="0">
+              <a:buNone/>
+            </a:pPr>
+            <a:r>
+              <a:rPr lang="en-US" sz="3400" b="1" dirty="0">
+                <a:solidFill>
+                  <a:schemeClr val="tx2"/>
+                </a:solidFill>
+              </a:rPr>
+              <a:t>Roadmap</a:t>
+            </a:r>
+            <a:endParaRPr lang="en-US" sz="3400" dirty="0"/>
+          </a:p>
+        </p:txBody>
+      </p:sp>
+      <p:sp>
+        <p:nvSpPr>
+          <p:cNvPr id="3" name="timeline"/>
+          <p:cNvSpPr/>
+          <p:nvPr/>
+        </p:nvSpPr>
+        <p:spPr>
+          <a:xfrm>
+            <a:off x="1097280" y="2331720"/>
+            <a:ext cx="9966960" cy="0"/>
+          </a:xfrm>
+          <a:prstGeom prst="line">
+            <a:avLst/>
+          </a:prstGeom>
+          <a:noFill/>
+          <a:ln w="38100">
+            <a:solidFill>
+              <a:schemeClr val="accent3"/>
+            </a:solidFill>
+            <a:prstDash val="solid"/>
+          </a:ln>
+        </p:spPr>
+      </p:sp>
+      <p:sp>
+        <p:nvSpPr>
+          <p:cNvPr id="4" name="step 1"/>
+          <p:cNvSpPr/>
+          <p:nvPr/>
+        </p:nvSpPr>
+        <p:spPr>
+          <a:xfrm>
+            <a:off x="1051560" y="2011680"/>
+            <a:ext cx="640080" cy="640080"/>
+          </a:xfrm>
+          <a:prstGeom prst="ellipse">
+            <a:avLst/>
+          </a:prstGeom>
+          <a:solidFill>
+            <a:schemeClr val="accent1"/>
+          </a:solidFill>
+          <a:ln/>
+        </p:spPr>
+      </p:sp>
+      <p:sp>
+        <p:nvSpPr>
+          <p:cNvPr id="5" name="Text 3"/>
+          <p:cNvSpPr txBox="1"/>
+          <p:nvPr/>
+        </p:nvSpPr>
+        <p:spPr>
+          <a:xfrm>
+            <a:off x="1051560" y="2011680"/>
+            <a:ext cx="640080" cy="640080"/>
+          </a:xfrm>
+          <a:prstGeom prst="rect">
+            <a:avLst/>
+          </a:prstGeom>
+          <a:noFill/>
+          <a:ln/>
+        </p:spPr>
+        <p:txBody>
+          <a:bodyPr wrap="square" lIns="0" tIns="0" rIns="0" bIns="0" rtlCol="0" anchor="ctr"/>
+          <a:lstStyle/>
+          <a:p>
+            <a:pPr algn="ctr" indent="0" marL="0">
+              <a:buNone/>
+            </a:pPr>
+            <a:r>
+              <a:rPr lang="en-US" sz="2000" b="1" dirty="0">
+                <a:solidFill>
+                  <a:schemeClr val="bg1"/>
+                </a:solidFill>
+              </a:rPr>
+              <a:t>1</a:t>
+            </a:r>
+            <a:endParaRPr lang="en-US" sz="2000" dirty="0"/>
+          </a:p>
+        </p:txBody>
+      </p:sp>
+      <p:sp>
+        <p:nvSpPr>
+          <p:cNvPr id="6" name="Text 4"/>
+          <p:cNvSpPr txBox="1"/>
+          <p:nvPr/>
+        </p:nvSpPr>
+        <p:spPr>
+          <a:xfrm>
+            <a:off x="548640" y="2880360"/>
+            <a:ext cx="2057400" cy="457200"/>
+          </a:xfrm>
+          <a:prstGeom prst="rect">
+            <a:avLst/>
+          </a:prstGeom>
+          <a:noFill/>
+          <a:ln/>
+        </p:spPr>
+        <p:txBody>
+          <a:bodyPr wrap="square" lIns="0" tIns="0" rIns="0" bIns="0" rtlCol="0" anchor="ctr"/>
+          <a:lstStyle/>
+          <a:p>
+            <a:pPr indent="0" marL="0">
+              <a:buNone/>
+            </a:pPr>
+            <a:r>
+              <a:rPr lang="en-US" sz="1900" b="1" dirty="0">
+                <a:solidFill>
+                  <a:schemeClr val="tx2"/>
+                </a:solidFill>
+              </a:rPr>
+              <a:t>Open Banking</a:t>
+            </a:r>
+            <a:endParaRPr lang="en-US" sz="1900" dirty="0"/>
+          </a:p>
+        </p:txBody>
+      </p:sp>
+      <p:sp>
+        <p:nvSpPr>
+          <p:cNvPr id="7" name="Text 5"/>
+          <p:cNvSpPr txBox="1"/>
+          <p:nvPr/>
+        </p:nvSpPr>
+        <p:spPr>
+          <a:xfrm>
+            <a:off x="548640" y="3383280"/>
+            <a:ext cx="2057400" cy="1737360"/>
+          </a:xfrm>
+          <a:prstGeom prst="rect">
+            <a:avLst/>
+          </a:prstGeom>
+          <a:noFill/>
+          <a:ln/>
+        </p:spPr>
+        <p:txBody>
+          <a:bodyPr wrap="square" lIns="0" tIns="0" rIns="0" bIns="0" rtlCol="0" anchor="t"/>
+          <a:lstStyle/>
+          <a:p>
+            <a:pPr indent="0" marL="0">
+              <a:buNone/>
+            </a:pPr>
+            <a:r>
+              <a:rPr lang="en-US" sz="1500" dirty="0">
+                <a:solidFill>
+                  <a:schemeClr val="tx1"/>
+                </a:solidFill>
+              </a:rPr>
+              <a:t>Transactions and Direct Debits from any UK bank, with consent</a:t>
+            </a:r>
+            <a:endParaRPr lang="en-US" sz="1500" dirty="0"/>
+          </a:p>
+        </p:txBody>
+      </p:sp>
+      <p:sp>
+        <p:nvSpPr>
+          <p:cNvPr id="8" name="step 2"/>
+          <p:cNvSpPr/>
+          <p:nvPr/>
+        </p:nvSpPr>
+        <p:spPr>
+          <a:xfrm>
+            <a:off x="3291840" y="2011680"/>
+            <a:ext cx="640080" cy="640080"/>
+          </a:xfrm>
+          <a:prstGeom prst="ellipse">
+            <a:avLst/>
+          </a:prstGeom>
+          <a:solidFill>
+            <a:schemeClr val="accent2"/>
+          </a:solidFill>
+          <a:ln/>
+        </p:spPr>
+      </p:sp>
+      <p:sp>
+        <p:nvSpPr>
+          <p:cNvPr id="9" name="Text 7"/>
+          <p:cNvSpPr txBox="1"/>
+          <p:nvPr/>
+        </p:nvSpPr>
+        <p:spPr>
+          <a:xfrm>
+            <a:off x="3291840" y="2011680"/>
+            <a:ext cx="640080" cy="640080"/>
+          </a:xfrm>
+          <a:prstGeom prst="rect">
+            <a:avLst/>
+          </a:prstGeom>
+          <a:noFill/>
+          <a:ln/>
+        </p:spPr>
+        <p:txBody>
+          <a:bodyPr wrap="square" lIns="0" tIns="0" rIns="0" bIns="0" rtlCol="0" anchor="ctr"/>
+          <a:lstStyle/>
+          <a:p>
+            <a:pPr algn="ctr" indent="0" marL="0">
+              <a:buNone/>
+            </a:pPr>
+            <a:r>
+              <a:rPr lang="en-US" sz="2000" b="1" dirty="0">
+                <a:solidFill>
+                  <a:schemeClr val="bg1"/>
+                </a:solidFill>
+              </a:rPr>
+              <a:t>2</a:t>
+            </a:r>
+            <a:endParaRPr lang="en-US" sz="2000" dirty="0"/>
+          </a:p>
+        </p:txBody>
+      </p:sp>
+      <p:sp>
+        <p:nvSpPr>
+          <p:cNvPr id="10" name="Text 8"/>
+          <p:cNvSpPr txBox="1"/>
+          <p:nvPr/>
+        </p:nvSpPr>
+        <p:spPr>
+          <a:xfrm>
+            <a:off x="2788920" y="2880360"/>
+            <a:ext cx="2057400" cy="457200"/>
+          </a:xfrm>
+          <a:prstGeom prst="rect">
+            <a:avLst/>
+          </a:prstGeom>
+          <a:noFill/>
+          <a:ln/>
+        </p:spPr>
+        <p:txBody>
+          <a:bodyPr wrap="square" lIns="0" tIns="0" rIns="0" bIns="0" rtlCol="0" anchor="ctr"/>
+          <a:lstStyle/>
+          <a:p>
+            <a:pPr indent="0" marL="0">
+              <a:buNone/>
+            </a:pPr>
+            <a:r>
+              <a:rPr lang="en-US" sz="1900" b="1" dirty="0">
+                <a:solidFill>
+                  <a:schemeClr val="tx2"/>
+                </a:solidFill>
+              </a:rPr>
+              <a:t>Pilot</a:t>
+            </a:r>
+            <a:endParaRPr lang="en-US" sz="1900" dirty="0"/>
+          </a:p>
+        </p:txBody>
+      </p:sp>
+      <p:sp>
+        <p:nvSpPr>
+          <p:cNvPr id="11" name="Text 9"/>
+          <p:cNvSpPr txBox="1"/>
+          <p:nvPr/>
+        </p:nvSpPr>
+        <p:spPr>
+          <a:xfrm>
+            <a:off x="2788920" y="3383280"/>
+            <a:ext cx="2057400" cy="1737360"/>
+          </a:xfrm>
+          <a:prstGeom prst="rect">
+            <a:avLst/>
+          </a:prstGeom>
+          <a:noFill/>
+          <a:ln/>
+        </p:spPr>
+        <p:txBody>
+          <a:bodyPr wrap="square" lIns="0" tIns="0" rIns="0" bIns="0" rtlCol="0" anchor="t"/>
+          <a:lstStyle/>
+          <a:p>
+            <a:pPr indent="0" marL="0">
+              <a:buNone/>
+            </a:pPr>
+            <a:r>
+              <a:rPr lang="en-US" sz="1500" dirty="0">
+                <a:solidFill>
+                  <a:schemeClr val="tx1"/>
+                </a:solidFill>
+              </a:rPr>
+              <a:t>Consenting mortgage customers; address update and home insurance live</a:t>
+            </a:r>
+            <a:endParaRPr lang="en-US" sz="1500" dirty="0"/>
+          </a:p>
+        </p:txBody>
+      </p:sp>
+      <p:sp>
+        <p:nvSpPr>
+          <p:cNvPr id="12" name="step 3"/>
+          <p:cNvSpPr/>
+          <p:nvPr/>
+        </p:nvSpPr>
+        <p:spPr>
+          <a:xfrm>
+            <a:off x="5532120" y="2011680"/>
+            <a:ext cx="640080" cy="640080"/>
+          </a:xfrm>
+          <a:prstGeom prst="ellipse">
+            <a:avLst/>
+          </a:prstGeom>
+          <a:solidFill>
+            <a:schemeClr val="accent2"/>
+          </a:solidFill>
+          <a:ln/>
+        </p:spPr>
+      </p:sp>
+      <p:sp>
+        <p:nvSpPr>
+          <p:cNvPr id="13" name="Text 11"/>
+          <p:cNvSpPr txBox="1"/>
+          <p:nvPr/>
+        </p:nvSpPr>
+        <p:spPr>
+          <a:xfrm>
+            <a:off x="5532120" y="2011680"/>
+            <a:ext cx="640080" cy="640080"/>
+          </a:xfrm>
+          <a:prstGeom prst="rect">
+            <a:avLst/>
+          </a:prstGeom>
+          <a:noFill/>
+          <a:ln/>
+        </p:spPr>
+        <p:txBody>
+          <a:bodyPr wrap="square" lIns="0" tIns="0" rIns="0" bIns="0" rtlCol="0" anchor="ctr"/>
+          <a:lstStyle/>
+          <a:p>
+            <a:pPr algn="ctr" indent="0" marL="0">
+              <a:buNone/>
+            </a:pPr>
+            <a:r>
+              <a:rPr lang="en-US" sz="2000" b="1" dirty="0">
+                <a:solidFill>
+                  <a:schemeClr val="bg1"/>
+                </a:solidFill>
+              </a:rPr>
+              <a:t>3</a:t>
+            </a:r>
+            <a:endParaRPr lang="en-US" sz="2000" dirty="0"/>
+          </a:p>
+        </p:txBody>
+      </p:sp>
+      <p:sp>
+        <p:nvSpPr>
+          <p:cNvPr id="14" name="Text 12"/>
+          <p:cNvSpPr txBox="1"/>
+          <p:nvPr/>
+        </p:nvSpPr>
+        <p:spPr>
+          <a:xfrm>
+            <a:off x="5029200" y="2880360"/>
+            <a:ext cx="2057400" cy="457200"/>
+          </a:xfrm>
+          <a:prstGeom prst="rect">
+            <a:avLst/>
+          </a:prstGeom>
+          <a:noFill/>
+          <a:ln/>
+        </p:spPr>
+        <p:txBody>
+          <a:bodyPr wrap="square" lIns="0" tIns="0" rIns="0" bIns="0" rtlCol="0" anchor="ctr"/>
+          <a:lstStyle/>
+          <a:p>
+            <a:pPr indent="0" marL="0">
+              <a:buNone/>
+            </a:pPr>
+            <a:r>
+              <a:rPr lang="en-US" sz="1900" b="1" dirty="0">
+                <a:solidFill>
+                  <a:schemeClr val="tx2"/>
+                </a:solidFill>
+              </a:rPr>
+              <a:t>Partner APIs</a:t>
+            </a:r>
+            <a:endParaRPr lang="en-US" sz="1900" dirty="0"/>
+          </a:p>
+        </p:txBody>
+      </p:sp>
+      <p:sp>
+        <p:nvSpPr>
+          <p:cNvPr id="15" name="Text 13"/>
+          <p:cNvSpPr txBox="1"/>
+          <p:nvPr/>
+        </p:nvSpPr>
+        <p:spPr>
+          <a:xfrm>
+            <a:off x="5029200" y="3383280"/>
+            <a:ext cx="2057400" cy="1737360"/>
+          </a:xfrm>
+          <a:prstGeom prst="rect">
+            <a:avLst/>
+          </a:prstGeom>
+          <a:noFill/>
+          <a:ln/>
+        </p:spPr>
+        <p:txBody>
+          <a:bodyPr wrap="square" lIns="0" tIns="0" rIns="0" bIns="0" rtlCol="0" anchor="t"/>
+          <a:lstStyle/>
+          <a:p>
+            <a:pPr indent="0" marL="0">
+              <a:buNone/>
+            </a:pPr>
+            <a:r>
+              <a:rPr lang="en-US" sz="1500" dirty="0">
+                <a:solidFill>
+                  <a:schemeClr val="tx1"/>
+                </a:solidFill>
+              </a:rPr>
+              <a:t>Energy, water and broadband providers</a:t>
+            </a:r>
+            <a:endParaRPr lang="en-US" sz="1500" dirty="0"/>
+          </a:p>
+        </p:txBody>
+      </p:sp>
+      <p:sp>
+        <p:nvSpPr>
+          <p:cNvPr id="16" name="step 4"/>
+          <p:cNvSpPr/>
+          <p:nvPr/>
+        </p:nvSpPr>
+        <p:spPr>
+          <a:xfrm>
+            <a:off x="7772400" y="2011680"/>
+            <a:ext cx="640080" cy="640080"/>
+          </a:xfrm>
+          <a:prstGeom prst="ellipse">
+            <a:avLst/>
+          </a:prstGeom>
+          <a:solidFill>
+            <a:schemeClr val="accent2"/>
+          </a:solidFill>
+          <a:ln/>
+        </p:spPr>
+      </p:sp>
+      <p:sp>
+        <p:nvSpPr>
+          <p:cNvPr id="17" name="Text 15"/>
+          <p:cNvSpPr txBox="1"/>
+          <p:nvPr/>
+        </p:nvSpPr>
+        <p:spPr>
+          <a:xfrm>
+            <a:off x="7772400" y="2011680"/>
+            <a:ext cx="640080" cy="640080"/>
+          </a:xfrm>
+          <a:prstGeom prst="rect">
+            <a:avLst/>
+          </a:prstGeom>
+          <a:noFill/>
+          <a:ln/>
+        </p:spPr>
+        <p:txBody>
+          <a:bodyPr wrap="square" lIns="0" tIns="0" rIns="0" bIns="0" rtlCol="0" anchor="ctr"/>
+          <a:lstStyle/>
+          <a:p>
+            <a:pPr algn="ctr" indent="0" marL="0">
+              <a:buNone/>
+            </a:pPr>
+            <a:r>
+              <a:rPr lang="en-US" sz="2000" b="1" dirty="0">
+                <a:solidFill>
+                  <a:schemeClr val="bg1"/>
+                </a:solidFill>
+              </a:rPr>
+              <a:t>4</a:t>
+            </a:r>
+            <a:endParaRPr lang="en-US" sz="2000" dirty="0"/>
+          </a:p>
+        </p:txBody>
+      </p:sp>
+      <p:sp>
+        <p:nvSpPr>
+          <p:cNvPr id="18" name="Text 16"/>
+          <p:cNvSpPr txBox="1"/>
+          <p:nvPr/>
+        </p:nvSpPr>
+        <p:spPr>
+          <a:xfrm>
+            <a:off x="7269480" y="2880360"/>
+            <a:ext cx="2057400" cy="457200"/>
+          </a:xfrm>
+          <a:prstGeom prst="rect">
+            <a:avLst/>
+          </a:prstGeom>
+          <a:noFill/>
+          <a:ln/>
+        </p:spPr>
+        <p:txBody>
+          <a:bodyPr wrap="square" lIns="0" tIns="0" rIns="0" bIns="0" rtlCol="0" anchor="ctr"/>
+          <a:lstStyle/>
+          <a:p>
+            <a:pPr indent="0" marL="0">
+              <a:buNone/>
+            </a:pPr>
+            <a:r>
+              <a:rPr lang="en-US" sz="1900" b="1" dirty="0">
+                <a:solidFill>
+                  <a:schemeClr val="tx2"/>
+                </a:solidFill>
+              </a:rPr>
+              <a:t>gov.uk links</a:t>
+            </a:r>
+            <a:endParaRPr lang="en-US" sz="1900" dirty="0"/>
+          </a:p>
+        </p:txBody>
+      </p:sp>
+      <p:sp>
+        <p:nvSpPr>
+          <p:cNvPr id="19" name="Text 17"/>
+          <p:cNvSpPr txBox="1"/>
+          <p:nvPr/>
+        </p:nvSpPr>
+        <p:spPr>
+          <a:xfrm>
+            <a:off x="7269480" y="3383280"/>
+            <a:ext cx="2057400" cy="1737360"/>
+          </a:xfrm>
+          <a:prstGeom prst="rect">
+            <a:avLst/>
+          </a:prstGeom>
+          <a:noFill/>
+          <a:ln/>
+        </p:spPr>
+        <p:txBody>
+          <a:bodyPr wrap="square" lIns="0" tIns="0" rIns="0" bIns="0" rtlCol="0" anchor="t"/>
+          <a:lstStyle/>
+          <a:p>
+            <a:pPr indent="0" marL="0">
+              <a:buNone/>
+            </a:pPr>
+            <a:r>
+              <a:rPr lang="en-US" sz="1500" dirty="0">
+                <a:solidFill>
+                  <a:schemeClr val="tx1"/>
+                </a:solidFill>
+              </a:rPr>
+              <a:t>Official change-of-address services as they open up</a:t>
+            </a:r>
+            <a:endParaRPr lang="en-US" sz="1500" dirty="0"/>
+          </a:p>
+        </p:txBody>
+      </p:sp>
+      <p:sp>
+        <p:nvSpPr>
+          <p:cNvPr id="20" name="step 5"/>
+          <p:cNvSpPr/>
+          <p:nvPr/>
+        </p:nvSpPr>
+        <p:spPr>
+          <a:xfrm>
+            <a:off x="10012680" y="2011680"/>
+            <a:ext cx="640080" cy="640080"/>
+          </a:xfrm>
+          <a:prstGeom prst="ellipse">
+            <a:avLst/>
+          </a:prstGeom>
+          <a:solidFill>
+            <a:schemeClr val="accent2"/>
+          </a:solidFill>
+          <a:ln/>
+        </p:spPr>
+      </p:sp>
+      <p:sp>
+        <p:nvSpPr>
+          <p:cNvPr id="21" name="Text 19"/>
+          <p:cNvSpPr txBox="1"/>
+          <p:nvPr/>
+        </p:nvSpPr>
+        <p:spPr>
+          <a:xfrm>
+            <a:off x="10012680" y="2011680"/>
+            <a:ext cx="640080" cy="640080"/>
+          </a:xfrm>
+          <a:prstGeom prst="rect">
+            <a:avLst/>
+          </a:prstGeom>
+          <a:noFill/>
+          <a:ln/>
+        </p:spPr>
+        <p:txBody>
+          <a:bodyPr wrap="square" lIns="0" tIns="0" rIns="0" bIns="0" rtlCol="0" anchor="ctr"/>
+          <a:lstStyle/>
+          <a:p>
+            <a:pPr algn="ctr" indent="0" marL="0">
+              <a:buNone/>
+            </a:pPr>
+            <a:r>
+              <a:rPr lang="en-US" sz="2000" b="1" dirty="0">
+                <a:solidFill>
+                  <a:schemeClr val="bg1"/>
+                </a:solidFill>
+              </a:rPr>
+              <a:t>5</a:t>
+            </a:r>
+            <a:endParaRPr lang="en-US" sz="2000" dirty="0"/>
+          </a:p>
+        </p:txBody>
+      </p:sp>
+      <p:sp>
+        <p:nvSpPr>
+          <p:cNvPr id="22" name="Text 20"/>
+          <p:cNvSpPr txBox="1"/>
+          <p:nvPr/>
+        </p:nvSpPr>
+        <p:spPr>
+          <a:xfrm>
+            <a:off x="9509760" y="2880360"/>
+            <a:ext cx="2057400" cy="457200"/>
+          </a:xfrm>
+          <a:prstGeom prst="rect">
+            <a:avLst/>
+          </a:prstGeom>
+          <a:noFill/>
+          <a:ln/>
+        </p:spPr>
+        <p:txBody>
+          <a:bodyPr wrap="square" lIns="0" tIns="0" rIns="0" bIns="0" rtlCol="0" anchor="ctr"/>
+          <a:lstStyle/>
+          <a:p>
+            <a:pPr indent="0" marL="0">
+              <a:buNone/>
+            </a:pPr>
+            <a:r>
+              <a:rPr lang="en-US" sz="1900" b="1" dirty="0">
+                <a:solidFill>
+                  <a:schemeClr val="tx2"/>
+                </a:solidFill>
+              </a:rPr>
+              <a:t>New journeys</a:t>
+            </a:r>
+            <a:endParaRPr lang="en-US" sz="1900" dirty="0"/>
+          </a:p>
+        </p:txBody>
+      </p:sp>
+      <p:sp>
+        <p:nvSpPr>
+          <p:cNvPr id="23" name="Text 21"/>
+          <p:cNvSpPr txBox="1"/>
+          <p:nvPr/>
+        </p:nvSpPr>
+        <p:spPr>
+          <a:xfrm>
+            <a:off x="9509760" y="3383280"/>
+            <a:ext cx="2057400" cy="1737360"/>
+          </a:xfrm>
+          <a:prstGeom prst="rect">
+            <a:avLst/>
+          </a:prstGeom>
+          <a:noFill/>
+          <a:ln/>
+        </p:spPr>
+        <p:txBody>
+          <a:bodyPr wrap="square" lIns="0" tIns="0" rIns="0" bIns="0" rtlCol="0" anchor="t"/>
+          <a:lstStyle/>
+          <a:p>
+            <a:pPr indent="0" marL="0">
+              <a:buNone/>
+            </a:pPr>
+            <a:r>
+              <a:rPr lang="en-US" sz="1500" dirty="0">
+                <a:solidFill>
+                  <a:schemeClr val="tx1"/>
+                </a:solidFill>
+              </a:rPr>
+              <a:t>Business premises moves, bereavement, marriage, a new baby</a:t>
+            </a:r>
+            <a:endParaRPr lang="en-US" sz="1500" dirty="0"/>
+          </a:p>
+        </p:txBody>
+      </p:sp>
+      <p:sp>
+        <p:nvSpPr>
+          <p:cNvPr id="24" name="Text 22"/>
+          <p:cNvSpPr txBox="1"/>
+          <p:nvPr/>
+        </p:nvSpPr>
+        <p:spPr>
+          <a:xfrm>
+            <a:off x="548640" y="5349240"/>
+            <a:ext cx="11064240" cy="731520"/>
+          </a:xfrm>
+          <a:prstGeom prst="rect">
+            <a:avLst/>
+          </a:prstGeom>
+          <a:noFill/>
+          <a:ln/>
+        </p:spPr>
+        <p:txBody>
+          <a:bodyPr wrap="square" lIns="0" tIns="0" rIns="0" bIns="0" rtlCol="0" anchor="ctr"/>
+          <a:lstStyle/>
+          <a:p>
+            <a:pPr indent="0" marL="0">
+              <a:buNone/>
+            </a:pPr>
+            <a:r>
+              <a:rPr lang="en-US" sz="1500" dirty="0">
+                <a:solidFill>
+                  <a:schemeClr val="accent6"/>
+                </a:solidFill>
+              </a:rPr>
+              <a:t>Production work: Consumer Duty review, authority to act for the customer, data-sharing agreements, managed encryption keys and model risk governance.</a:t>
+            </a:r>
+            <a:endParaRPr lang="en-US" sz="1500" dirty="0"/>
+          </a:p>
+        </p:txBody>
+      </p:sp>
+      <p:sp>
+        <p:nvSpPr>
+          <p:cNvPr id="25" name="Slide Number Placeholder 0"/>
+          <p:cNvSpPr>
+            <a:spLocks noGrp="1"/>
+          </p:cNvSpPr>
+          <p:nvPr>
+            <p:ph type="sldNum" sz="quarter" idx="4294967295"/>
+          </p:nvPr>
+        </p:nvSpPr>
+        <p:spPr>
+          <a:xfrm>
+            <a:off x="11247120" y="6400800"/>
+            <a:ext cx="457200" cy="274320"/>
+          </a:xfrm>
+          <a:prstGeom prst="rect">
+            <a:avLst/>
+          </a:prstGeom>
+          <a:extLst>
+            <a:ext uri="{C572A759-6A51-4108-AA02-DFA0A04FC94B}">
+              <ma14:wrappingTextBoxFlag xmlns:ma14="http://schemas.microsoft.com/office/mac/drawingml/2011/main" val="0"/>
+            </a:ext>
+          </a:extLst>
+        </p:spPr>
+        <p:txBody>
+          <a:bodyPr/>
+          <a:lstStyle>
+            <a:lvl1pPr>
+              <a:defRPr sz="1000">
+                <a:solidFill>
+                  <a:schemeClr val="accent6"/>
+                </a:solidFill>
+              </a:defRPr>
+            </a:lvl1pPr>
+          </a:lstStyle>
+          <a:p>
+            <a:pPr algn="r"/>
+            <a:fld id="{F7021451-1387-4CA6-816F-3879F97B5CBC}" type="slidenum">
+              <a:rPr b="0" lang="en-US"/>
+              <a:t>16</a:t>
+            </a:fld>
+            <a:endParaRPr lang="en-US"/>
+          </a:p>
+        </p:txBody>
+      </p:sp>
+    </p:spTree>
+  </p:cSld>
+  <p:clrMapOvr>
+    <a:masterClrMapping/>
+  </p:clrMapOvr>
+</p:sld>
+</file>
+
+<file path=ppt/slides/slide17.xml><?xml version="1.0" encoding="utf-8"?>
+<p:sld xmlns:a="http://schemas.openxmlformats.org/drawingml/2006/main" xmlns:r="http://schemas.openxmlformats.org/officeDocument/2006/relationships" xmlns:p="http://schemas.openxmlformats.org/presentationml/2006/main">
+  <p:cSld name="Slide 17">
+    <p:spTree>
+      <p:nvGrpSpPr>
+        <p:cNvPr id="1" name=""/>
+        <p:cNvGrpSpPr/>
+        <p:nvPr/>
+      </p:nvGrpSpPr>
+      <p:grpSpPr>
+        <a:xfrm>
+          <a:off x="0" y="0"/>
+          <a:ext cx="0" cy="0"/>
+          <a:chOff x="0" y="0"/>
+          <a:chExt cx="0" cy="0"/>
+        </a:xfrm>
+      </p:grpSpPr>
+      <p:sp>
+        <p:nvSpPr>
+          <p:cNvPr id="2" name="Text 0"/>
+          <p:cNvSpPr/>
+          <p:nvPr>
+            <p:ph idx="100" type="title" hasCustomPrompt="1"/>
+          </p:nvPr>
+        </p:nvSpPr>
+        <p:spPr>
+          <a:xfrm>
             <a:off x="731520" y="1828800"/>
             <a:ext cx="6949440" cy="1463040"/>
           </a:xfrm>
@@ -7611,7 +9411,43 @@
       </p:sp>
       <p:sp>
         <p:nvSpPr>
-          <p:cNvPr id="4" name="closing circle"/>
+          <p:cNvPr id="4" name="entry"/>
+          <p:cNvSpPr txBox="1"/>
+          <p:nvPr/>
+        </p:nvSpPr>
+        <p:spPr>
+          <a:xfrm>
+            <a:off x="731520" y="5897880"/>
+            <a:ext cx="10698480" cy="365760"/>
+          </a:xfrm>
+          <a:prstGeom prst="rect">
+            <a:avLst/>
+          </a:prstGeom>
+          <a:noFill/>
+          <a:ln/>
+        </p:spPr>
+        <p:txBody>
+          <a:bodyPr wrap="square" lIns="0" tIns="0" rIns="0" bIns="0" rtlCol="0" anchor="ctr"/>
+          <a:lstStyle/>
+          <a:p>
+            <a:pPr indent="0" marL="0">
+              <a:buNone/>
+            </a:pPr>
+            <a:r>
+              <a:rPr lang="en-US" sz="1300" dirty="0">
+                <a:solidFill>
+                  <a:schemeClr val="bg2"/>
+                </a:solidFill>
+              </a:rPr>
+              <a:t>EMEA Hackathon 2026  ·  Entry by associate 110737  ·  Varadaraj.pandurangan@cognizant.com  ·  BFS UK</a:t>
+            </a:r>
+            <a:endParaRPr lang="en-US" sz="1300" dirty="0"/>
+          </a:p>
+        </p:txBody>
+      </p:sp>
+      <p:sp>
+        <p:nvSpPr>
+          <p:cNvPr id="5" name="closing circle"/>
           <p:cNvSpPr/>
           <p:nvPr/>
         </p:nvSpPr>
@@ -7631,7 +9467,7 @@
       </p:sp>
       <p:pic>
         <p:nvPicPr>
-          <p:cNvPr id="5" name="closing icon" descr="preencoded.png">    </p:cNvPr>
+          <p:cNvPr id="6" name="closing icon" descr="preencoded.png">    </p:cNvPr>
           <p:cNvPicPr>
             <a:picLocks noChangeAspect="1"/>
           </p:cNvPicPr>
@@ -8645,7 +10481,7 @@
                   <a:schemeClr val="tx1"/>
                 </a:solidFill>
               </a:rPr>
-              <a:t>You confirm with a one-time code you type yourself</a:t>
+              <a:t>Read and approve each draft in your portal, or with a code in the chat</a:t>
             </a:r>
             <a:endParaRPr lang="en-US" sz="1400" dirty="0"/>
           </a:p>

--- a/House_Move_Agent.pptx
+++ b/House_Move_Agent.pptx
@@ -123,25 +123,25 @@
   <p:extLst>
     <p:ext uri="{521415D9-36F7-43E2-AB2F-B90AF26B5E84}">
       <p14:sectionLst xmlns:p14="http://schemas.microsoft.com/office/powerpoint/2010/main">
-        <p14:section name="Opening" id="{c9f73559-486e-cb1d-5eb8-e72a273e22c9}">
+        <p14:section name="Opening" id="{8db38e7f-526c-96f4-7757-19f0f49f99a2}">
           <p14:sldIdLst>
             <p14:sldId id="256"/>
           </p14:sldIdLst>
         </p14:section>
-        <p14:section name="Problem and solution" id="{06f2789e-1c5f-001a-3509-e3f351f4bd9c}">
+        <p14:section name="Problem and solution" id="{0046e609-b4aa-da1f-3932-a7057d752608}">
           <p14:sldIdLst>
             <p14:sldId id="257"/>
             <p14:sldId id="258"/>
             <p14:sldId id="259"/>
           </p14:sldIdLst>
         </p14:section>
-        <p14:section name="The two AI moments" id="{59aa4c55-cd12-2416-f8ed-a3cdd3423c95}">
+        <p14:section name="The two AI moments" id="{f2b1bec3-601a-6c21-c00a-5804ad3d240e}">
           <p14:sldIdLst>
             <p14:sldId id="260"/>
             <p14:sldId id="261"/>
           </p14:sldIdLst>
         </p14:section>
-        <p14:section name="How it works" id="{60ea59f4-40d7-b79c-bcf4-22b0a42a604d}">
+        <p14:section name="How it works" id="{443fa03d-4f26-31b7-fc44-0a91d62ff491}">
           <p14:sldIdLst>
             <p14:sldId id="262"/>
             <p14:sldId id="263"/>
@@ -152,7 +152,7 @@
             <p14:sldId id="268"/>
           </p14:sldIdLst>
         </p14:section>
-        <p14:section name="Results and next steps" id="{83a8bb52-d35b-1eec-4a11-c82ae9ea0263}">
+        <p14:section name="Results and next steps" id="{f894f490-7d69-0820-6a49-8452639c8a40}">
           <p14:sldIdLst>
             <p14:sldId id="269"/>
             <p14:sldId id="270"/>
@@ -7411,7 +7411,7 @@
                 <a:ea typeface="Cambria" pitchFamily="34" charset="-122"/>
                 <a:cs typeface="Cambria" pitchFamily="34" charset="-120"/>
               </a:rPr>
-              <a:t>23</a:t>
+              <a:t>24</a:t>
             </a:r>
             <a:endParaRPr lang="en-US" sz="5400" dirty="0"/>
           </a:p>
@@ -7447,7 +7447,7 @@
                   <a:schemeClr val="tx1"/>
                 </a:solidFill>
               </a:rPr>
-              <a:t>rules, 20 verified</a:t>
+              <a:t>rules, 21 verified</a:t>
             </a:r>
             <a:endParaRPr lang="en-US" sz="1700" dirty="0"/>
           </a:p>
@@ -7508,7 +7508,7 @@
                 <a:ea typeface="Cambria" pitchFamily="34" charset="-122"/>
                 <a:cs typeface="Cambria" pitchFamily="34" charset="-120"/>
               </a:rPr>
-              <a:t>95</a:t>
+              <a:t>103</a:t>
             </a:r>
             <a:endParaRPr lang="en-US" sz="5400" dirty="0"/>
           </a:p>
@@ -12786,7 +12786,7 @@
                   <a:schemeClr val="tx1"/>
                 </a:solidFill>
               </a:rPr>
-              <a:t>Which obligations apply (23 rules, each with a source)</a:t>
+              <a:t>Which obligations apply (24 rules, each with a source)</a:t>
             </a:r>
             <a:endParaRPr lang="en-US" sz="1600" dirty="0"/>
           </a:p>

--- a/House_Move_Agent.pptx
+++ b/House_Move_Agent.pptx
@@ -123,25 +123,25 @@
   <p:extLst>
     <p:ext uri="{521415D9-36F7-43E2-AB2F-B90AF26B5E84}">
       <p14:sectionLst xmlns:p14="http://schemas.microsoft.com/office/powerpoint/2010/main">
-        <p14:section name="Opening" id="{8db38e7f-526c-96f4-7757-19f0f49f99a2}">
+        <p14:section name="Opening" id="{32af6478-886a-f9b4-2793-5194e9a143c8}">
           <p14:sldIdLst>
             <p14:sldId id="256"/>
           </p14:sldIdLst>
         </p14:section>
-        <p14:section name="Problem and solution" id="{0046e609-b4aa-da1f-3932-a7057d752608}">
+        <p14:section name="Problem and solution" id="{eb6c9fe1-3a8f-71fe-4187-5caa8428923b}">
           <p14:sldIdLst>
             <p14:sldId id="257"/>
             <p14:sldId id="258"/>
             <p14:sldId id="259"/>
           </p14:sldIdLst>
         </p14:section>
-        <p14:section name="The two AI moments" id="{f2b1bec3-601a-6c21-c00a-5804ad3d240e}">
+        <p14:section name="The two AI moments" id="{02e568eb-836b-c4e3-d3c5-fe8da0230644}">
           <p14:sldIdLst>
             <p14:sldId id="260"/>
             <p14:sldId id="261"/>
           </p14:sldIdLst>
         </p14:section>
-        <p14:section name="How it works" id="{443fa03d-4f26-31b7-fc44-0a91d62ff491}">
+        <p14:section name="How it works" id="{b991e49f-39d1-fa60-4fdc-34d4c1e7b43d}">
           <p14:sldIdLst>
             <p14:sldId id="262"/>
             <p14:sldId id="263"/>
@@ -152,7 +152,7 @@
             <p14:sldId id="268"/>
           </p14:sldIdLst>
         </p14:section>
-        <p14:section name="Results and next steps" id="{f894f490-7d69-0820-6a49-8452639c8a40}">
+        <p14:section name="Results and next steps" id="{a50f64f1-e823-4dd3-7e0a-d5857ca682e0}">
           <p14:sldIdLst>
             <p14:sldId id="269"/>
             <p14:sldId id="270"/>
@@ -3748,7 +3748,7 @@
                   <a:schemeClr val="tx1"/>
                 </a:solidFill>
               </a:rPr>
-              <a:t>Plan state and personal details encrypted; delete on request</a:t>
+              <a:t>Details, statements and plans encrypted; keys kept apart</a:t>
             </a:r>
             <a:endParaRPr lang="en-US" sz="1400" dirty="0"/>
           </a:p>
@@ -7508,7 +7508,7 @@
                 <a:ea typeface="Cambria" pitchFamily="34" charset="-122"/>
                 <a:cs typeface="Cambria" pitchFamily="34" charset="-120"/>
               </a:rPr>
-              <a:t>103</a:t>
+              <a:t>115</a:t>
             </a:r>
             <a:endParaRPr lang="en-US" sz="5400" dirty="0"/>
           </a:p>

--- a/House_Move_Agent.pptx
+++ b/House_Move_Agent.pptx
@@ -16,8 +16,10 @@
     <p:sldId id="264" r:id="rId10"/>
     <p:sldId id="265" r:id="rId11"/>
     <p:sldId id="266" r:id="rId12"/>
+    <p:sldId id="273" r:id="rId24"/>
     <p:sldId id="267" r:id="rId13"/>
     <p:sldId id="268" r:id="rId14"/>
+    <p:sldId id="274" r:id="rId25"/>
     <p:sldId id="269" r:id="rId15"/>
     <p:sldId id="270" r:id="rId16"/>
     <p:sldId id="271" r:id="rId17"/>
@@ -148,12 +150,14 @@
             <p14:sldId id="264"/>
             <p14:sldId id="265"/>
             <p14:sldId id="266"/>
+            <p14:sldId id="273"/>
             <p14:sldId id="267"/>
             <p14:sldId id="268"/>
           </p14:sldIdLst>
         </p14:section>
         <p14:section name="Results and next steps" id="{a50f64f1-e823-4dd3-7e0a-d5857ca682e0}">
           <p14:sldIdLst>
+            <p14:sldId id="274"/>
             <p14:sldId id="269"/>
             <p14:sldId id="270"/>
             <p14:sldId id="271"/>
@@ -915,10 +919,8 @@
           <a:lstStyle/>
           <a:p>
             <a:r>
-              <a:rPr lang="en-US" dirty="0"/>
-              <a:t>Each control is enforced in code and replayed as an attack in test_session_security.py: forged approved state is discarded, another customer's record will not open, tampered tokens are refused. Approvals, imports and deletions need a one-time code the customer types; middleware records their real message and the tool checks it, so an LLM or an injected provider reply cannot approve. Provider replies are read only by reply_agent, which has no approve or send tools. On the portal, approval comes from the customer's own signed-in browser, so no LLM is involved; it is tied to the exact wording they read.</a:t>
-            </a:r>
-            <a:endParaRPr lang="en-US" dirty="0"/>
+              <a:t>Each control is enforced in code and replayed as an attack in test_session_security.py: forged approved state is discarded, another customer's record will not open, tampered tokens are refused, and a customer ID the LLM passes to a tool cannot read another customer's payments (the evaluations caught that one). Approvals, imports and deletions in the chat need a one-time code the customer types; middleware records their real message and the tool checks it, so an LLM or an injected provider reply cannot approve. Provider replies are read only by reply_agent, which has no approve or send tools. In the app, approval comes from the customer's own signed-in browser, so no LLM is involved; it is tied to the exact wording they read.</a:t>
+            </a:r>
           </a:p>
         </p:txBody>
       </p:sp>
@@ -1003,10 +1005,8 @@
           <a:lstStyle/>
           <a:p>
             <a:r>
-              <a:rPr lang="en-US" dirty="0"/>
-              <a:t>The status page reads the same server-side case the agents use, under the same ownership rules. Approving there takes the owner's lock (shared with the agent server through a file lock) and records the fingerprint of the draft the customer opened, which send_notification checks. Codes are never shown here.</a:t>
-            </a:r>
-            <a:endParaRPr lang="en-US" dirty="0"/>
+              <a:t>The House Move app reads the same server-side case the agents use, under the same ownership rules. The next step is worked out from the real case, so it always matches what has happened. Approve all approves every routine letter the customer has been shown, each with the fingerprint of its wording; legal requirements follow one at a time. Change asks the assistant to rewrite one letter, which then needs approving again; Skip asks for confirmation, and a legal requirement needs an explicit one. Codes are never shown here.</a:t>
+            </a:r>
           </a:p>
         </p:txBody>
       </p:sp>
@@ -1179,10 +1179,8 @@
           <a:lstStyle/>
           <a:p>
             <a:r>
-              <a:rPr lang="en-US" dirty="0"/>
-              <a:t>Real public data, no API keys. GP practices and phone numbers come live from the NHS; schools from the Department for Education's register, rebuilt daily if needed.</a:t>
-            </a:r>
-            <a:endParaRPr lang="en-US" dirty="0"/>
+              <a:t>Water and sewerage come live from Ofwat's appointed area maps (April 2024, Open Government Licence) at the postcode's coordinates, so Chelmsford is Essex &amp; Suffolk Water with Anglian sewerage, and Bristol is Bristol Water with Wessex. If that service is down, a checked table answers. GP practices and phone numbers come live from the NHS; schools from the Department for Education's register.</a:t>
+            </a:r>
           </a:p>
         </p:txBody>
       </p:sp>
@@ -1267,10 +1265,8 @@
           <a:lstStyle/>
           <a:p>
             <a:r>
-              <a:rPr lang="en-US" dirty="0"/>
-              <a:t>Every number is from the repository: agents and tools in the network file, rules in obligations_rules.json, tests from pytest.</a:t>
-            </a:r>
-            <a:endParaRPr lang="en-US" dirty="0"/>
+              <a:t>Every number is from the repository: agents and tools in the network file, rules in obligations_rules.json, unit tests from pytest, and the live AI evaluation runs in tests/fixtures/hackathon/house_move.</a:t>
+            </a:r>
           </a:p>
         </p:txBody>
       </p:sp>
@@ -1531,10 +1527,8 @@
           <a:lstStyle/>
           <a:p>
             <a:r>
-              <a:rPr lang="en-US" dirty="0"/>
-              <a:t>Demo order: discovery, live council lookup, the dated plan with local contacts, drafts and approval (in the chat or on the My move page), the date slip, a provider reply, the audit trail.</a:t>
-            </a:r>
-            <a:endParaRPr lang="en-US" dirty="0"/>
+              <a:t>Demo order: sign in on the House Move app, discovery, the dated plan with local contacts, Approve all (or review one by one: approve, change, skip), send, open a Ready for you to send pack, the date slip, a provider reply, the audit trail. Show the agent graph in nsflow alongside.</a:t>
+            </a:r>
           </a:p>
         </p:txBody>
       </p:sp>
@@ -1567,6 +1561,146 @@
         <p14:creationId xmlns:p14="http://schemas.microsoft.com/office/powerpoint/2010/main" val="1024086991"/>
       </p:ext>
     </p:extLst>
+  </p:cSld>
+  <p:clrMapOvr>
+    <a:masterClrMapping/>
+  </p:clrMapOvr>
+</p:notes>
+</file>
+
+<file path=ppt/notesSlides/notesSlide18.xml><?xml version="1.0" encoding="utf-8"?>
+<p:notes xmlns:a="http://schemas.openxmlformats.org/drawingml/2006/main" xmlns:p="http://schemas.openxmlformats.org/presentationml/2006/main" xmlns:r="http://schemas.openxmlformats.org/officeDocument/2006/relationships">
+  <p:cSld>
+    <p:spTree>
+      <p:nvGrpSpPr>
+        <p:cNvPr id="1" name=""/>
+        <p:cNvGrpSpPr/>
+        <p:nvPr/>
+      </p:nvGrpSpPr>
+      <p:grpSpPr>
+        <a:xfrm>
+          <a:off x="0" y="0"/>
+          <a:ext cx="0" cy="0"/>
+          <a:chOff x="0" y="0"/>
+          <a:chExt cx="0" cy="0"/>
+        </a:xfrm>
+      </p:grpSpPr>
+      <p:sp>
+        <p:nvSpPr>
+          <p:cNvPr id="2" name="Slide Image Placeholder 1"/>
+          <p:cNvSpPr>
+            <a:spLocks noGrp="1"/>
+          </p:cNvSpPr>
+          <p:nvPr>
+            <p:ph type="sldImg" idx="2"/>
+          </p:nvPr>
+        </p:nvSpPr>
+        <p:spPr/>
+      </p:sp>
+      <p:sp>
+        <p:nvSpPr>
+          <p:cNvPr id="3" name="Notes Placeholder 2"/>
+          <p:cNvSpPr>
+            <a:spLocks noGrp="1"/>
+          </p:cNvSpPr>
+          <p:nvPr>
+            <p:ph type="body" idx="3" sz="quarter"/>
+          </p:nvPr>
+        </p:nvSpPr>
+        <p:spPr/>
+        <p:txBody>
+          <a:bodyPr/>
+          <a:lstStyle/>
+          <a:p>
+            <a:r>
+              <a:t>After approval, a complete email with every reference known goes straight to the organisation (mock in the demo). Anything else becomes a pre-filled pack: an online form, a phone call, or a letter missing something only the customer has, such as meter readings. Tapping the pack fills it in with the customer's details at that moment, never stored, with what to add and the organisation's link. I've sent it moves it to sent.</a:t>
+            </a:r>
+          </a:p>
+        </p:txBody>
+      </p:sp>
+      <p:sp>
+        <p:nvSpPr>
+          <p:cNvPr id="4" name="Slide Number Placeholder 3"/>
+          <p:cNvSpPr>
+            <a:spLocks noGrp="1"/>
+          </p:cNvSpPr>
+          <p:nvPr>
+            <p:ph type="sldNum" idx="5" sz="quarter"/>
+          </p:nvPr>
+        </p:nvSpPr>
+        <p:spPr/>
+      </p:sp>
+    </p:spTree>
+  </p:cSld>
+  <p:clrMapOvr>
+    <a:masterClrMapping/>
+  </p:clrMapOvr>
+</p:notes>
+</file>
+
+<file path=ppt/notesSlides/notesSlide19.xml><?xml version="1.0" encoding="utf-8"?>
+<p:notes xmlns:a="http://schemas.openxmlformats.org/drawingml/2006/main" xmlns:p="http://schemas.openxmlformats.org/presentationml/2006/main" xmlns:r="http://schemas.openxmlformats.org/officeDocument/2006/relationships">
+  <p:cSld>
+    <p:spTree>
+      <p:nvGrpSpPr>
+        <p:cNvPr id="1" name=""/>
+        <p:cNvGrpSpPr/>
+        <p:nvPr/>
+      </p:nvGrpSpPr>
+      <p:grpSpPr>
+        <a:xfrm>
+          <a:off x="0" y="0"/>
+          <a:ext cx="0" cy="0"/>
+          <a:chOff x="0" y="0"/>
+          <a:chExt cx="0" cy="0"/>
+        </a:xfrm>
+      </p:grpSpPr>
+      <p:sp>
+        <p:nvSpPr>
+          <p:cNvPr id="2" name="Slide Image Placeholder 1"/>
+          <p:cNvSpPr>
+            <a:spLocks noGrp="1"/>
+          </p:cNvSpPr>
+          <p:nvPr>
+            <p:ph type="sldImg" idx="2"/>
+          </p:nvPr>
+        </p:nvSpPr>
+        <p:spPr/>
+      </p:sp>
+      <p:sp>
+        <p:nvSpPr>
+          <p:cNvPr id="3" name="Notes Placeholder 2"/>
+          <p:cNvSpPr>
+            <a:spLocks noGrp="1"/>
+          </p:cNvSpPr>
+          <p:nvPr>
+            <p:ph type="body" idx="3" sz="quarter"/>
+          </p:nvPr>
+        </p:nvSpPr>
+        <p:spPr/>
+        <p:txBody>
+          <a:bodyPr/>
+          <a:lstStyle/>
+          <a:p>
+            <a:r>
+              <a:t>Integration fixtures run the real network against the LLM. Each synthetic customer has its providers and life facts written down; keyword checks cover names, and an LLM judge (gist) checks inferred facts, that the plan marks exactly the legal duties, and that drafts invent no dates or fees. The first run caught a real bug: get_transactions trusted a customer ID written by the LLM, so one customer's session could read another's payments. It now reads only the case the session opened.</a:t>
+            </a:r>
+          </a:p>
+        </p:txBody>
+      </p:sp>
+      <p:sp>
+        <p:nvSpPr>
+          <p:cNvPr id="4" name="Slide Number Placeholder 3"/>
+          <p:cNvSpPr>
+            <a:spLocks noGrp="1"/>
+          </p:cNvSpPr>
+          <p:nvPr>
+            <p:ph type="sldNum" idx="5" sz="quarter"/>
+          </p:nvPr>
+        </p:nvSpPr>
+        <p:spPr/>
+      </p:sp>
+    </p:spTree>
   </p:cSld>
   <p:clrMapOvr>
     <a:masterClrMapping/>
@@ -1795,10 +1929,8 @@
           <a:lstStyle/>
           <a:p>
             <a:r>
-              <a:rPr lang="en-US" dirty="0"/>
-              <a:t>Same agents and rules behind both doors. The bank route is the strongest because the bank already holds the payments and the references; standalone shows the product works for everyone.</a:t>
-            </a:r>
-            <a:endParaRPr lang="en-US" dirty="0"/>
+              <a:t>Same agents and rules behind both doors. The bank route is the strongest because the bank already holds the payments and the references; standalone shows the product works for everyone. A guest who signs out comes back with their case reference and a resume code shown once when the case starts; only a salted hash is stored, and five wrong codes lock it.</a:t>
+            </a:r>
           </a:p>
         </p:txBody>
       </p:sp>
@@ -4132,7 +4264,7 @@
                   <a:schemeClr val="tx2"/>
                 </a:solidFill>
               </a:rPr>
-              <a:t>My move: the customer always knows where things stand</a:t>
+              <a:t>The app always shows the next step</a:t>
             </a:r>
             <a:endParaRPr lang="en-US" sz="3400" dirty="0"/>
           </a:p>
@@ -4596,7 +4728,7 @@
                   <a:schemeClr val="tx2"/>
                 </a:solidFill>
               </a:rPr>
-              <a:t>Waiting for your approval (15)</a:t>
+              <a:t>Approve your 15 letters</a:t>
             </a:r>
             <a:endParaRPr lang="en-US" sz="1500" dirty="0"/>
           </a:p>
@@ -5380,7 +5512,7 @@
                   <a:schemeClr val="accent6"/>
                 </a:solidFill>
               </a:rPr>
-              <a:t>Portal page at /status, refreshed every 5 seconds</a:t>
+              <a:t>House Move app: Move, Chat and Account tabs</a:t>
             </a:r>
             <a:endParaRPr lang="en-US" sz="1200" dirty="0"/>
           </a:p>
@@ -5460,7 +5592,7 @@
                   <a:schemeClr val="tx2"/>
                 </a:solidFill>
               </a:rPr>
-              <a:t>Stage and next step</a:t>
+              <a:t>One next step at a time</a:t>
             </a:r>
             <a:endParaRPr lang="en-US" sz="1700" dirty="0"/>
           </a:p>
@@ -5474,7 +5606,7 @@
                   <a:schemeClr val="tx1"/>
                 </a:solidFill>
               </a:rPr>
-              <a:t>Seven stages, what is waiting on you, and recent activity</a:t>
+              <a:t>A card on the Move tab and under every chat reply takes you there</a:t>
             </a:r>
             <a:endParaRPr lang="en-US" sz="1700" dirty="0"/>
           </a:p>
@@ -5554,7 +5686,7 @@
                   <a:schemeClr val="tx2"/>
                 </a:solidFill>
               </a:rPr>
-              <a:t>Read, then approve</a:t>
+              <a:t>Approve all, or one by one</a:t>
             </a:r>
             <a:endParaRPr lang="en-US" sz="1700" dirty="0"/>
           </a:p>
@@ -5568,7 +5700,7 @@
                   <a:schemeClr val="tx1"/>
                 </a:solidFill>
               </a:rPr>
-              <a:t>A click from your own signed-in browser approves the exact wording you read</a:t>
+              <a:t>Read every letter, then approve, change or skip it, tied to that exact wording</a:t>
             </a:r>
             <a:endParaRPr lang="en-US" sz="1700" dirty="0"/>
           </a:p>
@@ -5722,6 +5854,542 @@
 </file>
 
 <file path=ppt/slides/slide12.xml><?xml version="1.0" encoding="utf-8"?>
+<p:sld xmlns:a="http://schemas.openxmlformats.org/drawingml/2006/main" xmlns:r="http://schemas.openxmlformats.org/officeDocument/2006/relationships" xmlns:p="http://schemas.openxmlformats.org/presentationml/2006/main">
+  <p:cSld name="Slide 4">
+    <p:spTree>
+      <p:nvGrpSpPr>
+        <p:cNvPr id="1" name=""/>
+        <p:cNvGrpSpPr/>
+        <p:nvPr/>
+      </p:nvGrpSpPr>
+      <p:grpSpPr>
+        <a:xfrm>
+          <a:off x="0" y="0"/>
+          <a:ext cx="0" cy="0"/>
+          <a:chOff x="0" y="0"/>
+          <a:chExt cx="0" cy="0"/>
+        </a:xfrm>
+      </p:grpSpPr>
+      <p:sp>
+        <p:nvSpPr>
+          <p:cNvPr id="2" name="Text 0"/>
+          <p:cNvSpPr/>
+          <p:nvPr>
+            <p:ph idx="100" type="title" hasCustomPrompt="1"/>
+          </p:nvPr>
+        </p:nvSpPr>
+        <p:spPr>
+          <a:xfrm>
+            <a:off x="548640" y="320040"/>
+            <a:ext cx="11064240" cy="868680"/>
+          </a:xfrm>
+          <a:prstGeom prst="rect">
+            <a:avLst/>
+          </a:prstGeom>
+          <a:noFill/>
+          <a:ln/>
+        </p:spPr>
+        <p:txBody>
+          <a:bodyPr wrap="square" lIns="0" tIns="0" rIns="0" bIns="0" rtlCol="0" anchor="ctr"/>
+          <a:lstStyle/>
+          <a:p>
+            <a:pPr indent="0" marL="0">
+              <a:buNone/>
+            </a:pPr>
+            <a:r>
+              <a:rPr lang="en-US" sz="3400" b="1" dirty="0">
+                <a:solidFill>
+                  <a:schemeClr val="tx2"/>
+                </a:solidFill>
+              </a:rPr>
+              <a:t>Sent for you, or ready for you to send</a:t>
+            </a:r>
+            <a:endParaRPr lang="en-US" sz="3400" dirty="0"/>
+          </a:p>
+        </p:txBody>
+      </p:sp>
+      <p:sp>
+        <p:nvSpPr>
+          <p:cNvPr id="3" name="Bank customer card"/>
+          <p:cNvSpPr/>
+          <p:nvPr/>
+        </p:nvSpPr>
+        <p:spPr>
+          <a:xfrm>
+            <a:off x="548640" y="1463040"/>
+            <a:ext cx="5394960" cy="4480560"/>
+          </a:xfrm>
+          <a:prstGeom prst="roundRect">
+            <a:avLst>
+              <a:gd name="adj" fmla="val 2449"/>
+            </a:avLst>
+          </a:prstGeom>
+          <a:solidFill>
+            <a:schemeClr val="bg2"/>
+          </a:solidFill>
+          <a:ln/>
+        </p:spPr>
+      </p:sp>
+      <p:sp>
+        <p:nvSpPr>
+          <p:cNvPr id="4" name="Bank customer circle"/>
+          <p:cNvSpPr/>
+          <p:nvPr/>
+        </p:nvSpPr>
+        <p:spPr>
+          <a:xfrm>
+            <a:off x="868680" y="1737360"/>
+            <a:ext cx="822960" cy="822960"/>
+          </a:xfrm>
+          <a:prstGeom prst="ellipse">
+            <a:avLst/>
+          </a:prstGeom>
+          <a:solidFill>
+            <a:schemeClr val="accent2"/>
+          </a:solidFill>
+          <a:ln/>
+        </p:spPr>
+      </p:sp>
+      <p:pic>
+        <p:nvPicPr>
+          <p:cNvPr id="5" name="Sent for you icon" descr="preencoded.png">    </p:cNvPr>
+          <p:cNvPicPr>
+            <a:picLocks noChangeAspect="1"/>
+          </p:cNvPicPr>
+          <p:nvPr/>
+        </p:nvPicPr>
+        <p:blipFill>
+          <a:blip r:embed="rId1"/>
+          <a:stretch>
+            <a:fillRect/>
+          </a:stretch>
+        </p:blipFill>
+        <p:spPr>
+          <a:xfrm>
+            <a:off x="1074420" y="1943100"/>
+            <a:ext cx="411480" cy="411480"/>
+          </a:xfrm>
+          <a:prstGeom prst="rect">
+            <a:avLst/>
+          </a:prstGeom>
+        </p:spPr>
+      </p:pic>
+      <p:sp>
+        <p:nvSpPr>
+          <p:cNvPr id="6" name="Text 3"/>
+          <p:cNvSpPr txBox="1"/>
+          <p:nvPr/>
+        </p:nvSpPr>
+        <p:spPr>
+          <a:xfrm>
+            <a:off x="1874520" y="1737360"/>
+            <a:ext cx="3840480" cy="457200"/>
+          </a:xfrm>
+          <a:prstGeom prst="rect">
+            <a:avLst/>
+          </a:prstGeom>
+          <a:noFill/>
+          <a:ln/>
+        </p:spPr>
+        <p:txBody>
+          <a:bodyPr wrap="square" lIns="0" tIns="0" rIns="0" bIns="0" rtlCol="0" anchor="ctr"/>
+          <a:lstStyle/>
+          <a:p>
+            <a:pPr indent="0" marL="0">
+              <a:buNone/>
+            </a:pPr>
+            <a:r>
+              <a:rPr lang="en-US" sz="2400" b="1" dirty="0">
+                <a:solidFill>
+                  <a:schemeClr val="tx2"/>
+                </a:solidFill>
+              </a:rPr>
+              <a:t>Sent for you</a:t>
+            </a:r>
+            <a:endParaRPr lang="en-US" sz="2400" dirty="0"/>
+          </a:p>
+        </p:txBody>
+      </p:sp>
+      <p:sp>
+        <p:nvSpPr>
+          <p:cNvPr id="7" name="Text 4"/>
+          <p:cNvSpPr txBox="1"/>
+          <p:nvPr/>
+        </p:nvSpPr>
+        <p:spPr>
+          <a:xfrm>
+            <a:off x="1874520" y="2194560"/>
+            <a:ext cx="3840480" cy="411480"/>
+          </a:xfrm>
+          <a:prstGeom prst="rect">
+            <a:avLst/>
+          </a:prstGeom>
+          <a:noFill/>
+          <a:ln/>
+        </p:spPr>
+        <p:txBody>
+          <a:bodyPr wrap="square" lIns="0" tIns="0" rIns="0" bIns="0" rtlCol="0" anchor="ctr"/>
+          <a:lstStyle/>
+          <a:p>
+            <a:pPr indent="0" marL="0">
+              <a:buNone/>
+            </a:pPr>
+            <a:r>
+              <a:rPr lang="en-US" sz="1500" i="1" dirty="0">
+                <a:solidFill>
+                  <a:schemeClr val="accent6"/>
+                </a:solidFill>
+              </a:rPr>
+              <a:t>Complete emails with every reference known</a:t>
+            </a:r>
+            <a:endParaRPr lang="en-US" sz="1500" dirty="0"/>
+          </a:p>
+        </p:txBody>
+      </p:sp>
+      <p:sp>
+        <p:nvSpPr>
+          <p:cNvPr id="8" name="Text 5"/>
+          <p:cNvSpPr txBox="1"/>
+          <p:nvPr/>
+        </p:nvSpPr>
+        <p:spPr>
+          <a:xfrm>
+            <a:off x="914400" y="2926080"/>
+            <a:ext cx="4754880" cy="2743200"/>
+          </a:xfrm>
+          <a:prstGeom prst="rect">
+            <a:avLst/>
+          </a:prstGeom>
+          <a:noFill/>
+          <a:ln/>
+        </p:spPr>
+        <p:txBody>
+          <a:bodyPr wrap="square" lIns="0" tIns="0" rIns="0" bIns="0" rtlCol="0" anchor="t"/>
+          <a:lstStyle/>
+          <a:p>
+            <a:pPr marL="342900" indent="-342900">
+              <a:spcAft>
+                <a:spcPts val="1000"/>
+              </a:spcAft>
+              <a:buSzPct val="100000"/>
+              <a:buChar char="•"/>
+            </a:pPr>
+            <a:r>
+              <a:rPr lang="en-US" sz="1700" dirty="0">
+                <a:solidFill>
+                  <a:schemeClr val="tx1"/>
+                </a:solidFill>
+              </a:rPr>
+              <a:t>Account, policy and licence numbers filled in from your Direct Debits</a:t>
+            </a:r>
+            <a:endParaRPr lang="en-US" sz="1700" dirty="0"/>
+          </a:p>
+          <a:p>
+            <a:pPr marL="342900" indent="-342900">
+              <a:spcAft>
+                <a:spcPts val="1000"/>
+              </a:spcAft>
+              <a:buSzPct val="100000"/>
+              <a:buChar char="•"/>
+            </a:pPr>
+            <a:r>
+              <a:rPr lang="en-US" sz="1700" dirty="0">
+                <a:solidFill>
+                  <a:schemeClr val="tx1"/>
+                </a:solidFill>
+              </a:rPr>
+              <a:t>Delivered straight to the organisation</a:t>
+            </a:r>
+            <a:endParaRPr lang="en-US" sz="1700" dirty="0"/>
+          </a:p>
+          <a:p>
+            <a:pPr marL="342900" indent="-342900">
+              <a:spcAft>
+                <a:spcPts val="1000"/>
+              </a:spcAft>
+              <a:buSzPct val="100000"/>
+              <a:buChar char="•"/>
+            </a:pPr>
+            <a:r>
+              <a:rPr lang="en-US" sz="1700" dirty="0">
+                <a:solidFill>
+                  <a:schemeClr val="tx1"/>
+                </a:solidFill>
+              </a:rPr>
+              <a:t>Replies come back here; the bank updates its own records</a:t>
+            </a:r>
+            <a:endParaRPr lang="en-US" sz="1700" dirty="0"/>
+          </a:p>
+        </p:txBody>
+      </p:sp>
+      <p:sp>
+        <p:nvSpPr>
+          <p:cNvPr id="9" name="Standalone card"/>
+          <p:cNvSpPr/>
+          <p:nvPr/>
+        </p:nvSpPr>
+        <p:spPr>
+          <a:xfrm>
+            <a:off x="6217920" y="1463040"/>
+            <a:ext cx="5394960" cy="4480560"/>
+          </a:xfrm>
+          <a:prstGeom prst="roundRect">
+            <a:avLst>
+              <a:gd name="adj" fmla="val 2449"/>
+            </a:avLst>
+          </a:prstGeom>
+          <a:solidFill>
+            <a:schemeClr val="bg2"/>
+          </a:solidFill>
+          <a:ln/>
+        </p:spPr>
+      </p:sp>
+      <p:sp>
+        <p:nvSpPr>
+          <p:cNvPr id="10" name="Standalone circle"/>
+          <p:cNvSpPr/>
+          <p:nvPr/>
+        </p:nvSpPr>
+        <p:spPr>
+          <a:xfrm>
+            <a:off x="6537960" y="1737360"/>
+            <a:ext cx="822960" cy="822960"/>
+          </a:xfrm>
+          <a:prstGeom prst="ellipse">
+            <a:avLst/>
+          </a:prstGeom>
+          <a:solidFill>
+            <a:schemeClr val="accent1"/>
+          </a:solidFill>
+          <a:ln/>
+        </p:spPr>
+      </p:sp>
+      <p:pic>
+        <p:nvPicPr>
+          <p:cNvPr id="11" name="Ready for you to send icon" descr="preencoded.png">    </p:cNvPr>
+          <p:cNvPicPr>
+            <a:picLocks noChangeAspect="1"/>
+          </p:cNvPicPr>
+          <p:nvPr/>
+        </p:nvPicPr>
+        <p:blipFill>
+          <a:blip r:embed="rId2"/>
+          <a:stretch>
+            <a:fillRect/>
+          </a:stretch>
+        </p:blipFill>
+        <p:spPr>
+          <a:xfrm>
+            <a:off x="6743700" y="1943100"/>
+            <a:ext cx="411480" cy="411480"/>
+          </a:xfrm>
+          <a:prstGeom prst="rect">
+            <a:avLst/>
+          </a:prstGeom>
+        </p:spPr>
+      </p:pic>
+      <p:sp>
+        <p:nvSpPr>
+          <p:cNvPr id="12" name="Text 8"/>
+          <p:cNvSpPr txBox="1"/>
+          <p:nvPr/>
+        </p:nvSpPr>
+        <p:spPr>
+          <a:xfrm>
+            <a:off x="7543800" y="1737360"/>
+            <a:ext cx="3840480" cy="457200"/>
+          </a:xfrm>
+          <a:prstGeom prst="rect">
+            <a:avLst/>
+          </a:prstGeom>
+          <a:noFill/>
+          <a:ln/>
+        </p:spPr>
+        <p:txBody>
+          <a:bodyPr wrap="square" lIns="0" tIns="0" rIns="0" bIns="0" rtlCol="0" anchor="ctr"/>
+          <a:lstStyle/>
+          <a:p>
+            <a:pPr indent="0" marL="0">
+              <a:buNone/>
+            </a:pPr>
+            <a:r>
+              <a:rPr lang="en-US" sz="2400" b="1" dirty="0">
+                <a:solidFill>
+                  <a:schemeClr val="tx2"/>
+                </a:solidFill>
+              </a:rPr>
+              <a:t>Ready for you to send</a:t>
+            </a:r>
+            <a:endParaRPr lang="en-US" sz="2400" dirty="0"/>
+          </a:p>
+        </p:txBody>
+      </p:sp>
+      <p:sp>
+        <p:nvSpPr>
+          <p:cNvPr id="13" name="Text 9"/>
+          <p:cNvSpPr txBox="1"/>
+          <p:nvPr/>
+        </p:nvSpPr>
+        <p:spPr>
+          <a:xfrm>
+            <a:off x="7543800" y="2194560"/>
+            <a:ext cx="3840480" cy="411480"/>
+          </a:xfrm>
+          <a:prstGeom prst="rect">
+            <a:avLst/>
+          </a:prstGeom>
+          <a:noFill/>
+          <a:ln/>
+        </p:spPr>
+        <p:txBody>
+          <a:bodyPr wrap="square" lIns="0" tIns="0" rIns="0" bIns="0" rtlCol="0" anchor="ctr"/>
+          <a:lstStyle/>
+          <a:p>
+            <a:pPr indent="0" marL="0">
+              <a:buNone/>
+            </a:pPr>
+            <a:r>
+              <a:rPr lang="en-US" sz="1500" i="1" dirty="0">
+                <a:solidFill>
+                  <a:schemeClr val="accent6"/>
+                </a:solidFill>
+              </a:rPr>
+              <a:t>Forms, calls, or details only you have</a:t>
+            </a:r>
+            <a:endParaRPr lang="en-US" sz="1500" dirty="0"/>
+          </a:p>
+        </p:txBody>
+      </p:sp>
+      <p:sp>
+        <p:nvSpPr>
+          <p:cNvPr id="14" name="Text 10"/>
+          <p:cNvSpPr txBox="1"/>
+          <p:nvPr/>
+        </p:nvSpPr>
+        <p:spPr>
+          <a:xfrm>
+            <a:off x="6583680" y="2926080"/>
+            <a:ext cx="4754880" cy="2743200"/>
+          </a:xfrm>
+          <a:prstGeom prst="rect">
+            <a:avLst/>
+          </a:prstGeom>
+          <a:noFill/>
+          <a:ln/>
+        </p:spPr>
+        <p:txBody>
+          <a:bodyPr wrap="square" lIns="0" tIns="0" rIns="0" bIns="0" rtlCol="0" anchor="t"/>
+          <a:lstStyle/>
+          <a:p>
+            <a:pPr marL="342900" indent="-342900">
+              <a:spcAft>
+                <a:spcPts val="1000"/>
+              </a:spcAft>
+              <a:buSzPct val="100000"/>
+              <a:buChar char="•"/>
+            </a:pPr>
+            <a:r>
+              <a:rPr lang="en-US" sz="1700" dirty="0">
+                <a:solidFill>
+                  <a:schemeClr val="tx1"/>
+                </a:solidFill>
+              </a:rPr>
+              <a:t>Tap the letter: filled in with your details as you open it</a:t>
+            </a:r>
+            <a:endParaRPr lang="en-US" sz="1700" dirty="0"/>
+          </a:p>
+          <a:p>
+            <a:pPr marL="342900" indent="-342900">
+              <a:spcAft>
+                <a:spcPts val="1000"/>
+              </a:spcAft>
+              <a:buSzPct val="100000"/>
+              <a:buChar char="•"/>
+            </a:pPr>
+            <a:r>
+              <a:rPr lang="en-US" sz="1700" dirty="0">
+                <a:solidFill>
+                  <a:schemeClr val="tx1"/>
+                </a:solidFill>
+              </a:rPr>
+              <a:t>What to add, then Copy text and Open the organisation's page</a:t>
+            </a:r>
+            <a:endParaRPr lang="en-US" sz="1700" dirty="0"/>
+          </a:p>
+          <a:p>
+            <a:pPr marL="342900" indent="-342900">
+              <a:spcAft>
+                <a:spcPts val="1000"/>
+              </a:spcAft>
+              <a:buSzPct val="100000"/>
+              <a:buChar char="•"/>
+            </a:pPr>
+            <a:r>
+              <a:rPr lang="en-US" sz="1700" dirty="0">
+                <a:solidFill>
+                  <a:schemeClr val="tx1"/>
+                </a:solidFill>
+              </a:rPr>
+              <a:t>Tap "I've sent it" and the plan shows it as sent</a:t>
+            </a:r>
+            <a:endParaRPr lang="en-US" sz="1700" dirty="0"/>
+          </a:p>
+        </p:txBody>
+      </p:sp>
+      <p:sp>
+        <p:nvSpPr>
+          <p:cNvPr id="25" name="Slide Number Placeholder 0"/>
+          <p:cNvSpPr>
+            <a:spLocks noGrp="1"/>
+          </p:cNvSpPr>
+          <p:nvPr>
+            <p:ph type="sldNum" sz="quarter" idx="4294967295"/>
+          </p:nvPr>
+        </p:nvSpPr>
+        <p:spPr>
+          <a:xfrm>
+            <a:off x="11247120" y="6400800"/>
+            <a:ext cx="457200" cy="274320"/>
+          </a:xfrm>
+          <a:prstGeom prst="rect">
+            <a:avLst/>
+          </a:prstGeom>
+          <a:extLst>
+            <a:ext uri="{C572A759-6A51-4108-AA02-DFA0A04FC94B}">
+              <ma14:wrappingTextBoxFlag xmlns:ma14="http://schemas.microsoft.com/office/mac/drawingml/2011/main" val="0"/>
+            </a:ext>
+          </a:extLst>
+        </p:spPr>
+        <p:txBody>
+          <a:bodyPr/>
+          <a:lstStyle>
+            <a:lvl1pPr>
+              <a:defRPr sz="1000">
+                <a:solidFill>
+                  <a:schemeClr val="accent6"/>
+                </a:solidFill>
+              </a:defRPr>
+            </a:lvl1pPr>
+          </a:lstStyle>
+          <a:p>
+            <a:pPr algn="r"/>
+            <a:fld id="{F7021451-1387-4CA6-816F-3879F97B5CBC}" type="slidenum">
+              <a:rPr b="0" lang="en-US"/>
+              <a:t>4</a:t>
+            </a:fld>
+            <a:endParaRPr lang="en-US"/>
+          </a:p>
+        </p:txBody>
+      </p:sp>
+    </p:spTree>
+  </p:cSld>
+  <p:clrMapOvr>
+    <a:masterClrMapping/>
+  </p:clrMapOvr>
+</p:sld>
+</file>
+
+<file path=ppt/slides/slide13.xml><?xml version="1.0" encoding="utf-8"?>
 <p:sld xmlns:a="http://schemas.openxmlformats.org/drawingml/2006/main" xmlns:r="http://schemas.openxmlformats.org/officeDocument/2006/relationships" xmlns:p="http://schemas.openxmlformats.org/presentationml/2006/main">
   <p:cSld name="Slide 12">
     <p:spTree>
@@ -6321,7 +6989,7 @@
 </p:sld>
 </file>
 
-<file path=ppt/slides/slide13.xml><?xml version="1.0" encoding="utf-8"?>
+<file path=ppt/slides/slide14.xml><?xml version="1.0" encoding="utf-8"?>
 <p:sld xmlns:a="http://schemas.openxmlformats.org/drawingml/2006/main" xmlns:r="http://schemas.openxmlformats.org/officeDocument/2006/relationships" xmlns:p="http://schemas.openxmlformats.org/presentationml/2006/main">
   <p:cSld name="Slide 13">
     <p:spTree>
@@ -6936,7 +7604,7 @@
                   <a:schemeClr val="accent6"/>
                 </a:solidFill>
               </a:rPr>
-              <a:t>Checked table plus the official CCW checker</a:t>
+              <a:t>Ofwat's official area maps, live</a:t>
             </a:r>
             <a:endParaRPr lang="en-US" sz="1300" dirty="0"/>
           </a:p>
@@ -6976,7 +7644,7 @@
                   <a:schemeClr val="tx1"/>
                 </a:solidFill>
               </a:rPr>
-              <a:t>Yorkshire Water (to confirm)</a:t>
+              <a:t>Yorkshire Water, confirmed</a:t>
             </a:r>
             <a:endParaRPr lang="en-US" sz="1500" dirty="0"/>
           </a:p>
@@ -7107,7 +7775,478 @@
 </p:sld>
 </file>
 
-<file path=ppt/slides/slide14.xml><?xml version="1.0" encoding="utf-8"?>
+<file path=ppt/slides/slide15.xml><?xml version="1.0" encoding="utf-8"?>
+<p:sld xmlns:a="http://schemas.openxmlformats.org/drawingml/2006/main" xmlns:r="http://schemas.openxmlformats.org/officeDocument/2006/relationships" xmlns:p="http://schemas.openxmlformats.org/presentationml/2006/main">
+  <p:cSld name="Slide 2">
+    <p:spTree>
+      <p:nvGrpSpPr>
+        <p:cNvPr id="1" name=""/>
+        <p:cNvGrpSpPr/>
+        <p:nvPr/>
+      </p:nvGrpSpPr>
+      <p:grpSpPr>
+        <a:xfrm>
+          <a:off x="0" y="0"/>
+          <a:ext cx="0" cy="0"/>
+          <a:chOff x="0" y="0"/>
+          <a:chExt cx="0" cy="0"/>
+        </a:xfrm>
+      </p:grpSpPr>
+      <p:sp>
+        <p:nvSpPr>
+          <p:cNvPr id="2" name="Text 0"/>
+          <p:cNvSpPr/>
+          <p:nvPr>
+            <p:ph idx="100" type="title" hasCustomPrompt="1"/>
+          </p:nvPr>
+        </p:nvSpPr>
+        <p:spPr>
+          <a:xfrm>
+            <a:off x="548640" y="320040"/>
+            <a:ext cx="11064240" cy="868680"/>
+          </a:xfrm>
+          <a:prstGeom prst="rect">
+            <a:avLst/>
+          </a:prstGeom>
+          <a:noFill/>
+          <a:ln/>
+        </p:spPr>
+        <p:txBody>
+          <a:bodyPr wrap="square" lIns="0" tIns="0" rIns="0" bIns="0" rtlCol="0" anchor="ctr"/>
+          <a:lstStyle/>
+          <a:p>
+            <a:pPr indent="0" marL="0">
+              <a:buNone/>
+            </a:pPr>
+            <a:r>
+              <a:rPr lang="en-US" sz="3400" b="1" dirty="0">
+                <a:solidFill>
+                  <a:schemeClr val="tx2"/>
+                </a:solidFill>
+              </a:rPr>
+              <a:t>Evaluated against ground truth, not just tested</a:t>
+            </a:r>
+            <a:endParaRPr lang="en-US" sz="3400" dirty="0"/>
+          </a:p>
+        </p:txBody>
+      </p:sp>
+      <p:sp>
+        <p:nvSpPr>
+          <p:cNvPr id="3" name="stat card 1"/>
+          <p:cNvSpPr/>
+          <p:nvPr/>
+        </p:nvSpPr>
+        <p:spPr>
+          <a:xfrm>
+            <a:off x="548640" y="1554480"/>
+            <a:ext cx="3474720" cy="2926080"/>
+          </a:xfrm>
+          <a:prstGeom prst="roundRect">
+            <a:avLst>
+              <a:gd name="adj" fmla="val 3750"/>
+            </a:avLst>
+          </a:prstGeom>
+          <a:solidFill>
+            <a:schemeClr val="bg2"/>
+          </a:solidFill>
+          <a:ln/>
+        </p:spPr>
+      </p:sp>
+      <p:sp>
+        <p:nvSpPr>
+          <p:cNvPr id="4" name="stat 1"/>
+          <p:cNvSpPr txBox="1"/>
+          <p:nvPr/>
+        </p:nvSpPr>
+        <p:spPr>
+          <a:xfrm>
+            <a:off x="822960" y="1783080"/>
+            <a:ext cx="2926080" cy="1280160"/>
+          </a:xfrm>
+          <a:prstGeom prst="rect">
+            <a:avLst/>
+          </a:prstGeom>
+          <a:noFill/>
+          <a:ln/>
+        </p:spPr>
+        <p:txBody>
+          <a:bodyPr wrap="square" lIns="0" tIns="0" rIns="0" bIns="0" rtlCol="0" anchor="ctr"/>
+          <a:lstStyle/>
+          <a:p>
+            <a:pPr indent="0" marL="0">
+              <a:buNone/>
+            </a:pPr>
+            <a:r>
+              <a:rPr lang="en-US" sz="6000" b="1" dirty="0">
+                <a:solidFill>
+                  <a:schemeClr val="accent2"/>
+                </a:solidFill>
+                <a:latin typeface="Cambria" pitchFamily="34" charset="0"/>
+                <a:ea typeface="Cambria" pitchFamily="34" charset="-122"/>
+                <a:cs typeface="Cambria" pitchFamily="34" charset="-120"/>
+              </a:rPr>
+              <a:t>5</a:t>
+            </a:r>
+            <a:endParaRPr lang="en-US" sz="6000" dirty="0"/>
+          </a:p>
+        </p:txBody>
+      </p:sp>
+      <p:sp>
+        <p:nvSpPr>
+          <p:cNvPr id="5" name="Text 3"/>
+          <p:cNvSpPr txBox="1"/>
+          <p:nvPr/>
+        </p:nvSpPr>
+        <p:spPr>
+          <a:xfrm>
+            <a:off x="822960" y="3154680"/>
+            <a:ext cx="2926080" cy="1097280"/>
+          </a:xfrm>
+          <a:prstGeom prst="rect">
+            <a:avLst/>
+          </a:prstGeom>
+          <a:noFill/>
+          <a:ln/>
+        </p:spPr>
+        <p:txBody>
+          <a:bodyPr wrap="square" lIns="0" tIns="0" rIns="0" bIns="0" rtlCol="0" anchor="t"/>
+          <a:lstStyle/>
+          <a:p>
+            <a:pPr indent="0" marL="0">
+              <a:buNone/>
+            </a:pPr>
+            <a:r>
+              <a:rPr lang="en-US" sz="1800" dirty="0">
+                <a:solidFill>
+                  <a:schemeClr val="tx1"/>
+                </a:solidFill>
+              </a:rPr>
+              <a:t>customers with written-down ground truth</a:t>
+            </a:r>
+            <a:endParaRPr lang="en-US" sz="1800" dirty="0"/>
+          </a:p>
+        </p:txBody>
+      </p:sp>
+      <p:sp>
+        <p:nvSpPr>
+          <p:cNvPr id="6" name="stat card 2"/>
+          <p:cNvSpPr/>
+          <p:nvPr/>
+        </p:nvSpPr>
+        <p:spPr>
+          <a:xfrm>
+            <a:off x="4297680" y="1554480"/>
+            <a:ext cx="3474720" cy="2926080"/>
+          </a:xfrm>
+          <a:prstGeom prst="roundRect">
+            <a:avLst>
+              <a:gd name="adj" fmla="val 3750"/>
+            </a:avLst>
+          </a:prstGeom>
+          <a:solidFill>
+            <a:schemeClr val="bg2"/>
+          </a:solidFill>
+          <a:ln/>
+        </p:spPr>
+      </p:sp>
+      <p:sp>
+        <p:nvSpPr>
+          <p:cNvPr id="7" name="stat 2"/>
+          <p:cNvSpPr txBox="1"/>
+          <p:nvPr/>
+        </p:nvSpPr>
+        <p:spPr>
+          <a:xfrm>
+            <a:off x="4572000" y="1783080"/>
+            <a:ext cx="2926080" cy="1280160"/>
+          </a:xfrm>
+          <a:prstGeom prst="rect">
+            <a:avLst/>
+          </a:prstGeom>
+          <a:noFill/>
+          <a:ln/>
+        </p:spPr>
+        <p:txBody>
+          <a:bodyPr wrap="square" lIns="0" tIns="0" rIns="0" bIns="0" rtlCol="0" anchor="ctr"/>
+          <a:lstStyle/>
+          <a:p>
+            <a:pPr indent="0" marL="0">
+              <a:buNone/>
+            </a:pPr>
+            <a:r>
+              <a:rPr lang="en-US" sz="6000" b="1" dirty="0">
+                <a:solidFill>
+                  <a:schemeClr val="accent1"/>
+                </a:solidFill>
+                <a:latin typeface="Cambria" pitchFamily="34" charset="0"/>
+                <a:ea typeface="Cambria" pitchFamily="34" charset="-122"/>
+                <a:cs typeface="Cambria" pitchFamily="34" charset="-120"/>
+              </a:rPr>
+              <a:t>12</a:t>
+            </a:r>
+            <a:endParaRPr lang="en-US" sz="6000" dirty="0"/>
+          </a:p>
+        </p:txBody>
+      </p:sp>
+      <p:sp>
+        <p:nvSpPr>
+          <p:cNvPr id="8" name="Text 6"/>
+          <p:cNvSpPr txBox="1"/>
+          <p:nvPr/>
+        </p:nvSpPr>
+        <p:spPr>
+          <a:xfrm>
+            <a:off x="4572000" y="3154680"/>
+            <a:ext cx="2926080" cy="1097280"/>
+          </a:xfrm>
+          <a:prstGeom prst="rect">
+            <a:avLst/>
+          </a:prstGeom>
+          <a:noFill/>
+          <a:ln/>
+        </p:spPr>
+        <p:txBody>
+          <a:bodyPr wrap="square" lIns="0" tIns="0" rIns="0" bIns="0" rtlCol="0" anchor="t"/>
+          <a:lstStyle/>
+          <a:p>
+            <a:pPr indent="0" marL="0">
+              <a:buNone/>
+            </a:pPr>
+            <a:r>
+              <a:rPr lang="en-US" sz="1800" dirty="0">
+                <a:solidFill>
+                  <a:schemeClr val="tx1"/>
+                </a:solidFill>
+              </a:rPr>
+              <a:t>live AI conversations checked on every run</a:t>
+            </a:r>
+            <a:endParaRPr lang="en-US" sz="1800" dirty="0"/>
+          </a:p>
+        </p:txBody>
+      </p:sp>
+      <p:sp>
+        <p:nvSpPr>
+          <p:cNvPr id="9" name="stat card 3"/>
+          <p:cNvSpPr/>
+          <p:nvPr/>
+        </p:nvSpPr>
+        <p:spPr>
+          <a:xfrm>
+            <a:off x="8046720" y="1554480"/>
+            <a:ext cx="3474720" cy="2926080"/>
+          </a:xfrm>
+          <a:prstGeom prst="roundRect">
+            <a:avLst>
+              <a:gd name="adj" fmla="val 3750"/>
+            </a:avLst>
+          </a:prstGeom>
+          <a:solidFill>
+            <a:schemeClr val="bg2"/>
+          </a:solidFill>
+          <a:ln/>
+        </p:spPr>
+      </p:sp>
+      <p:sp>
+        <p:nvSpPr>
+          <p:cNvPr id="10" name="stat 3"/>
+          <p:cNvSpPr txBox="1"/>
+          <p:nvPr/>
+        </p:nvSpPr>
+        <p:spPr>
+          <a:xfrm>
+            <a:off x="8321040" y="1783080"/>
+            <a:ext cx="2926080" cy="1280160"/>
+          </a:xfrm>
+          <a:prstGeom prst="rect">
+            <a:avLst/>
+          </a:prstGeom>
+          <a:noFill/>
+          <a:ln/>
+        </p:spPr>
+        <p:txBody>
+          <a:bodyPr wrap="square" lIns="0" tIns="0" rIns="0" bIns="0" rtlCol="0" anchor="ctr"/>
+          <a:lstStyle/>
+          <a:p>
+            <a:pPr indent="0" marL="0">
+              <a:buNone/>
+            </a:pPr>
+            <a:r>
+              <a:rPr lang="en-US" sz="6000" b="1" dirty="0">
+                <a:solidFill>
+                  <a:schemeClr val="accent5"/>
+                </a:solidFill>
+                <a:latin typeface="Cambria" pitchFamily="34" charset="0"/>
+                <a:ea typeface="Cambria" pitchFamily="34" charset="-122"/>
+                <a:cs typeface="Cambria" pitchFamily="34" charset="-120"/>
+              </a:rPr>
+              <a:t>1</a:t>
+            </a:r>
+            <a:endParaRPr lang="en-US" sz="6000" dirty="0"/>
+          </a:p>
+        </p:txBody>
+      </p:sp>
+      <p:sp>
+        <p:nvSpPr>
+          <p:cNvPr id="11" name="Text 9"/>
+          <p:cNvSpPr txBox="1"/>
+          <p:nvPr/>
+        </p:nvSpPr>
+        <p:spPr>
+          <a:xfrm>
+            <a:off x="8321040" y="3154680"/>
+            <a:ext cx="2926080" cy="1097280"/>
+          </a:xfrm>
+          <a:prstGeom prst="rect">
+            <a:avLst/>
+          </a:prstGeom>
+          <a:noFill/>
+          <a:ln/>
+        </p:spPr>
+        <p:txBody>
+          <a:bodyPr wrap="square" lIns="0" tIns="0" rIns="0" bIns="0" rtlCol="0" anchor="t"/>
+          <a:lstStyle/>
+          <a:p>
+            <a:pPr indent="0" marL="0">
+              <a:buNone/>
+            </a:pPr>
+            <a:r>
+              <a:rPr lang="en-US" sz="1800" dirty="0">
+                <a:solidFill>
+                  <a:schemeClr val="tx1"/>
+                </a:solidFill>
+              </a:rPr>
+              <a:t>cross-customer data leak caught, and fixed</a:t>
+            </a:r>
+            <a:endParaRPr lang="en-US" sz="1800" dirty="0"/>
+          </a:p>
+        </p:txBody>
+      </p:sp>
+      <p:sp>
+        <p:nvSpPr>
+          <p:cNvPr id="12" name="Text 10"/>
+          <p:cNvSpPr txBox="1"/>
+          <p:nvPr/>
+        </p:nvSpPr>
+        <p:spPr>
+          <a:xfrm>
+            <a:off x="548640" y="4846320"/>
+            <a:ext cx="11064240" cy="731520"/>
+          </a:xfrm>
+          <a:prstGeom prst="rect">
+            <a:avLst/>
+          </a:prstGeom>
+          <a:noFill/>
+          <a:ln/>
+        </p:spPr>
+        <p:txBody>
+          <a:bodyPr wrap="square" lIns="0" tIns="0" rIns="0" bIns="0" rtlCol="0" anchor="ctr"/>
+          <a:lstStyle/>
+          <a:p>
+            <a:pPr indent="0" marL="0">
+              <a:buNone/>
+            </a:pPr>
+            <a:r>
+              <a:rPr lang="en-US" sz="1800" dirty="0">
+                <a:solidFill>
+                  <a:schemeClr val="tx1"/>
+                </a:solidFill>
+              </a:rPr>
+              <a:t>Discovery must find what each customer's payments show; the plan must mark exactly the legal duties; drafts must state no date or fee the rules do not; a changed letter must need approving again.</a:t>
+            </a:r>
+            <a:endParaRPr lang="en-US" sz="1800" dirty="0"/>
+          </a:p>
+        </p:txBody>
+      </p:sp>
+      <p:sp>
+        <p:nvSpPr>
+          <p:cNvPr id="13" name="Text 11"/>
+          <p:cNvSpPr txBox="1"/>
+          <p:nvPr/>
+        </p:nvSpPr>
+        <p:spPr>
+          <a:xfrm>
+            <a:off x="548640" y="5760720"/>
+            <a:ext cx="11064240" cy="320040"/>
+          </a:xfrm>
+          <a:prstGeom prst="rect">
+            <a:avLst/>
+          </a:prstGeom>
+          <a:noFill/>
+          <a:ln/>
+        </p:spPr>
+        <p:txBody>
+          <a:bodyPr wrap="square" lIns="0" tIns="0" rIns="0" bIns="0" rtlCol="0" anchor="ctr"/>
+          <a:lstStyle/>
+          <a:p>
+            <a:pPr indent="0" marL="0">
+              <a:buNone/>
+            </a:pPr>
+            <a:r>
+              <a:rPr lang="en-US" sz="1100" dirty="0">
+                <a:solidFill>
+                  <a:schemeClr val="accent6"/>
+                </a:solidFill>
+              </a:rPr>
+              <a:t>Facts checked by keyword, judgement checked by an LLM judge. The leak (one customer's session reading another's payments) now has a regression test.</a:t>
+            </a:r>
+            <a:endParaRPr lang="en-US" sz="1100" dirty="0"/>
+          </a:p>
+        </p:txBody>
+      </p:sp>
+      <p:sp>
+        <p:nvSpPr>
+          <p:cNvPr id="25" name="Slide Number Placeholder 0"/>
+          <p:cNvSpPr>
+            <a:spLocks noGrp="1"/>
+          </p:cNvSpPr>
+          <p:nvPr>
+            <p:ph type="sldNum" sz="quarter" idx="4294967295"/>
+          </p:nvPr>
+        </p:nvSpPr>
+        <p:spPr>
+          <a:xfrm>
+            <a:off x="11247120" y="6400800"/>
+            <a:ext cx="457200" cy="274320"/>
+          </a:xfrm>
+          <a:prstGeom prst="rect">
+            <a:avLst/>
+          </a:prstGeom>
+          <a:extLst>
+            <a:ext uri="{C572A759-6A51-4108-AA02-DFA0A04FC94B}">
+              <ma14:wrappingTextBoxFlag xmlns:ma14="http://schemas.microsoft.com/office/mac/drawingml/2011/main" val="0"/>
+            </a:ext>
+          </a:extLst>
+        </p:spPr>
+        <p:txBody>
+          <a:bodyPr/>
+          <a:lstStyle>
+            <a:lvl1pPr>
+              <a:defRPr sz="1000">
+                <a:solidFill>
+                  <a:schemeClr val="accent6"/>
+                </a:solidFill>
+              </a:defRPr>
+            </a:lvl1pPr>
+          </a:lstStyle>
+          <a:p>
+            <a:pPr algn="r"/>
+            <a:fld id="{F7021451-1387-4CA6-816F-3879F97B5CBC}" type="slidenum">
+              <a:rPr b="0" lang="en-US"/>
+              <a:t>2</a:t>
+            </a:fld>
+            <a:endParaRPr lang="en-US"/>
+          </a:p>
+        </p:txBody>
+      </p:sp>
+    </p:spTree>
+  </p:cSld>
+  <p:clrMapOvr>
+    <a:masterClrMapping/>
+  </p:clrMapOvr>
+</p:sld>
+</file>
+
+<file path=ppt/slides/slide16.xml><?xml version="1.0" encoding="utf-8"?>
 <p:sld xmlns:a="http://schemas.openxmlformats.org/drawingml/2006/main" xmlns:r="http://schemas.openxmlformats.org/officeDocument/2006/relationships" xmlns:p="http://schemas.openxmlformats.org/presentationml/2006/main">
   <p:cSld name="Slide 14">
     <p:spTree>
@@ -7411,7 +8550,7 @@
                 <a:ea typeface="Cambria" pitchFamily="34" charset="-122"/>
                 <a:cs typeface="Cambria" pitchFamily="34" charset="-120"/>
               </a:rPr>
-              <a:t>24</a:t>
+              <a:t>25</a:t>
             </a:r>
             <a:endParaRPr lang="en-US" sz="5400" dirty="0"/>
           </a:p>
@@ -7508,7 +8647,7 @@
                 <a:ea typeface="Cambria" pitchFamily="34" charset="-122"/>
                 <a:cs typeface="Cambria" pitchFamily="34" charset="-120"/>
               </a:rPr>
-              <a:t>115</a:t>
+              <a:t>148</a:t>
             </a:r>
             <a:endParaRPr lang="en-US" sz="5400" dirty="0"/>
           </a:p>
@@ -7544,7 +8683,7 @@
                   <a:schemeClr val="tx1"/>
                 </a:solidFill>
               </a:rPr>
-              <a:t>automated tests</a:t>
+              <a:t>unit tests</a:t>
             </a:r>
             <a:endParaRPr lang="en-US" sz="1700" dirty="0"/>
           </a:p>
@@ -7605,7 +8744,7 @@
                 <a:ea typeface="Cambria" pitchFamily="34" charset="-122"/>
                 <a:cs typeface="Cambria" pitchFamily="34" charset="-120"/>
               </a:rPr>
-              <a:t>6</a:t>
+              <a:t>12</a:t>
             </a:r>
             <a:endParaRPr lang="en-US" sz="5400" dirty="0"/>
           </a:p>
@@ -7641,7 +8780,7 @@
                   <a:schemeClr val="tx1"/>
                 </a:solidFill>
               </a:rPr>
-              <a:t>test journeys</a:t>
+              <a:t>live AI evaluation runs</a:t>
             </a:r>
             <a:endParaRPr lang="en-US" sz="1700" dirty="0"/>
           </a:p>
@@ -7797,7 +8936,7 @@
 </p:sld>
 </file>
 
-<file path=ppt/slides/slide15.xml><?xml version="1.0" encoding="utf-8"?>
+<file path=ppt/slides/slide17.xml><?xml version="1.0" encoding="utf-8"?>
 <p:sld xmlns:a="http://schemas.openxmlformats.org/drawingml/2006/main" xmlns:r="http://schemas.openxmlformats.org/officeDocument/2006/relationships" xmlns:p="http://schemas.openxmlformats.org/presentationml/2006/main">
   <p:cSld name="Slide 15">
     <p:spTree>
@@ -8495,7 +9634,7 @@
 </p:sld>
 </file>
 
-<file path=ppt/slides/slide16.xml><?xml version="1.0" encoding="utf-8"?>
+<file path=ppt/slides/slide18.xml><?xml version="1.0" encoding="utf-8"?>
 <p:sld xmlns:a="http://schemas.openxmlformats.org/drawingml/2006/main" xmlns:r="http://schemas.openxmlformats.org/officeDocument/2006/relationships" xmlns:p="http://schemas.openxmlformats.org/presentationml/2006/main">
   <p:cSld name="Slide 16">
     <p:spTree>
@@ -9302,7 +10441,7 @@
 </p:sld>
 </file>
 
-<file path=ppt/slides/slide17.xml><?xml version="1.0" encoding="utf-8"?>
+<file path=ppt/slides/slide19.xml><?xml version="1.0" encoding="utf-8"?>
 <p:sld xmlns:a="http://schemas.openxmlformats.org/drawingml/2006/main" xmlns:r="http://schemas.openxmlformats.org/officeDocument/2006/relationships" xmlns:p="http://schemas.openxmlformats.org/presentationml/2006/main">
   <p:cSld name="Slide 17">
     <p:spTree>
@@ -9389,7 +10528,7 @@
                   <a:schemeClr val="accent4"/>
                 </a:solidFill>
               </a:rPr>
-              <a:t>Live demo in nsflow: hackathon/house_move</a:t>
+              <a:t>Live demo: the House Move app and nsflow</a:t>
             </a:r>
             <a:endParaRPr lang="en-US" sz="2200" dirty="0"/>
           </a:p>
@@ -10481,7 +11620,7 @@
                   <a:schemeClr val="tx1"/>
                 </a:solidFill>
               </a:rPr>
-              <a:t>Read and approve each draft in your portal, or with a code in the chat</a:t>
+              <a:t>Approve all, or approve, change or skip each, in the app or the chat</a:t>
             </a:r>
             <a:endParaRPr lang="en-US" sz="1400" dirty="0"/>
           </a:p>
@@ -10597,7 +11736,7 @@
                   <a:schemeClr val="tx1"/>
                 </a:solidFill>
               </a:rPr>
-              <a:t>Sends, replies and replans when the date moves</a:t>
+              <a:t>Sends, replans, and hands you ready-made packs</a:t>
             </a:r>
             <a:endParaRPr lang="en-US" sz="1400" dirty="0"/>
           </a:p>
@@ -11318,7 +12457,7 @@
                   <a:schemeClr val="tx1"/>
                 </a:solidFill>
               </a:rPr>
-              <a:t>Resume any time with a case reference; delete on request</a:t>
+              <a:t>Come back with your case reference and a resume code; delete on request</a:t>
             </a:r>
             <a:endParaRPr lang="en-US" sz="1700" dirty="0"/>
           </a:p>
@@ -12204,7 +13343,7 @@
                   <a:schemeClr val="tx2"/>
                 </a:solidFill>
               </a:rPr>
-              <a:t>Demo customer: 12 providers found, including the forgotten pet insurance. Anything below 70% confidence is asked, not assumed.</a:t>
+              <a:t>Demo customer: 14 organisations found, including the forgotten pet insurance and a credit card. Anything below 70% confidence is asked, not assumed.</a:t>
             </a:r>
             <a:endParaRPr lang="en-US" sz="1600" dirty="0"/>
           </a:p>
@@ -12786,7 +13925,7 @@
                   <a:schemeClr val="tx1"/>
                 </a:solidFill>
               </a:rPr>
-              <a:t>Which obligations apply (24 rules, each with a source)</a:t>
+              <a:t>Which obligations apply (25 rules, each with a source)</a:t>
             </a:r>
             <a:endParaRPr lang="en-US" sz="1600" dirty="0"/>
           </a:p>
